--- a/vis/reports/2026-02-19_projectUpdate_1_jmoran.pptx
+++ b/vis/reports/2026-02-19_projectUpdate_1_jmoran.pptx
@@ -5,7 +5,7 @@
     <p:sldMasterId id="2147483648" r:id="rId1"/>
   </p:sldMasterIdLst>
   <p:notesMasterIdLst>
-    <p:notesMasterId r:id="rId13"/>
+    <p:notesMasterId r:id="rId14"/>
   </p:notesMasterIdLst>
   <p:sldIdLst>
     <p:sldId id="256" r:id="rId2"/>
@@ -18,7 +18,8 @@
     <p:sldId id="264" r:id="rId9"/>
     <p:sldId id="265" r:id="rId10"/>
     <p:sldId id="266" r:id="rId11"/>
-    <p:sldId id="260" r:id="rId12"/>
+    <p:sldId id="267" r:id="rId12"/>
+    <p:sldId id="260" r:id="rId13"/>
   </p:sldIdLst>
   <p:sldSz cx="12192000" cy="6858000"/>
   <p:notesSz cx="6858000" cy="9144000"/>
@@ -4210,8 +4211,8 @@
         </p:nvSpPr>
         <p:spPr>
           <a:xfrm>
-            <a:off x="5198295" y="3239170"/>
-            <a:ext cx="6616011" cy="1277273"/>
+            <a:off x="5198295" y="3577498"/>
+            <a:ext cx="6616011" cy="1000274"/>
           </a:xfrm>
           <a:prstGeom prst="rect">
             <a:avLst/>
@@ -4329,7 +4330,7 @@
                 <a:spcPts val="600"/>
               </a:spcAft>
             </a:pPr>
-            <a:endParaRPr lang="en-US" sz="2400" b="1">
+            <a:endParaRPr lang="en-US" sz="2400" b="1" dirty="0">
               <a:solidFill>
                 <a:schemeClr val="bg1"/>
               </a:solidFill>
@@ -4350,14 +4351,14 @@
               </a:spcAft>
             </a:pPr>
             <a:r>
-              <a:rPr lang="en-US" sz="2400">
+              <a:rPr lang="en-US" sz="3000" dirty="0">
                 <a:solidFill>
                   <a:schemeClr val="bg1"/>
                 </a:solidFill>
-                <a:latin typeface="Courier New" panose="02070309020205020404" pitchFamily="49" charset="0"/>
+                <a:latin typeface="Georgia Pro" panose="02040502050405020303" pitchFamily="18" charset="0"/>
                 <a:cs typeface="Courier New" panose="02070309020205020404" pitchFamily="49" charset="0"/>
               </a:rPr>
-              <a:t>Bacterial anti-phage structural homology: update 1</a:t>
+              <a:t>IEI project: update 1</a:t>
             </a:r>
           </a:p>
         </p:txBody>
@@ -4566,7 +4567,7 @@
               </a:spcAft>
             </a:pPr>
             <a:r>
-              <a:rPr lang="en-US" sz="1400">
+              <a:rPr lang="en-US" sz="1400" dirty="0">
                 <a:solidFill>
                   <a:schemeClr val="bg1"/>
                 </a:solidFill>
@@ -4589,7 +4590,7 @@
               </a:spcAft>
             </a:pPr>
             <a:r>
-              <a:rPr lang="en-US" sz="1400">
+              <a:rPr lang="en-US" sz="1400" dirty="0">
                 <a:solidFill>
                   <a:schemeClr val="bg1"/>
                 </a:solidFill>
@@ -4612,7 +4613,7 @@
               </a:spcAft>
             </a:pPr>
             <a:r>
-              <a:rPr lang="en-US" sz="1400">
+              <a:rPr lang="en-US" sz="1400" dirty="0">
                 <a:solidFill>
                   <a:schemeClr val="bg1"/>
                 </a:solidFill>
@@ -5139,7 +5140,13 @@
   <p:cSld>
     <p:spTree>
       <p:nvGrpSpPr>
-        <p:cNvPr id="1" name=""/>
+        <p:cNvPr id="1" name="">
+          <a:extLst>
+            <a:ext uri="{FF2B5EF4-FFF2-40B4-BE49-F238E27FC236}">
+              <a16:creationId xmlns:a16="http://schemas.microsoft.com/office/drawing/2014/main" id="{43567E2B-84B7-B893-BD6B-69007979D069}"/>
+            </a:ext>
+          </a:extLst>
+        </p:cNvPr>
         <p:cNvGrpSpPr/>
         <p:nvPr/>
       </p:nvGrpSpPr>
@@ -5156,7 +5163,7 @@
           <p:cNvPr id="5" name="Rectangle: Rounded Corners 4">
             <a:extLst>
               <a:ext uri="{FF2B5EF4-FFF2-40B4-BE49-F238E27FC236}">
-                <a16:creationId xmlns:a16="http://schemas.microsoft.com/office/drawing/2014/main" id="{5A67C029-F809-4563-FEDC-0FE2666AD68F}"/>
+                <a16:creationId xmlns:a16="http://schemas.microsoft.com/office/drawing/2014/main" id="{FE506AB5-3FDE-99AB-1448-A292B80CF786}"/>
               </a:ext>
             </a:extLst>
           </p:cNvPr>
@@ -5304,7 +5311,7 @@
           <p:cNvPr id="6" name="TextBox 5">
             <a:extLst>
               <a:ext uri="{FF2B5EF4-FFF2-40B4-BE49-F238E27FC236}">
-                <a16:creationId xmlns:a16="http://schemas.microsoft.com/office/drawing/2014/main" id="{984295EC-59E3-A151-A598-185D8DFFA3C9}"/>
+                <a16:creationId xmlns:a16="http://schemas.microsoft.com/office/drawing/2014/main" id="{6583F51B-E4DA-C4CB-057C-D787C736EAC8}"/>
               </a:ext>
             </a:extLst>
           </p:cNvPr>
@@ -5328,13 +5335,13 @@
           <a:lstStyle/>
           <a:p>
             <a:r>
-              <a:rPr lang="en-US" sz="2400" b="1">
+              <a:rPr lang="en-US" sz="2400" b="1" dirty="0">
                 <a:solidFill>
                   <a:schemeClr val="bg1"/>
                 </a:solidFill>
                 <a:latin typeface="Georgia Pro" panose="02040502050405020303" pitchFamily="18" charset="0"/>
               </a:rPr>
-              <a:t>References</a:t>
+              <a:t>Acknowledgements</a:t>
             </a:r>
           </a:p>
         </p:txBody>
@@ -5344,7 +5351,7 @@
           <p:cNvPr id="7" name="Slide Number Placeholder 6">
             <a:extLst>
               <a:ext uri="{FF2B5EF4-FFF2-40B4-BE49-F238E27FC236}">
-                <a16:creationId xmlns:a16="http://schemas.microsoft.com/office/drawing/2014/main" id="{4AA63B0A-77DC-F94E-1603-6415DC566DB9}"/>
+                <a16:creationId xmlns:a16="http://schemas.microsoft.com/office/drawing/2014/main" id="{1ECF2186-8BC3-B8BD-FDBA-C2EF68B661F0}"/>
               </a:ext>
             </a:extLst>
           </p:cNvPr>
@@ -5364,6 +5371,464 @@
               <a:rPr lang="en-CA" smtClean="0"/>
               <a:pPr/>
               <a:t>11</a:t>
+            </a:fld>
+            <a:endParaRPr lang="en-CA" sz="1400"/>
+          </a:p>
+        </p:txBody>
+      </p:sp>
+      <p:sp>
+        <p:nvSpPr>
+          <p:cNvPr id="8" name="TextBox 7">
+            <a:extLst>
+              <a:ext uri="{FF2B5EF4-FFF2-40B4-BE49-F238E27FC236}">
+                <a16:creationId xmlns:a16="http://schemas.microsoft.com/office/drawing/2014/main" id="{DCFC6D50-D703-886B-2FD0-5E8A818B9311}"/>
+              </a:ext>
+            </a:extLst>
+          </p:cNvPr>
+          <p:cNvSpPr txBox="1"/>
+          <p:nvPr/>
+        </p:nvSpPr>
+        <p:spPr>
+          <a:xfrm>
+            <a:off x="845607" y="1725087"/>
+            <a:ext cx="4888217" cy="1277273"/>
+          </a:xfrm>
+          <a:prstGeom prst="rect">
+            <a:avLst/>
+          </a:prstGeom>
+          <a:noFill/>
+        </p:spPr>
+        <p:txBody>
+          <a:bodyPr wrap="square" rtlCol="0">
+            <a:spAutoFit/>
+          </a:bodyPr>
+          <a:lstStyle/>
+          <a:p>
+            <a:pPr lvl="0">
+              <a:spcAft>
+                <a:spcPts val="600"/>
+              </a:spcAft>
+            </a:pPr>
+            <a:r>
+              <a:rPr lang="en-US" dirty="0">
+                <a:latin typeface="Georgia Pro" panose="02040502050405020303" pitchFamily="18" charset="0"/>
+              </a:rPr>
+              <a:t>The Centre for Applied Genomics (TCAG)</a:t>
+            </a:r>
+          </a:p>
+          <a:p>
+            <a:pPr marL="285750" lvl="0" indent="-285750">
+              <a:buFont typeface="Arial" panose="020B0604020202020204" pitchFamily="34" charset="0"/>
+              <a:buChar char="•"/>
+            </a:pPr>
+            <a:r>
+              <a:rPr lang="en-US" dirty="0">
+                <a:latin typeface="Georgia Pro" panose="02040502050405020303" pitchFamily="18" charset="0"/>
+              </a:rPr>
+              <a:t>Vinicius Furlan</a:t>
+            </a:r>
+          </a:p>
+          <a:p>
+            <a:pPr marL="285750" lvl="0" indent="-285750">
+              <a:buFont typeface="Arial" panose="020B0604020202020204" pitchFamily="34" charset="0"/>
+              <a:buChar char="•"/>
+            </a:pPr>
+            <a:r>
+              <a:rPr lang="en-US" dirty="0">
+                <a:latin typeface="Georgia Pro" panose="02040502050405020303" pitchFamily="18" charset="0"/>
+              </a:rPr>
+              <a:t>Dr. Bank Engchuan</a:t>
+            </a:r>
+          </a:p>
+          <a:p>
+            <a:pPr marL="285750" lvl="0" indent="-285750">
+              <a:buFont typeface="Arial" panose="020B0604020202020204" pitchFamily="34" charset="0"/>
+              <a:buChar char="•"/>
+            </a:pPr>
+            <a:r>
+              <a:rPr lang="en-US" dirty="0">
+                <a:latin typeface="Georgia Pro" panose="02040502050405020303" pitchFamily="18" charset="0"/>
+              </a:rPr>
+              <a:t>Professor Stephen Scherer</a:t>
+            </a:r>
+          </a:p>
+        </p:txBody>
+      </p:sp>
+      <p:sp>
+        <p:nvSpPr>
+          <p:cNvPr id="2" name="TextBox 1">
+            <a:extLst>
+              <a:ext uri="{FF2B5EF4-FFF2-40B4-BE49-F238E27FC236}">
+                <a16:creationId xmlns:a16="http://schemas.microsoft.com/office/drawing/2014/main" id="{449A1820-1658-1584-3C9A-25ACF6BB0BAF}"/>
+              </a:ext>
+            </a:extLst>
+          </p:cNvPr>
+          <p:cNvSpPr txBox="1"/>
+          <p:nvPr/>
+        </p:nvSpPr>
+        <p:spPr>
+          <a:xfrm>
+            <a:off x="845608" y="3429000"/>
+            <a:ext cx="5146401" cy="1000274"/>
+          </a:xfrm>
+          <a:prstGeom prst="rect">
+            <a:avLst/>
+          </a:prstGeom>
+          <a:noFill/>
+        </p:spPr>
+        <p:txBody>
+          <a:bodyPr wrap="square" rtlCol="0">
+            <a:spAutoFit/>
+          </a:bodyPr>
+          <a:lstStyle/>
+          <a:p>
+            <a:pPr lvl="0">
+              <a:spcAft>
+                <a:spcPts val="600"/>
+              </a:spcAft>
+            </a:pPr>
+            <a:r>
+              <a:rPr lang="en-US" dirty="0">
+                <a:latin typeface="Georgia Pro" panose="02040502050405020303" pitchFamily="18" charset="0"/>
+              </a:rPr>
+              <a:t>The Centre for Computational Medicine (CCM)</a:t>
+            </a:r>
+          </a:p>
+          <a:p>
+            <a:pPr marL="285750" lvl="0" indent="-285750">
+              <a:buFont typeface="Arial" panose="020B0604020202020204" pitchFamily="34" charset="0"/>
+              <a:buChar char="•"/>
+            </a:pPr>
+            <a:r>
+              <a:rPr lang="en-US" dirty="0">
+                <a:latin typeface="Georgia Pro" panose="02040502050405020303" pitchFamily="18" charset="0"/>
+              </a:rPr>
+              <a:t>Anjali Vain</a:t>
+            </a:r>
+          </a:p>
+          <a:p>
+            <a:pPr marL="285750" lvl="0" indent="-285750">
+              <a:buFont typeface="Arial" panose="020B0604020202020204" pitchFamily="34" charset="0"/>
+              <a:buChar char="•"/>
+            </a:pPr>
+            <a:r>
+              <a:rPr lang="en-US" dirty="0">
+                <a:latin typeface="Georgia Pro" panose="02040502050405020303" pitchFamily="18" charset="0"/>
+              </a:rPr>
+              <a:t>Arteen Torabi-Marashi </a:t>
+            </a:r>
+          </a:p>
+        </p:txBody>
+      </p:sp>
+      <p:sp>
+        <p:nvSpPr>
+          <p:cNvPr id="3" name="TextBox 2">
+            <a:extLst>
+              <a:ext uri="{FF2B5EF4-FFF2-40B4-BE49-F238E27FC236}">
+                <a16:creationId xmlns:a16="http://schemas.microsoft.com/office/drawing/2014/main" id="{B859C9BD-6303-D18F-9C17-CBC1F9EB9620}"/>
+              </a:ext>
+            </a:extLst>
+          </p:cNvPr>
+          <p:cNvSpPr txBox="1"/>
+          <p:nvPr/>
+        </p:nvSpPr>
+        <p:spPr>
+          <a:xfrm>
+            <a:off x="845608" y="4855914"/>
+            <a:ext cx="5146401" cy="1000274"/>
+          </a:xfrm>
+          <a:prstGeom prst="rect">
+            <a:avLst/>
+          </a:prstGeom>
+          <a:noFill/>
+        </p:spPr>
+        <p:txBody>
+          <a:bodyPr wrap="square" rtlCol="0">
+            <a:spAutoFit/>
+          </a:bodyPr>
+          <a:lstStyle/>
+          <a:p>
+            <a:pPr lvl="0">
+              <a:spcAft>
+                <a:spcPts val="600"/>
+              </a:spcAft>
+            </a:pPr>
+            <a:r>
+              <a:rPr lang="en-US" dirty="0">
+                <a:latin typeface="Georgia Pro" panose="02040502050405020303" pitchFamily="18" charset="0"/>
+              </a:rPr>
+              <a:t>IEI project collaborators</a:t>
+            </a:r>
+          </a:p>
+          <a:p>
+            <a:pPr marL="285750" lvl="0" indent="-285750">
+              <a:buFont typeface="Arial" panose="020B0604020202020204" pitchFamily="34" charset="0"/>
+              <a:buChar char="•"/>
+            </a:pPr>
+            <a:r>
+              <a:rPr lang="en-US" dirty="0">
+                <a:latin typeface="Georgia Pro" panose="02040502050405020303" pitchFamily="18" charset="0"/>
+              </a:rPr>
+              <a:t>Dr. Chantel Trost</a:t>
+            </a:r>
+          </a:p>
+          <a:p>
+            <a:pPr marL="285750" lvl="0" indent="-285750">
+              <a:buFont typeface="Arial" panose="020B0604020202020204" pitchFamily="34" charset="0"/>
+              <a:buChar char="•"/>
+            </a:pPr>
+            <a:r>
+              <a:rPr lang="en-US" dirty="0">
+                <a:latin typeface="Georgia Pro" panose="02040502050405020303" pitchFamily="18" charset="0"/>
+              </a:rPr>
+              <a:t>Dr. Christian Marshall</a:t>
+            </a:r>
+          </a:p>
+        </p:txBody>
+      </p:sp>
+    </p:spTree>
+    <p:extLst>
+      <p:ext uri="{BB962C8B-B14F-4D97-AF65-F5344CB8AC3E}">
+        <p14:creationId xmlns:p14="http://schemas.microsoft.com/office/powerpoint/2010/main" val="1395744058"/>
+      </p:ext>
+    </p:extLst>
+  </p:cSld>
+  <p:clrMapOvr>
+    <a:masterClrMapping/>
+  </p:clrMapOvr>
+</p:sld>
+</file>
+
+<file path=ppt/slides/slide12.xml><?xml version="1.0" encoding="utf-8"?>
+<p:sld xmlns:a="http://schemas.openxmlformats.org/drawingml/2006/main" xmlns:r="http://schemas.openxmlformats.org/officeDocument/2006/relationships" xmlns:p="http://schemas.openxmlformats.org/presentationml/2006/main">
+  <p:cSld>
+    <p:spTree>
+      <p:nvGrpSpPr>
+        <p:cNvPr id="1" name=""/>
+        <p:cNvGrpSpPr/>
+        <p:nvPr/>
+      </p:nvGrpSpPr>
+      <p:grpSpPr>
+        <a:xfrm>
+          <a:off x="0" y="0"/>
+          <a:ext cx="0" cy="0"/>
+          <a:chOff x="0" y="0"/>
+          <a:chExt cx="0" cy="0"/>
+        </a:xfrm>
+      </p:grpSpPr>
+      <p:sp>
+        <p:nvSpPr>
+          <p:cNvPr id="5" name="Rectangle: Rounded Corners 4">
+            <a:extLst>
+              <a:ext uri="{FF2B5EF4-FFF2-40B4-BE49-F238E27FC236}">
+                <a16:creationId xmlns:a16="http://schemas.microsoft.com/office/drawing/2014/main" id="{5A67C029-F809-4563-FEDC-0FE2666AD68F}"/>
+              </a:ext>
+            </a:extLst>
+          </p:cNvPr>
+          <p:cNvSpPr/>
+          <p:nvPr/>
+        </p:nvSpPr>
+        <p:spPr>
+          <a:xfrm>
+            <a:off x="845609" y="649223"/>
+            <a:ext cx="4704799" cy="649225"/>
+          </a:xfrm>
+          <a:prstGeom prst="roundRect">
+            <a:avLst/>
+          </a:prstGeom>
+          <a:solidFill>
+            <a:srgbClr val="0162B3"/>
+          </a:solidFill>
+          <a:ln>
+            <a:solidFill>
+              <a:srgbClr val="0162B3"/>
+            </a:solidFill>
+          </a:ln>
+        </p:spPr>
+        <p:style>
+          <a:lnRef idx="2">
+            <a:schemeClr val="accent1">
+              <a:shade val="50000"/>
+            </a:schemeClr>
+          </a:lnRef>
+          <a:fillRef idx="1">
+            <a:schemeClr val="accent1"/>
+          </a:fillRef>
+          <a:effectRef idx="0">
+            <a:schemeClr val="accent1"/>
+          </a:effectRef>
+          <a:fontRef idx="minor">
+            <a:schemeClr val="lt1"/>
+          </a:fontRef>
+        </p:style>
+        <p:txBody>
+          <a:bodyPr rtlCol="0" anchor="ctr"/>
+          <a:lstStyle>
+            <a:defPPr>
+              <a:defRPr lang="en-US"/>
+            </a:defPPr>
+            <a:lvl1pPr marL="0" algn="l" defTabSz="914400" rtl="0" eaLnBrk="1" latinLnBrk="0" hangingPunct="1">
+              <a:defRPr sz="1800" kern="1200">
+                <a:solidFill>
+                  <a:schemeClr val="lt1"/>
+                </a:solidFill>
+                <a:latin typeface="+mn-lt"/>
+                <a:ea typeface="+mn-ea"/>
+                <a:cs typeface="+mn-cs"/>
+              </a:defRPr>
+            </a:lvl1pPr>
+            <a:lvl2pPr marL="457200" algn="l" defTabSz="914400" rtl="0" eaLnBrk="1" latinLnBrk="0" hangingPunct="1">
+              <a:defRPr sz="1800" kern="1200">
+                <a:solidFill>
+                  <a:schemeClr val="lt1"/>
+                </a:solidFill>
+                <a:latin typeface="+mn-lt"/>
+                <a:ea typeface="+mn-ea"/>
+                <a:cs typeface="+mn-cs"/>
+              </a:defRPr>
+            </a:lvl2pPr>
+            <a:lvl3pPr marL="914400" algn="l" defTabSz="914400" rtl="0" eaLnBrk="1" latinLnBrk="0" hangingPunct="1">
+              <a:defRPr sz="1800" kern="1200">
+                <a:solidFill>
+                  <a:schemeClr val="lt1"/>
+                </a:solidFill>
+                <a:latin typeface="+mn-lt"/>
+                <a:ea typeface="+mn-ea"/>
+                <a:cs typeface="+mn-cs"/>
+              </a:defRPr>
+            </a:lvl3pPr>
+            <a:lvl4pPr marL="1371600" algn="l" defTabSz="914400" rtl="0" eaLnBrk="1" latinLnBrk="0" hangingPunct="1">
+              <a:defRPr sz="1800" kern="1200">
+                <a:solidFill>
+                  <a:schemeClr val="lt1"/>
+                </a:solidFill>
+                <a:latin typeface="+mn-lt"/>
+                <a:ea typeface="+mn-ea"/>
+                <a:cs typeface="+mn-cs"/>
+              </a:defRPr>
+            </a:lvl4pPr>
+            <a:lvl5pPr marL="1828800" algn="l" defTabSz="914400" rtl="0" eaLnBrk="1" latinLnBrk="0" hangingPunct="1">
+              <a:defRPr sz="1800" kern="1200">
+                <a:solidFill>
+                  <a:schemeClr val="lt1"/>
+                </a:solidFill>
+                <a:latin typeface="+mn-lt"/>
+                <a:ea typeface="+mn-ea"/>
+                <a:cs typeface="+mn-cs"/>
+              </a:defRPr>
+            </a:lvl5pPr>
+            <a:lvl6pPr marL="2286000" algn="l" defTabSz="914400" rtl="0" eaLnBrk="1" latinLnBrk="0" hangingPunct="1">
+              <a:defRPr sz="1800" kern="1200">
+                <a:solidFill>
+                  <a:schemeClr val="lt1"/>
+                </a:solidFill>
+                <a:latin typeface="+mn-lt"/>
+                <a:ea typeface="+mn-ea"/>
+                <a:cs typeface="+mn-cs"/>
+              </a:defRPr>
+            </a:lvl6pPr>
+            <a:lvl7pPr marL="2743200" algn="l" defTabSz="914400" rtl="0" eaLnBrk="1" latinLnBrk="0" hangingPunct="1">
+              <a:defRPr sz="1800" kern="1200">
+                <a:solidFill>
+                  <a:schemeClr val="lt1"/>
+                </a:solidFill>
+                <a:latin typeface="+mn-lt"/>
+                <a:ea typeface="+mn-ea"/>
+                <a:cs typeface="+mn-cs"/>
+              </a:defRPr>
+            </a:lvl7pPr>
+            <a:lvl8pPr marL="3200400" algn="l" defTabSz="914400" rtl="0" eaLnBrk="1" latinLnBrk="0" hangingPunct="1">
+              <a:defRPr sz="1800" kern="1200">
+                <a:solidFill>
+                  <a:schemeClr val="lt1"/>
+                </a:solidFill>
+                <a:latin typeface="+mn-lt"/>
+                <a:ea typeface="+mn-ea"/>
+                <a:cs typeface="+mn-cs"/>
+              </a:defRPr>
+            </a:lvl8pPr>
+            <a:lvl9pPr marL="3657600" algn="l" defTabSz="914400" rtl="0" eaLnBrk="1" latinLnBrk="0" hangingPunct="1">
+              <a:defRPr sz="1800" kern="1200">
+                <a:solidFill>
+                  <a:schemeClr val="lt1"/>
+                </a:solidFill>
+                <a:latin typeface="+mn-lt"/>
+                <a:ea typeface="+mn-ea"/>
+                <a:cs typeface="+mn-cs"/>
+              </a:defRPr>
+            </a:lvl9pPr>
+          </a:lstStyle>
+          <a:p>
+            <a:pPr algn="ctr"/>
+            <a:endParaRPr lang="en-CA"/>
+          </a:p>
+        </p:txBody>
+      </p:sp>
+      <p:sp>
+        <p:nvSpPr>
+          <p:cNvPr id="6" name="TextBox 5">
+            <a:extLst>
+              <a:ext uri="{FF2B5EF4-FFF2-40B4-BE49-F238E27FC236}">
+                <a16:creationId xmlns:a16="http://schemas.microsoft.com/office/drawing/2014/main" id="{984295EC-59E3-A151-A598-185D8DFFA3C9}"/>
+              </a:ext>
+            </a:extLst>
+          </p:cNvPr>
+          <p:cNvSpPr txBox="1"/>
+          <p:nvPr/>
+        </p:nvSpPr>
+        <p:spPr>
+          <a:xfrm>
+            <a:off x="987552" y="761737"/>
+            <a:ext cx="3538728" cy="461665"/>
+          </a:xfrm>
+          <a:prstGeom prst="rect">
+            <a:avLst/>
+          </a:prstGeom>
+          <a:noFill/>
+        </p:spPr>
+        <p:txBody>
+          <a:bodyPr wrap="square" rtlCol="0">
+            <a:spAutoFit/>
+          </a:bodyPr>
+          <a:lstStyle/>
+          <a:p>
+            <a:r>
+              <a:rPr lang="en-US" sz="2400" b="1">
+                <a:solidFill>
+                  <a:schemeClr val="bg1"/>
+                </a:solidFill>
+                <a:latin typeface="Georgia Pro" panose="02040502050405020303" pitchFamily="18" charset="0"/>
+              </a:rPr>
+              <a:t>References</a:t>
+            </a:r>
+          </a:p>
+        </p:txBody>
+      </p:sp>
+      <p:sp>
+        <p:nvSpPr>
+          <p:cNvPr id="7" name="Slide Number Placeholder 6">
+            <a:extLst>
+              <a:ext uri="{FF2B5EF4-FFF2-40B4-BE49-F238E27FC236}">
+                <a16:creationId xmlns:a16="http://schemas.microsoft.com/office/drawing/2014/main" id="{4AA63B0A-77DC-F94E-1603-6415DC566DB9}"/>
+              </a:ext>
+            </a:extLst>
+          </p:cNvPr>
+          <p:cNvSpPr>
+            <a:spLocks noGrp="1"/>
+          </p:cNvSpPr>
+          <p:nvPr>
+            <p:ph type="sldNum" sz="quarter" idx="12"/>
+          </p:nvPr>
+        </p:nvSpPr>
+        <p:spPr/>
+        <p:txBody>
+          <a:bodyPr/>
+          <a:lstStyle/>
+          <a:p>
+            <a:fld id="{3899FC77-40C7-4C49-9A19-86BDE9B75E8A}" type="slidenum">
+              <a:rPr lang="en-CA" smtClean="0"/>
+              <a:pPr/>
+              <a:t>12</a:t>
             </a:fld>
             <a:endParaRPr lang="en-CA" sz="1400"/>
           </a:p>
@@ -9752,37 +10217,16 @@
                 <a:latin typeface="Courier New" panose="02070309020205020404" pitchFamily="49" charset="0"/>
                 <a:cs typeface="Courier New" panose="02070309020205020404" pitchFamily="49" charset="0"/>
               </a:rPr>
-              <a:t>DefenseFinder </a:t>
-            </a:r>
-            <a:r>
-              <a:rPr lang="en-US" sz="1400" dirty="0" err="1">
-                <a:latin typeface="Courier New" panose="02070309020205020404" pitchFamily="49" charset="0"/>
-                <a:cs typeface="Courier New" panose="02070309020205020404" pitchFamily="49" charset="0"/>
-              </a:rPr>
-              <a:t>cluster_id</a:t>
-            </a:r>
+              <a:t>DefenseFinder cluster_id ==</a:t>
+            </a:r>
+          </a:p>
+          <a:p>
             <a:r>
               <a:rPr lang="en-US" sz="1400" dirty="0">
                 <a:latin typeface="Courier New" panose="02070309020205020404" pitchFamily="49" charset="0"/>
                 <a:cs typeface="Courier New" panose="02070309020205020404" pitchFamily="49" charset="0"/>
               </a:rPr>
-              <a:t> ==</a:t>
-            </a:r>
-          </a:p>
-          <a:p>
-            <a:r>
-              <a:rPr lang="en-US" sz="1400" dirty="0">
-                <a:latin typeface="Courier New" panose="02070309020205020404" pitchFamily="49" charset="0"/>
-                <a:cs typeface="Courier New" panose="02070309020205020404" pitchFamily="49" charset="0"/>
-              </a:rPr>
-              <a:t>H. sapiens </a:t>
-            </a:r>
-            <a:r>
-              <a:rPr lang="en-US" sz="1400" dirty="0" err="1">
-                <a:latin typeface="Courier New" panose="02070309020205020404" pitchFamily="49" charset="0"/>
-                <a:cs typeface="Courier New" panose="02070309020205020404" pitchFamily="49" charset="0"/>
-              </a:rPr>
-              <a:t>cluster_id</a:t>
+              <a:t>H. sapiens cluster_id</a:t>
             </a:r>
             <a:endParaRPr lang="en-CA" sz="1400" dirty="0">
               <a:latin typeface="Courier New" panose="02070309020205020404" pitchFamily="49" charset="0"/>

--- a/vis/reports/2026-02-19_projectUpdate_1_jmoran.pptx
+++ b/vis/reports/2026-02-19_projectUpdate_1_jmoran.pptx
@@ -5,7 +5,7 @@
     <p:sldMasterId id="2147483648" r:id="rId1"/>
   </p:sldMasterIdLst>
   <p:notesMasterIdLst>
-    <p:notesMasterId r:id="rId14"/>
+    <p:notesMasterId r:id="rId15"/>
   </p:notesMasterIdLst>
   <p:sldIdLst>
     <p:sldId id="256" r:id="rId2"/>
@@ -15,11 +15,12 @@
     <p:sldId id="262" r:id="rId6"/>
     <p:sldId id="261" r:id="rId7"/>
     <p:sldId id="263" r:id="rId8"/>
-    <p:sldId id="264" r:id="rId9"/>
-    <p:sldId id="265" r:id="rId10"/>
-    <p:sldId id="266" r:id="rId11"/>
-    <p:sldId id="267" r:id="rId12"/>
-    <p:sldId id="260" r:id="rId13"/>
+    <p:sldId id="268" r:id="rId9"/>
+    <p:sldId id="264" r:id="rId10"/>
+    <p:sldId id="265" r:id="rId11"/>
+    <p:sldId id="266" r:id="rId12"/>
+    <p:sldId id="267" r:id="rId13"/>
+    <p:sldId id="260" r:id="rId14"/>
   </p:sldIdLst>
   <p:sldSz cx="12192000" cy="6858000"/>
   <p:notesSz cx="6858000" cy="9144000"/>
@@ -528,10 +529,10 @@
           <a:lstStyle/>
           <a:p>
             <a:r>
-              <a:rPr lang="en-US"/>
+              <a:rPr lang="en-US" dirty="0"/>
               <a:t>NOTE: I likely will not go through this slide, as Vinicius should cover this all in greater depth.</a:t>
             </a:r>
-            <a:endParaRPr lang="en-CA"/>
+            <a:endParaRPr lang="en-CA" dirty="0"/>
           </a:p>
         </p:txBody>
       </p:sp>
@@ -646,7 +647,7 @@
           <a:p>
             <a:fld id="{B0C7A837-00D9-4D65-B917-5078A695B722}" type="slidenum">
               <a:rPr lang="en-CA" smtClean="0"/>
-              <a:t>8</a:t>
+              <a:t>9</a:t>
             </a:fld>
             <a:endParaRPr lang="en-CA"/>
           </a:p>
@@ -740,7 +741,7 @@
           <a:p>
             <a:fld id="{B0C7A837-00D9-4D65-B917-5078A695B722}" type="slidenum">
               <a:rPr lang="en-CA" smtClean="0"/>
-              <a:t>9</a:t>
+              <a:t>10</a:t>
             </a:fld>
             <a:endParaRPr lang="en-CA"/>
           </a:p>
@@ -4755,6 +4756,978 @@
   <p:cSld>
     <p:spTree>
       <p:nvGrpSpPr>
+        <p:cNvPr id="1" name=""/>
+        <p:cNvGrpSpPr/>
+        <p:nvPr/>
+      </p:nvGrpSpPr>
+      <p:grpSpPr>
+        <a:xfrm>
+          <a:off x="0" y="0"/>
+          <a:ext cx="0" cy="0"/>
+          <a:chOff x="0" y="0"/>
+          <a:chExt cx="0" cy="0"/>
+        </a:xfrm>
+      </p:grpSpPr>
+      <p:sp>
+        <p:nvSpPr>
+          <p:cNvPr id="4" name="Slide Number Placeholder 3">
+            <a:extLst>
+              <a:ext uri="{FF2B5EF4-FFF2-40B4-BE49-F238E27FC236}">
+                <a16:creationId xmlns:a16="http://schemas.microsoft.com/office/drawing/2014/main" id="{4CCEFCD4-D316-F0B9-8A49-0284EA756802}"/>
+              </a:ext>
+            </a:extLst>
+          </p:cNvPr>
+          <p:cNvSpPr>
+            <a:spLocks noGrp="1"/>
+          </p:cNvSpPr>
+          <p:nvPr>
+            <p:ph type="sldNum" sz="quarter" idx="12"/>
+          </p:nvPr>
+        </p:nvSpPr>
+        <p:spPr/>
+        <p:txBody>
+          <a:bodyPr/>
+          <a:lstStyle/>
+          <a:p>
+            <a:fld id="{3899FC77-40C7-4C49-9A19-86BDE9B75E8A}" type="slidenum">
+              <a:rPr lang="en-CA" smtClean="0"/>
+              <a:pPr/>
+              <a:t>10</a:t>
+            </a:fld>
+            <a:endParaRPr lang="en-CA" sz="1400"/>
+          </a:p>
+        </p:txBody>
+      </p:sp>
+      <p:pic>
+        <p:nvPicPr>
+          <p:cNvPr id="6" name="Picture 5">
+            <a:extLst>
+              <a:ext uri="{FF2B5EF4-FFF2-40B4-BE49-F238E27FC236}">
+                <a16:creationId xmlns:a16="http://schemas.microsoft.com/office/drawing/2014/main" id="{D9CA41CC-BBC5-640E-E309-6E417079B36A}"/>
+              </a:ext>
+            </a:extLst>
+          </p:cNvPr>
+          <p:cNvPicPr>
+            <a:picLocks noChangeAspect="1"/>
+          </p:cNvPicPr>
+          <p:nvPr/>
+        </p:nvPicPr>
+        <p:blipFill>
+          <a:blip r:embed="rId3"/>
+          <a:srcRect l="4394" t="5615" r="12846" b="3898"/>
+          <a:stretch>
+            <a:fillRect/>
+          </a:stretch>
+        </p:blipFill>
+        <p:spPr>
+          <a:xfrm>
+            <a:off x="6576821" y="1998345"/>
+            <a:ext cx="4305301" cy="3990975"/>
+          </a:xfrm>
+          <a:prstGeom prst="rect">
+            <a:avLst/>
+          </a:prstGeom>
+        </p:spPr>
+      </p:pic>
+      <p:sp>
+        <p:nvSpPr>
+          <p:cNvPr id="7" name="TextBox 6">
+            <a:extLst>
+              <a:ext uri="{FF2B5EF4-FFF2-40B4-BE49-F238E27FC236}">
+                <a16:creationId xmlns:a16="http://schemas.microsoft.com/office/drawing/2014/main" id="{8716480E-4A8B-1E19-6056-65D8B92B1E86}"/>
+              </a:ext>
+            </a:extLst>
+          </p:cNvPr>
+          <p:cNvSpPr txBox="1"/>
+          <p:nvPr/>
+        </p:nvSpPr>
+        <p:spPr>
+          <a:xfrm>
+            <a:off x="1659446" y="255884"/>
+            <a:ext cx="4324868" cy="1815882"/>
+          </a:xfrm>
+          <a:prstGeom prst="rect">
+            <a:avLst/>
+          </a:prstGeom>
+          <a:noFill/>
+          <a:ln>
+            <a:solidFill>
+              <a:srgbClr val="4779C6"/>
+            </a:solidFill>
+          </a:ln>
+        </p:spPr>
+        <p:txBody>
+          <a:bodyPr wrap="square" rtlCol="0">
+            <a:spAutoFit/>
+          </a:bodyPr>
+          <a:lstStyle/>
+          <a:p>
+            <a:r>
+              <a:rPr lang="en-US" sz="1400" b="1" dirty="0">
+                <a:solidFill>
+                  <a:srgbClr val="4779C6"/>
+                </a:solidFill>
+                <a:latin typeface="Verdana Pro" panose="020B0604030504040204" pitchFamily="34" charset="0"/>
+                <a:cs typeface="Courier New" panose="02070309020205020404" pitchFamily="49" charset="0"/>
+              </a:rPr>
+              <a:t>Radical S-adenosyl methionine domain containing 2</a:t>
+            </a:r>
+          </a:p>
+          <a:p>
+            <a:endParaRPr lang="en-CA" sz="1400" dirty="0">
+              <a:solidFill>
+                <a:srgbClr val="4779C6"/>
+              </a:solidFill>
+              <a:latin typeface="Verdana Pro" panose="020B0604030504040204" pitchFamily="34" charset="0"/>
+              <a:cs typeface="Courier New" panose="02070309020205020404" pitchFamily="49" charset="0"/>
+            </a:endParaRPr>
+          </a:p>
+          <a:p>
+            <a:r>
+              <a:rPr lang="en-CA" sz="1400" dirty="0">
+                <a:solidFill>
+                  <a:srgbClr val="4779C6"/>
+                </a:solidFill>
+                <a:latin typeface="Verdana Pro" panose="020B0604030504040204" pitchFamily="34" charset="0"/>
+                <a:cs typeface="Courier New" panose="02070309020205020404" pitchFamily="49" charset="0"/>
+              </a:rPr>
+              <a:t>Molecular functions</a:t>
+            </a:r>
+          </a:p>
+          <a:p>
+            <a:pPr marL="285750" indent="-285750">
+              <a:buFont typeface="Arial" panose="020B0604020202020204" pitchFamily="34" charset="0"/>
+              <a:buChar char="•"/>
+            </a:pPr>
+            <a:r>
+              <a:rPr lang="en-CA" sz="1400" dirty="0">
+                <a:solidFill>
+                  <a:srgbClr val="4779C6"/>
+                </a:solidFill>
+                <a:latin typeface="Verdana Pro" panose="020B0604030504040204" pitchFamily="34" charset="0"/>
+                <a:cs typeface="Courier New" panose="02070309020205020404" pitchFamily="49" charset="0"/>
+              </a:rPr>
+              <a:t>Small molecule binding</a:t>
+            </a:r>
+          </a:p>
+          <a:p>
+            <a:endParaRPr lang="en-CA" sz="1400" dirty="0">
+              <a:solidFill>
+                <a:srgbClr val="4779C6"/>
+              </a:solidFill>
+              <a:latin typeface="Verdana Pro" panose="020B0604030504040204" pitchFamily="34" charset="0"/>
+              <a:cs typeface="Courier New" panose="02070309020205020404" pitchFamily="49" charset="0"/>
+            </a:endParaRPr>
+          </a:p>
+          <a:p>
+            <a:r>
+              <a:rPr lang="en-CA" sz="1400" dirty="0">
+                <a:solidFill>
+                  <a:srgbClr val="4779C6"/>
+                </a:solidFill>
+                <a:latin typeface="Verdana Pro" panose="020B0604030504040204" pitchFamily="34" charset="0"/>
+                <a:cs typeface="Courier New" panose="02070309020205020404" pitchFamily="49" charset="0"/>
+              </a:rPr>
+              <a:t>Domains</a:t>
+            </a:r>
+          </a:p>
+          <a:p>
+            <a:pPr marL="285750" indent="-285750">
+              <a:buFont typeface="Arial" panose="020B0604020202020204" pitchFamily="34" charset="0"/>
+              <a:buChar char="•"/>
+            </a:pPr>
+            <a:r>
+              <a:rPr lang="en-CA" sz="1400" dirty="0">
+                <a:solidFill>
+                  <a:srgbClr val="4779C6"/>
+                </a:solidFill>
+                <a:latin typeface="Verdana Pro" panose="020B0604030504040204" pitchFamily="34" charset="0"/>
+                <a:cs typeface="Courier New" panose="02070309020205020404" pitchFamily="49" charset="0"/>
+              </a:rPr>
+              <a:t>RSAD2 and Vipirin antiviral (47-239)</a:t>
+            </a:r>
+          </a:p>
+        </p:txBody>
+      </p:sp>
+      <p:sp>
+        <p:nvSpPr>
+          <p:cNvPr id="8" name="TextBox 7">
+            <a:extLst>
+              <a:ext uri="{FF2B5EF4-FFF2-40B4-BE49-F238E27FC236}">
+                <a16:creationId xmlns:a16="http://schemas.microsoft.com/office/drawing/2014/main" id="{238A68DA-70F2-75E2-91D6-2190B751C350}"/>
+              </a:ext>
+            </a:extLst>
+          </p:cNvPr>
+          <p:cNvSpPr txBox="1"/>
+          <p:nvPr/>
+        </p:nvSpPr>
+        <p:spPr>
+          <a:xfrm>
+            <a:off x="4633359" y="5201749"/>
+            <a:ext cx="3240615" cy="646331"/>
+          </a:xfrm>
+          <a:prstGeom prst="rect">
+            <a:avLst/>
+          </a:prstGeom>
+          <a:noFill/>
+        </p:spPr>
+        <p:txBody>
+          <a:bodyPr wrap="square" rtlCol="0">
+            <a:spAutoFit/>
+          </a:bodyPr>
+          <a:lstStyle/>
+          <a:p>
+            <a:r>
+              <a:rPr lang="en-CA" b="1" dirty="0">
+                <a:solidFill>
+                  <a:srgbClr val="E0913A"/>
+                </a:solidFill>
+                <a:latin typeface="Verdana Pro" panose="020B0604030504040204" pitchFamily="34" charset="0"/>
+                <a:cs typeface="Courier New" panose="02070309020205020404" pitchFamily="49" charset="0"/>
+              </a:rPr>
+              <a:t>A0A2K8UJG1</a:t>
+            </a:r>
+          </a:p>
+          <a:p>
+            <a:r>
+              <a:rPr lang="en-CA" dirty="0">
+                <a:solidFill>
+                  <a:srgbClr val="E0913A"/>
+                </a:solidFill>
+                <a:latin typeface="Verdana Pro" panose="020B0604030504040204" pitchFamily="34" charset="0"/>
+                <a:cs typeface="Courier New" panose="02070309020205020404" pitchFamily="49" charset="0"/>
+              </a:rPr>
+              <a:t>(284 AAs)</a:t>
+            </a:r>
+          </a:p>
+        </p:txBody>
+      </p:sp>
+      <p:sp>
+        <p:nvSpPr>
+          <p:cNvPr id="9" name="TextBox 8">
+            <a:extLst>
+              <a:ext uri="{FF2B5EF4-FFF2-40B4-BE49-F238E27FC236}">
+                <a16:creationId xmlns:a16="http://schemas.microsoft.com/office/drawing/2014/main" id="{E01C6E5A-4274-485B-4F48-0589303AC076}"/>
+              </a:ext>
+            </a:extLst>
+          </p:cNvPr>
+          <p:cNvSpPr txBox="1"/>
+          <p:nvPr/>
+        </p:nvSpPr>
+        <p:spPr>
+          <a:xfrm>
+            <a:off x="6125037" y="1491665"/>
+            <a:ext cx="3901015" cy="646331"/>
+          </a:xfrm>
+          <a:prstGeom prst="rect">
+            <a:avLst/>
+          </a:prstGeom>
+          <a:noFill/>
+        </p:spPr>
+        <p:txBody>
+          <a:bodyPr wrap="square" rtlCol="0">
+            <a:spAutoFit/>
+          </a:bodyPr>
+          <a:lstStyle/>
+          <a:p>
+            <a:r>
+              <a:rPr lang="en-CA" b="1" dirty="0">
+                <a:solidFill>
+                  <a:srgbClr val="4779C6"/>
+                </a:solidFill>
+                <a:latin typeface="Verdana Pro" panose="020B0604030504040204" pitchFamily="34" charset="0"/>
+                <a:cs typeface="Courier New" panose="02070309020205020404" pitchFamily="49" charset="0"/>
+              </a:rPr>
+              <a:t>A0A7P0TA11_HUMAN</a:t>
+            </a:r>
+          </a:p>
+          <a:p>
+            <a:r>
+              <a:rPr lang="en-CA" dirty="0">
+                <a:solidFill>
+                  <a:srgbClr val="4779C6"/>
+                </a:solidFill>
+                <a:latin typeface="Verdana Pro" panose="020B0604030504040204" pitchFamily="34" charset="0"/>
+                <a:cs typeface="Courier New" panose="02070309020205020404" pitchFamily="49" charset="0"/>
+              </a:rPr>
+              <a:t>(239 AAs)</a:t>
+            </a:r>
+          </a:p>
+        </p:txBody>
+      </p:sp>
+      <p:sp>
+        <p:nvSpPr>
+          <p:cNvPr id="13" name="TextBox 12">
+            <a:extLst>
+              <a:ext uri="{FF2B5EF4-FFF2-40B4-BE49-F238E27FC236}">
+                <a16:creationId xmlns:a16="http://schemas.microsoft.com/office/drawing/2014/main" id="{04EAE1D1-13B8-A22C-2B0B-B85661FE96C7}"/>
+              </a:ext>
+            </a:extLst>
+          </p:cNvPr>
+          <p:cNvSpPr txBox="1"/>
+          <p:nvPr/>
+        </p:nvSpPr>
+        <p:spPr>
+          <a:xfrm>
+            <a:off x="9945156" y="2429900"/>
+            <a:ext cx="2246844" cy="954107"/>
+          </a:xfrm>
+          <a:prstGeom prst="rect">
+            <a:avLst/>
+          </a:prstGeom>
+          <a:noFill/>
+        </p:spPr>
+        <p:txBody>
+          <a:bodyPr wrap="square" rtlCol="0">
+            <a:spAutoFit/>
+          </a:bodyPr>
+          <a:lstStyle/>
+          <a:p>
+            <a:r>
+              <a:rPr lang="en-US" sz="1400" dirty="0">
+                <a:latin typeface="Verdana Pro" panose="020B0604030504040204" pitchFamily="34" charset="0"/>
+                <a:cs typeface="Courier New" panose="02070309020205020404" pitchFamily="49" charset="0"/>
+              </a:rPr>
+              <a:t>RMSD: 2.70 Å</a:t>
+            </a:r>
+            <a:endParaRPr lang="en-CA" sz="1400" dirty="0">
+              <a:latin typeface="Verdana Pro" panose="020B0604030504040204" pitchFamily="34" charset="0"/>
+              <a:cs typeface="Courier New" panose="02070309020205020404" pitchFamily="49" charset="0"/>
+            </a:endParaRPr>
+          </a:p>
+          <a:p>
+            <a:r>
+              <a:rPr lang="en-US" sz="1400" dirty="0">
+                <a:latin typeface="Verdana Pro" panose="020B0604030504040204" pitchFamily="34" charset="0"/>
+                <a:cs typeface="Courier New" panose="02070309020205020404" pitchFamily="49" charset="0"/>
+              </a:rPr>
+              <a:t>TM-score: 0.64</a:t>
+            </a:r>
+          </a:p>
+          <a:p>
+            <a:r>
+              <a:rPr lang="en-US" sz="1400" dirty="0">
+                <a:latin typeface="Verdana Pro" panose="020B0604030504040204" pitchFamily="34" charset="0"/>
+                <a:cs typeface="Courier New" panose="02070309020205020404" pitchFamily="49" charset="0"/>
+              </a:rPr>
+              <a:t>Identity: 32%</a:t>
+            </a:r>
+          </a:p>
+          <a:p>
+            <a:r>
+              <a:rPr lang="en-US" sz="1400" dirty="0">
+                <a:latin typeface="Verdana Pro" panose="020B0604030504040204" pitchFamily="34" charset="0"/>
+                <a:cs typeface="Courier New" panose="02070309020205020404" pitchFamily="49" charset="0"/>
+              </a:rPr>
+              <a:t>Aligned residues: 186</a:t>
+            </a:r>
+          </a:p>
+        </p:txBody>
+      </p:sp>
+      <p:sp>
+        <p:nvSpPr>
+          <p:cNvPr id="20" name="TextBox 19">
+            <a:extLst>
+              <a:ext uri="{FF2B5EF4-FFF2-40B4-BE49-F238E27FC236}">
+                <a16:creationId xmlns:a16="http://schemas.microsoft.com/office/drawing/2014/main" id="{C05F8735-064F-BBC8-D640-F8AA7E73374A}"/>
+              </a:ext>
+            </a:extLst>
+          </p:cNvPr>
+          <p:cNvSpPr txBox="1"/>
+          <p:nvPr/>
+        </p:nvSpPr>
+        <p:spPr>
+          <a:xfrm>
+            <a:off x="257489" y="3032363"/>
+            <a:ext cx="4324868" cy="2246769"/>
+          </a:xfrm>
+          <a:prstGeom prst="rect">
+            <a:avLst/>
+          </a:prstGeom>
+          <a:noFill/>
+          <a:ln>
+            <a:solidFill>
+              <a:srgbClr val="E0913A"/>
+            </a:solidFill>
+          </a:ln>
+        </p:spPr>
+        <p:txBody>
+          <a:bodyPr wrap="square" rtlCol="0">
+            <a:spAutoFit/>
+          </a:bodyPr>
+          <a:lstStyle/>
+          <a:p>
+            <a:r>
+              <a:rPr lang="en-US" sz="1400" b="1" dirty="0">
+                <a:solidFill>
+                  <a:srgbClr val="E0913A"/>
+                </a:solidFill>
+                <a:latin typeface="Verdana Pro" panose="020B0604030504040204" pitchFamily="34" charset="0"/>
+                <a:cs typeface="Courier New" panose="02070309020205020404" pitchFamily="49" charset="0"/>
+              </a:rPr>
+              <a:t>S-adenosylmethionine-dependent nucleotide dehydratase (Candidatus Thiodictyon syntrophicum)</a:t>
+            </a:r>
+          </a:p>
+          <a:p>
+            <a:endParaRPr lang="en-US" sz="1400" dirty="0">
+              <a:solidFill>
+                <a:srgbClr val="E0913A"/>
+              </a:solidFill>
+              <a:latin typeface="Verdana Pro" panose="020B0604030504040204" pitchFamily="34" charset="0"/>
+              <a:cs typeface="Courier New" panose="02070309020205020404" pitchFamily="49" charset="0"/>
+            </a:endParaRPr>
+          </a:p>
+          <a:p>
+            <a:r>
+              <a:rPr lang="en-US" sz="1400" dirty="0">
+                <a:solidFill>
+                  <a:srgbClr val="E0913A"/>
+                </a:solidFill>
+                <a:latin typeface="Verdana Pro" panose="020B0604030504040204" pitchFamily="34" charset="0"/>
+                <a:cs typeface="Courier New" panose="02070309020205020404" pitchFamily="49" charset="0"/>
+              </a:rPr>
+              <a:t>Molecular functions</a:t>
+            </a:r>
+          </a:p>
+          <a:p>
+            <a:pPr marL="285750" indent="-285750">
+              <a:buFont typeface="Arial" panose="020B0604020202020204" pitchFamily="34" charset="0"/>
+              <a:buChar char="•"/>
+            </a:pPr>
+            <a:r>
+              <a:rPr lang="en-US" sz="1400" dirty="0">
+                <a:solidFill>
+                  <a:srgbClr val="E0913A"/>
+                </a:solidFill>
+                <a:latin typeface="Verdana Pro" panose="020B0604030504040204" pitchFamily="34" charset="0"/>
+                <a:cs typeface="Courier New" panose="02070309020205020404" pitchFamily="49" charset="0"/>
+              </a:rPr>
+              <a:t>Catalytic activity</a:t>
+            </a:r>
+          </a:p>
+          <a:p>
+            <a:pPr marL="285750" indent="-285750">
+              <a:buFont typeface="Arial" panose="020B0604020202020204" pitchFamily="34" charset="0"/>
+              <a:buChar char="•"/>
+            </a:pPr>
+            <a:r>
+              <a:rPr lang="en-US" sz="1400" dirty="0">
+                <a:solidFill>
+                  <a:srgbClr val="E0913A"/>
+                </a:solidFill>
+                <a:latin typeface="Verdana Pro" panose="020B0604030504040204" pitchFamily="34" charset="0"/>
+                <a:cs typeface="Courier New" panose="02070309020205020404" pitchFamily="49" charset="0"/>
+              </a:rPr>
+              <a:t>Small molecule binding</a:t>
+            </a:r>
+          </a:p>
+          <a:p>
+            <a:endParaRPr lang="en-US" sz="1400" dirty="0">
+              <a:solidFill>
+                <a:srgbClr val="E0913A"/>
+              </a:solidFill>
+              <a:latin typeface="Verdana Pro" panose="020B0604030504040204" pitchFamily="34" charset="0"/>
+              <a:cs typeface="Courier New" panose="02070309020205020404" pitchFamily="49" charset="0"/>
+            </a:endParaRPr>
+          </a:p>
+          <a:p>
+            <a:r>
+              <a:rPr lang="en-US" sz="1400" dirty="0">
+                <a:solidFill>
+                  <a:srgbClr val="E0913A"/>
+                </a:solidFill>
+                <a:latin typeface="Verdana Pro" panose="020B0604030504040204" pitchFamily="34" charset="0"/>
+                <a:cs typeface="Courier New" panose="02070309020205020404" pitchFamily="49" charset="0"/>
+              </a:rPr>
+              <a:t>Biological functions</a:t>
+            </a:r>
+          </a:p>
+          <a:p>
+            <a:pPr marL="285750" indent="-285750">
+              <a:buFont typeface="Arial" panose="020B0604020202020204" pitchFamily="34" charset="0"/>
+              <a:buChar char="•"/>
+            </a:pPr>
+            <a:r>
+              <a:rPr lang="en-US" sz="1400" dirty="0">
+                <a:solidFill>
+                  <a:srgbClr val="E0913A"/>
+                </a:solidFill>
+                <a:latin typeface="Verdana Pro" panose="020B0604030504040204" pitchFamily="34" charset="0"/>
+                <a:cs typeface="Courier New" panose="02070309020205020404" pitchFamily="49" charset="0"/>
+              </a:rPr>
+              <a:t>response to stimulus</a:t>
+            </a:r>
+          </a:p>
+        </p:txBody>
+      </p:sp>
+      <p:pic>
+        <p:nvPicPr>
+          <p:cNvPr id="22" name="Picture 21">
+            <a:extLst>
+              <a:ext uri="{FF2B5EF4-FFF2-40B4-BE49-F238E27FC236}">
+                <a16:creationId xmlns:a16="http://schemas.microsoft.com/office/drawing/2014/main" id="{AF30A37C-8979-D23A-E4B7-41EECBCCD317}"/>
+              </a:ext>
+            </a:extLst>
+          </p:cNvPr>
+          <p:cNvPicPr>
+            <a:picLocks noChangeAspect="1"/>
+          </p:cNvPicPr>
+          <p:nvPr/>
+        </p:nvPicPr>
+        <p:blipFill>
+          <a:blip r:embed="rId4"/>
+          <a:stretch>
+            <a:fillRect/>
+          </a:stretch>
+        </p:blipFill>
+        <p:spPr>
+          <a:xfrm>
+            <a:off x="4734933" y="3032363"/>
+            <a:ext cx="1361067" cy="1141343"/>
+          </a:xfrm>
+          <a:prstGeom prst="rect">
+            <a:avLst/>
+          </a:prstGeom>
+        </p:spPr>
+      </p:pic>
+      <p:grpSp>
+        <p:nvGrpSpPr>
+          <p:cNvPr id="24" name="Group 23">
+            <a:extLst>
+              <a:ext uri="{FF2B5EF4-FFF2-40B4-BE49-F238E27FC236}">
+                <a16:creationId xmlns:a16="http://schemas.microsoft.com/office/drawing/2014/main" id="{B6788DBC-D03F-BBC1-0A9D-DCB4408A69B4}"/>
+              </a:ext>
+            </a:extLst>
+          </p:cNvPr>
+          <p:cNvGrpSpPr/>
+          <p:nvPr/>
+        </p:nvGrpSpPr>
+        <p:grpSpPr>
+          <a:xfrm>
+            <a:off x="4722741" y="4185841"/>
+            <a:ext cx="2850668" cy="946413"/>
+            <a:chOff x="6640481" y="349968"/>
+            <a:chExt cx="2850668" cy="946413"/>
+          </a:xfrm>
+        </p:grpSpPr>
+        <p:sp>
+          <p:nvSpPr>
+            <p:cNvPr id="25" name="TextBox 24">
+              <a:extLst>
+                <a:ext uri="{FF2B5EF4-FFF2-40B4-BE49-F238E27FC236}">
+                  <a16:creationId xmlns:a16="http://schemas.microsoft.com/office/drawing/2014/main" id="{F17C6C5E-698C-586F-23BD-40C622987323}"/>
+                </a:ext>
+              </a:extLst>
+            </p:cNvPr>
+            <p:cNvSpPr txBox="1"/>
+            <p:nvPr/>
+          </p:nvSpPr>
+          <p:spPr>
+            <a:xfrm>
+              <a:off x="6795573" y="349968"/>
+              <a:ext cx="2695576" cy="946413"/>
+            </a:xfrm>
+            <a:prstGeom prst="rect">
+              <a:avLst/>
+            </a:prstGeom>
+            <a:noFill/>
+          </p:spPr>
+          <p:txBody>
+            <a:bodyPr wrap="square" rtlCol="0">
+              <a:spAutoFit/>
+            </a:bodyPr>
+            <a:lstStyle/>
+            <a:p>
+              <a:pPr>
+                <a:spcAft>
+                  <a:spcPts val="300"/>
+                </a:spcAft>
+              </a:pPr>
+              <a:r>
+                <a:rPr lang="en-US" sz="1200" dirty="0">
+                  <a:latin typeface="Verdana Pro" panose="020B0604030504040204" pitchFamily="34" charset="0"/>
+                </a:rPr>
+                <a:t>Very high (pLDDT &gt; 90)</a:t>
+              </a:r>
+            </a:p>
+            <a:p>
+              <a:pPr>
+                <a:spcAft>
+                  <a:spcPts val="300"/>
+                </a:spcAft>
+              </a:pPr>
+              <a:r>
+                <a:rPr lang="en-US" sz="1200" dirty="0">
+                  <a:latin typeface="Verdana Pro" panose="020B0604030504040204" pitchFamily="34" charset="0"/>
+                </a:rPr>
+                <a:t>Confident (90 &gt; pLDDT &gt; 70)</a:t>
+              </a:r>
+            </a:p>
+            <a:p>
+              <a:pPr>
+                <a:spcAft>
+                  <a:spcPts val="300"/>
+                </a:spcAft>
+              </a:pPr>
+              <a:r>
+                <a:rPr lang="en-US" sz="1200" dirty="0">
+                  <a:latin typeface="Verdana Pro" panose="020B0604030504040204" pitchFamily="34" charset="0"/>
+                </a:rPr>
+                <a:t>Low (70 &gt; pLDDT &gt; 50)</a:t>
+              </a:r>
+            </a:p>
+            <a:p>
+              <a:pPr>
+                <a:spcAft>
+                  <a:spcPts val="300"/>
+                </a:spcAft>
+              </a:pPr>
+              <a:r>
+                <a:rPr lang="en-US" sz="1200" dirty="0">
+                  <a:latin typeface="Verdana Pro" panose="020B0604030504040204" pitchFamily="34" charset="0"/>
+                </a:rPr>
+                <a:t>Very low (pLDDT &lt; 50) </a:t>
+              </a:r>
+              <a:endParaRPr lang="en-CA" sz="1200" dirty="0">
+                <a:latin typeface="Verdana Pro" panose="020B0604030504040204" pitchFamily="34" charset="0"/>
+              </a:endParaRPr>
+            </a:p>
+          </p:txBody>
+        </p:sp>
+        <p:sp>
+          <p:nvSpPr>
+            <p:cNvPr id="26" name="Rectangle 25">
+              <a:extLst>
+                <a:ext uri="{FF2B5EF4-FFF2-40B4-BE49-F238E27FC236}">
+                  <a16:creationId xmlns:a16="http://schemas.microsoft.com/office/drawing/2014/main" id="{EB550897-651D-B780-0A9F-F2F265225A48}"/>
+                </a:ext>
+              </a:extLst>
+            </p:cNvPr>
+            <p:cNvSpPr/>
+            <p:nvPr/>
+          </p:nvSpPr>
+          <p:spPr>
+            <a:xfrm>
+              <a:off x="6640481" y="419947"/>
+              <a:ext cx="182770" cy="152362"/>
+            </a:xfrm>
+            <a:prstGeom prst="rect">
+              <a:avLst/>
+            </a:prstGeom>
+            <a:solidFill>
+              <a:srgbClr val="024BC3"/>
+            </a:solidFill>
+            <a:ln>
+              <a:noFill/>
+            </a:ln>
+          </p:spPr>
+          <p:style>
+            <a:lnRef idx="2">
+              <a:schemeClr val="accent1">
+                <a:shade val="15000"/>
+              </a:schemeClr>
+            </a:lnRef>
+            <a:fillRef idx="1">
+              <a:schemeClr val="accent1"/>
+            </a:fillRef>
+            <a:effectRef idx="0">
+              <a:schemeClr val="accent1"/>
+            </a:effectRef>
+            <a:fontRef idx="minor">
+              <a:schemeClr val="lt1"/>
+            </a:fontRef>
+          </p:style>
+          <p:txBody>
+            <a:bodyPr rtlCol="0" anchor="ctr"/>
+            <a:lstStyle/>
+            <a:p>
+              <a:pPr algn="ctr"/>
+              <a:endParaRPr lang="en-CA"/>
+            </a:p>
+          </p:txBody>
+        </p:sp>
+        <p:sp>
+          <p:nvSpPr>
+            <p:cNvPr id="27" name="Rectangle 26">
+              <a:extLst>
+                <a:ext uri="{FF2B5EF4-FFF2-40B4-BE49-F238E27FC236}">
+                  <a16:creationId xmlns:a16="http://schemas.microsoft.com/office/drawing/2014/main" id="{75921FE2-76FB-4B99-83EA-ED1C1B39C37C}"/>
+                </a:ext>
+              </a:extLst>
+            </p:cNvPr>
+            <p:cNvSpPr/>
+            <p:nvPr/>
+          </p:nvSpPr>
+          <p:spPr>
+            <a:xfrm>
+              <a:off x="6640481" y="630255"/>
+              <a:ext cx="182770" cy="152362"/>
+            </a:xfrm>
+            <a:prstGeom prst="rect">
+              <a:avLst/>
+            </a:prstGeom>
+            <a:solidFill>
+              <a:srgbClr val="55A9CB"/>
+            </a:solidFill>
+            <a:ln>
+              <a:noFill/>
+            </a:ln>
+          </p:spPr>
+          <p:style>
+            <a:lnRef idx="2">
+              <a:schemeClr val="accent1">
+                <a:shade val="15000"/>
+              </a:schemeClr>
+            </a:lnRef>
+            <a:fillRef idx="1">
+              <a:schemeClr val="accent1"/>
+            </a:fillRef>
+            <a:effectRef idx="0">
+              <a:schemeClr val="accent1"/>
+            </a:effectRef>
+            <a:fontRef idx="minor">
+              <a:schemeClr val="lt1"/>
+            </a:fontRef>
+          </p:style>
+          <p:txBody>
+            <a:bodyPr rtlCol="0" anchor="ctr"/>
+            <a:lstStyle/>
+            <a:p>
+              <a:pPr algn="ctr"/>
+              <a:endParaRPr lang="en-CA"/>
+            </a:p>
+          </p:txBody>
+        </p:sp>
+        <p:sp>
+          <p:nvSpPr>
+            <p:cNvPr id="28" name="Rectangle 27">
+              <a:extLst>
+                <a:ext uri="{FF2B5EF4-FFF2-40B4-BE49-F238E27FC236}">
+                  <a16:creationId xmlns:a16="http://schemas.microsoft.com/office/drawing/2014/main" id="{29F97C2B-89B5-6EC5-035F-13BC3752ED7A}"/>
+                </a:ext>
+              </a:extLst>
+            </p:cNvPr>
+            <p:cNvSpPr/>
+            <p:nvPr/>
+          </p:nvSpPr>
+          <p:spPr>
+            <a:xfrm>
+              <a:off x="6640481" y="852112"/>
+              <a:ext cx="182770" cy="152362"/>
+            </a:xfrm>
+            <a:prstGeom prst="rect">
+              <a:avLst/>
+            </a:prstGeom>
+            <a:solidFill>
+              <a:srgbClr val="E6C612"/>
+            </a:solidFill>
+            <a:ln>
+              <a:noFill/>
+            </a:ln>
+          </p:spPr>
+          <p:style>
+            <a:lnRef idx="2">
+              <a:schemeClr val="accent1">
+                <a:shade val="15000"/>
+              </a:schemeClr>
+            </a:lnRef>
+            <a:fillRef idx="1">
+              <a:schemeClr val="accent1"/>
+            </a:fillRef>
+            <a:effectRef idx="0">
+              <a:schemeClr val="accent1"/>
+            </a:effectRef>
+            <a:fontRef idx="minor">
+              <a:schemeClr val="lt1"/>
+            </a:fontRef>
+          </p:style>
+          <p:txBody>
+            <a:bodyPr rtlCol="0" anchor="ctr"/>
+            <a:lstStyle/>
+            <a:p>
+              <a:pPr algn="ctr"/>
+              <a:endParaRPr lang="en-CA"/>
+            </a:p>
+          </p:txBody>
+        </p:sp>
+        <p:sp>
+          <p:nvSpPr>
+            <p:cNvPr id="29" name="Rectangle 28">
+              <a:extLst>
+                <a:ext uri="{FF2B5EF4-FFF2-40B4-BE49-F238E27FC236}">
+                  <a16:creationId xmlns:a16="http://schemas.microsoft.com/office/drawing/2014/main" id="{AB12A31B-6D8F-2704-A54A-6A778ADE1465}"/>
+                </a:ext>
+              </a:extLst>
+            </p:cNvPr>
+            <p:cNvSpPr/>
+            <p:nvPr/>
+          </p:nvSpPr>
+          <p:spPr>
+            <a:xfrm>
+              <a:off x="6640481" y="1087420"/>
+              <a:ext cx="182770" cy="152362"/>
+            </a:xfrm>
+            <a:prstGeom prst="rect">
+              <a:avLst/>
+            </a:prstGeom>
+            <a:solidFill>
+              <a:srgbClr val="E56D3B"/>
+            </a:solidFill>
+            <a:ln>
+              <a:noFill/>
+            </a:ln>
+          </p:spPr>
+          <p:style>
+            <a:lnRef idx="2">
+              <a:schemeClr val="accent1">
+                <a:shade val="15000"/>
+              </a:schemeClr>
+            </a:lnRef>
+            <a:fillRef idx="1">
+              <a:schemeClr val="accent1"/>
+            </a:fillRef>
+            <a:effectRef idx="0">
+              <a:schemeClr val="accent1"/>
+            </a:effectRef>
+            <a:fontRef idx="minor">
+              <a:schemeClr val="lt1"/>
+            </a:fontRef>
+          </p:style>
+          <p:txBody>
+            <a:bodyPr rtlCol="0" anchor="ctr"/>
+            <a:lstStyle/>
+            <a:p>
+              <a:pPr algn="ctr"/>
+              <a:endParaRPr lang="en-CA"/>
+            </a:p>
+          </p:txBody>
+        </p:sp>
+      </p:grpSp>
+      <p:pic>
+        <p:nvPicPr>
+          <p:cNvPr id="3" name="Picture 2">
+            <a:extLst>
+              <a:ext uri="{FF2B5EF4-FFF2-40B4-BE49-F238E27FC236}">
+                <a16:creationId xmlns:a16="http://schemas.microsoft.com/office/drawing/2014/main" id="{17D92A1D-590F-FF4E-6DE1-40E6FA0E344D}"/>
+              </a:ext>
+            </a:extLst>
+          </p:cNvPr>
+          <p:cNvPicPr>
+            <a:picLocks noChangeAspect="1"/>
+          </p:cNvPicPr>
+          <p:nvPr/>
+        </p:nvPicPr>
+        <p:blipFill>
+          <a:blip r:embed="rId5"/>
+          <a:srcRect l="4614" r="6467"/>
+          <a:stretch>
+            <a:fillRect/>
+          </a:stretch>
+        </p:blipFill>
+        <p:spPr>
+          <a:xfrm>
+            <a:off x="6147116" y="268663"/>
+            <a:ext cx="1371429" cy="1223002"/>
+          </a:xfrm>
+          <a:prstGeom prst="rect">
+            <a:avLst/>
+          </a:prstGeom>
+        </p:spPr>
+      </p:pic>
+      <p:sp>
+        <p:nvSpPr>
+          <p:cNvPr id="5" name="TextBox 4">
+            <a:extLst>
+              <a:ext uri="{FF2B5EF4-FFF2-40B4-BE49-F238E27FC236}">
+                <a16:creationId xmlns:a16="http://schemas.microsoft.com/office/drawing/2014/main" id="{3CDADC2E-A8CA-9C05-F450-CB8922840B7B}"/>
+              </a:ext>
+            </a:extLst>
+          </p:cNvPr>
+          <p:cNvSpPr txBox="1"/>
+          <p:nvPr/>
+        </p:nvSpPr>
+        <p:spPr>
+          <a:xfrm>
+            <a:off x="257489" y="2310159"/>
+            <a:ext cx="4324868" cy="523220"/>
+          </a:xfrm>
+          <a:prstGeom prst="rect">
+            <a:avLst/>
+          </a:prstGeom>
+          <a:noFill/>
+          <a:ln>
+            <a:solidFill>
+              <a:schemeClr val="tx1">
+                <a:lumMod val="65000"/>
+                <a:lumOff val="35000"/>
+              </a:schemeClr>
+            </a:solidFill>
+          </a:ln>
+        </p:spPr>
+        <p:txBody>
+          <a:bodyPr wrap="square">
+            <a:spAutoFit/>
+          </a:bodyPr>
+          <a:lstStyle/>
+          <a:p>
+            <a:r>
+              <a:rPr lang="en-CA" sz="1400" b="0" i="0" dirty="0">
+                <a:solidFill>
+                  <a:schemeClr val="tx1">
+                    <a:lumMod val="65000"/>
+                    <a:lumOff val="35000"/>
+                  </a:schemeClr>
+                </a:solidFill>
+                <a:effectLst/>
+                <a:latin typeface="Verdana Pro" panose="020B0604030504040204" pitchFamily="34" charset="0"/>
+              </a:rPr>
+              <a:t>Cluster ID: A0A2E7NAI8 </a:t>
+            </a:r>
+          </a:p>
+          <a:p>
+            <a:r>
+              <a:rPr lang="en-CA" sz="1400" b="0" i="0" dirty="0">
+                <a:solidFill>
+                  <a:schemeClr val="tx1">
+                    <a:lumMod val="65000"/>
+                    <a:lumOff val="35000"/>
+                  </a:schemeClr>
+                </a:solidFill>
+                <a:effectLst/>
+                <a:latin typeface="Verdana Pro" panose="020B0604030504040204" pitchFamily="34" charset="0"/>
+              </a:rPr>
+              <a:t>[no enriched molecular functions]</a:t>
+            </a:r>
+            <a:endParaRPr lang="en-CA" sz="1400" dirty="0">
+              <a:solidFill>
+                <a:schemeClr val="tx1">
+                  <a:lumMod val="65000"/>
+                  <a:lumOff val="35000"/>
+                </a:schemeClr>
+              </a:solidFill>
+              <a:latin typeface="Verdana Pro" panose="020B0604030504040204" pitchFamily="34" charset="0"/>
+            </a:endParaRPr>
+          </a:p>
+        </p:txBody>
+      </p:sp>
+    </p:spTree>
+    <p:extLst>
+      <p:ext uri="{BB962C8B-B14F-4D97-AF65-F5344CB8AC3E}">
+        <p14:creationId xmlns:p14="http://schemas.microsoft.com/office/powerpoint/2010/main" val="2396520108"/>
+      </p:ext>
+    </p:extLst>
+  </p:cSld>
+  <p:clrMapOvr>
+    <a:masterClrMapping/>
+  </p:clrMapOvr>
+</p:sld>
+</file>
+
+<file path=ppt/slides/slide11.xml><?xml version="1.0" encoding="utf-8"?>
+<p:sld xmlns:a="http://schemas.openxmlformats.org/drawingml/2006/main" xmlns:r="http://schemas.openxmlformats.org/officeDocument/2006/relationships" xmlns:p="http://schemas.openxmlformats.org/presentationml/2006/main">
+  <p:cSld>
+    <p:spTree>
+      <p:nvGrpSpPr>
         <p:cNvPr id="1" name="">
           <a:extLst>
             <a:ext uri="{FF2B5EF4-FFF2-40B4-BE49-F238E27FC236}">
@@ -4985,7 +5958,7 @@
             <a:fld id="{3899FC77-40C7-4C49-9A19-86BDE9B75E8A}" type="slidenum">
               <a:rPr lang="en-CA" smtClean="0"/>
               <a:pPr/>
-              <a:t>10</a:t>
+              <a:t>11</a:t>
             </a:fld>
             <a:endParaRPr lang="en-CA" sz="1400"/>
           </a:p>
@@ -5135,7 +6108,7 @@
 </p:sld>
 </file>
 
-<file path=ppt/slides/slide11.xml><?xml version="1.0" encoding="utf-8"?>
+<file path=ppt/slides/slide12.xml><?xml version="1.0" encoding="utf-8"?>
 <p:sld xmlns:a="http://schemas.openxmlformats.org/drawingml/2006/main" xmlns:r="http://schemas.openxmlformats.org/officeDocument/2006/relationships" xmlns:p="http://schemas.openxmlformats.org/presentationml/2006/main">
   <p:cSld>
     <p:spTree>
@@ -5370,7 +6343,7 @@
             <a:fld id="{3899FC77-40C7-4C49-9A19-86BDE9B75E8A}" type="slidenum">
               <a:rPr lang="en-CA" smtClean="0"/>
               <a:pPr/>
-              <a:t>11</a:t>
+              <a:t>12</a:t>
             </a:fld>
             <a:endParaRPr lang="en-CA" sz="1400"/>
           </a:p>
@@ -5599,7 +6572,7 @@
 </p:sld>
 </file>
 
-<file path=ppt/slides/slide12.xml><?xml version="1.0" encoding="utf-8"?>
+<file path=ppt/slides/slide13.xml><?xml version="1.0" encoding="utf-8"?>
 <p:sld xmlns:a="http://schemas.openxmlformats.org/drawingml/2006/main" xmlns:r="http://schemas.openxmlformats.org/officeDocument/2006/relationships" xmlns:p="http://schemas.openxmlformats.org/presentationml/2006/main">
   <p:cSld>
     <p:spTree>
@@ -5828,7 +6801,7 @@
             <a:fld id="{3899FC77-40C7-4C49-9A19-86BDE9B75E8A}" type="slidenum">
               <a:rPr lang="en-CA" smtClean="0"/>
               <a:pPr/>
-              <a:t>12</a:t>
+              <a:t>13</a:t>
             </a:fld>
             <a:endParaRPr lang="en-CA" sz="1400"/>
           </a:p>
@@ -6077,8 +7050,8 @@
           </a:p>
         </p:txBody>
       </p:sp>
-      <mc:AlternateContent xmlns:mc="http://schemas.openxmlformats.org/markup-compatibility/2006" xmlns:a14="http://schemas.microsoft.com/office/drawing/2010/main">
-        <mc:Choice Requires="a14">
+      <mc:AlternateContent xmlns:mc="http://schemas.openxmlformats.org/markup-compatibility/2006">
+        <mc:Choice xmlns:a14="http://schemas.microsoft.com/office/drawing/2010/main" Requires="a14">
           <p:sp>
             <p:nvSpPr>
               <p:cNvPr id="5" name="TextBox 4">
@@ -6093,8 +7066,8 @@
             </p:nvSpPr>
             <p:spPr>
               <a:xfrm>
-                <a:off x="845609" y="1614931"/>
-                <a:ext cx="6421966" cy="2369880"/>
+                <a:off x="845609" y="1244263"/>
+                <a:ext cx="6421966" cy="3016210"/>
               </a:xfrm>
               <a:prstGeom prst="rect">
                 <a:avLst/>
@@ -6134,7 +7107,7 @@
                   <a:rPr lang="en-US" sz="1600" dirty="0">
                     <a:latin typeface="Georgia Pro" panose="02040502050405020303" pitchFamily="18" charset="0"/>
                   </a:rPr>
-                  <a:t>, a method for representing 3D folded protein structures as one-dimensional sequences of a 20-letter code.</a:t>
+                  <a:t>, a method for representing 3D folded protein structures as one-dimensional sequences of a structural code.</a:t>
                 </a:r>
                 <a:r>
                   <a:rPr lang="en-US" sz="1600" baseline="30000" dirty="0">
@@ -6158,7 +7131,7 @@
                     <a:latin typeface="Georgia Pro" panose="02040502050405020303" pitchFamily="18" charset="0"/>
                     <a:cs typeface="Courier New" panose="02070309020205020404" pitchFamily="49" charset="0"/>
                   </a:rPr>
-                  <a:t>Each character in the 20-letter code is represented in the latent space between an autoencoder and decoder neural network.</a:t>
+                  <a:t>Each character in structural code is represented in the latent space between an autoencoder and decoder neural network.</a:t>
                 </a:r>
               </a:p>
               <a:p>
@@ -6172,7 +7145,7 @@
                     <a:latin typeface="Georgia Pro" panose="02040502050405020303" pitchFamily="18" charset="0"/>
                     <a:cs typeface="Courier New" panose="02070309020205020404" pitchFamily="49" charset="0"/>
                   </a:rPr>
-                  <a:t>The autoencoder receives as input a 10-dimensional feature vector, where the features encapsulate the spatial relationship between two nearest spatial neighbor residues, </a:t>
+                  <a:t>The autoencoder receives as input a 10-dimensional feature vector, where the features encapsulate the spatial relationship between two "nearest spatial neighbor" residues, </a:t>
                 </a:r>
                 <a14:m>
                   <m:oMath xmlns:m="http://schemas.openxmlformats.org/officeDocument/2006/math">
@@ -6211,10 +7184,42 @@
                   <a:t>, in the 3D structure.</a:t>
                 </a:r>
               </a:p>
+              <a:p>
+                <a:pPr algn="just">
+                  <a:spcAft>
+                    <a:spcPts val="1200"/>
+                  </a:spcAft>
+                </a:pPr>
+                <a:r>
+                  <a:rPr lang="en-US" sz="1600" dirty="0">
+                    <a:latin typeface="Georgia Pro" panose="02040502050405020303" pitchFamily="18" charset="0"/>
+                    <a:cs typeface="Courier New" panose="02070309020205020404" pitchFamily="49" charset="0"/>
+                  </a:rPr>
+                  <a:t>The encoder-decoder is trained to predict masked feature vectors for a residue aligned to the input vector's residue </a:t>
+                </a:r>
+                <a14:m>
+                  <m:oMath xmlns:m="http://schemas.openxmlformats.org/officeDocument/2006/math">
+                    <m:r>
+                      <a:rPr lang="en-US" sz="1600" b="0" i="1" smtClean="0">
+                        <a:latin typeface="Cambria Math" panose="02040503050406030204" pitchFamily="18" charset="0"/>
+                        <a:cs typeface="Courier New" panose="02070309020205020404" pitchFamily="49" charset="0"/>
+                      </a:rPr>
+                      <m:t>𝑖</m:t>
+                    </m:r>
+                  </m:oMath>
+                </a14:m>
+                <a:r>
+                  <a:rPr lang="en-US" sz="1600" dirty="0">
+                    <a:latin typeface="Georgia Pro" panose="02040502050405020303" pitchFamily="18" charset="0"/>
+                    <a:cs typeface="Courier New" panose="02070309020205020404" pitchFamily="49" charset="0"/>
+                  </a:rPr>
+                  <a:t>.</a:t>
+                </a:r>
+              </a:p>
             </p:txBody>
           </p:sp>
         </mc:Choice>
-        <mc:Fallback xmlns="">
+        <mc:Fallback>
           <p:sp>
             <p:nvSpPr>
               <p:cNvPr id="5" name="TextBox 4">
@@ -6231,8 +7236,8 @@
             </p:nvSpPr>
             <p:spPr>
               <a:xfrm>
-                <a:off x="845609" y="1614931"/>
-                <a:ext cx="6421966" cy="2369880"/>
+                <a:off x="845609" y="1244263"/>
+                <a:ext cx="6421966" cy="3016210"/>
               </a:xfrm>
               <a:prstGeom prst="rect">
                 <a:avLst/>
@@ -6240,7 +7245,7 @@
               <a:blipFill>
                 <a:blip r:embed="rId2"/>
                 <a:stretch>
-                  <a:fillRect l="-570" t="-771" r="-475" b="-2314"/>
+                  <a:fillRect l="-570" t="-606" r="-475" b="-1616"/>
                 </a:stretch>
               </a:blipFill>
             </p:spPr>
@@ -9756,7 +10761,7 @@
           <a:lstStyle/>
           <a:p>
             <a:r>
-              <a:rPr lang="en-US" sz="3200" b="1">
+              <a:rPr lang="en-US" sz="3200" b="1" dirty="0">
                 <a:solidFill>
                   <a:schemeClr val="bg1"/>
                 </a:solidFill>
@@ -9764,7 +10769,7 @@
               </a:rPr>
               <a:t>Downstream prioritization</a:t>
             </a:r>
-            <a:endParaRPr lang="en-US" sz="2000" b="1">
+            <a:endParaRPr lang="en-US" sz="2000" b="1" dirty="0">
               <a:solidFill>
                 <a:schemeClr val="bg1"/>
               </a:solidFill>
@@ -10434,7 +11439,7 @@
         </p:nvSpPr>
         <p:spPr>
           <a:xfrm>
-            <a:off x="294784" y="265438"/>
+            <a:off x="828945" y="826155"/>
             <a:ext cx="3564709" cy="1000274"/>
           </a:xfrm>
           <a:prstGeom prst="rect">
@@ -10532,7 +11537,7 @@
         </p:blipFill>
         <p:spPr>
           <a:xfrm>
-            <a:off x="6630162" y="1843913"/>
+            <a:off x="7164323" y="2404630"/>
             <a:ext cx="3942588" cy="3847076"/>
           </a:xfrm>
           <a:prstGeom prst="rect">
@@ -10555,14 +11560,14 @@
           <p:nvPr>
             <p:extLst>
               <p:ext uri="{D42A27DB-BD31-4B8C-83A1-F6EECF244321}">
-                <p14:modId xmlns:p14="http://schemas.microsoft.com/office/powerpoint/2010/main" val="527733694"/>
+                <p14:modId xmlns:p14="http://schemas.microsoft.com/office/powerpoint/2010/main" val="2664098273"/>
               </p:ext>
             </p:extLst>
           </p:nvPr>
         </p:nvGraphicFramePr>
         <p:xfrm>
-          <a:off x="294784" y="1843913"/>
-          <a:ext cx="5575836" cy="3757346"/>
+          <a:off x="828945" y="2404630"/>
+          <a:ext cx="5267055" cy="3028704"/>
         </p:xfrm>
         <a:graphic>
           <a:graphicData uri="http://schemas.openxmlformats.org/drawingml/2006/table">
@@ -10571,14 +11576,14 @@
                 <a:tableStyleId>{5940675A-B579-460E-94D1-54222C63F5DA}</a:tableStyleId>
               </a:tblPr>
               <a:tblGrid>
-                <a:gridCol w="2787918">
+                <a:gridCol w="4032202">
                   <a:extLst>
                     <a:ext uri="{9D8B030D-6E8A-4147-A177-3AD203B41FA5}">
                       <a16:colId xmlns:a16="http://schemas.microsoft.com/office/drawing/2014/main" val="2883141624"/>
                     </a:ext>
                   </a:extLst>
                 </a:gridCol>
-                <a:gridCol w="2787918">
+                <a:gridCol w="1234853">
                   <a:extLst>
                     <a:ext uri="{9D8B030D-6E8A-4147-A177-3AD203B41FA5}">
                       <a16:colId xmlns:a16="http://schemas.microsoft.com/office/drawing/2014/main" val="3161232302"/>
@@ -10586,7 +11591,7 @@
                   </a:extLst>
                 </a:gridCol>
               </a:tblGrid>
-              <a:tr h="242487">
+              <a:tr h="120376">
                 <a:tc gridSpan="2">
                   <a:txBody>
                     <a:bodyPr/>
@@ -10603,7 +11608,7 @@
                           <a:effectLst/>
                           <a:latin typeface="Verdana Pro" panose="020B0604030504040204" pitchFamily="34" charset="0"/>
                         </a:rPr>
-                        <a:t>G profiler GO terms </a:t>
+                        <a:t>gprofiler GO terms </a:t>
                       </a:r>
                       <a:endParaRPr lang="en-CA" sz="1400" b="0" i="0" u="none" strike="noStrike" dirty="0">
                         <a:solidFill>
@@ -10641,7 +11646,7 @@
                   </a:ext>
                 </a:extLst>
               </a:tr>
-              <a:tr h="242487">
+              <a:tr h="120376">
                 <a:tc>
                   <a:txBody>
                     <a:bodyPr/>
@@ -10706,7 +11711,7 @@
                   </a:ext>
                 </a:extLst>
               </a:tr>
-              <a:tr h="208401">
+              <a:tr h="103455">
                 <a:tc>
                   <a:txBody>
                     <a:bodyPr/>
@@ -10820,7 +11825,7 @@
                   </a:ext>
                 </a:extLst>
               </a:tr>
-              <a:tr h="208401">
+              <a:tr h="103455">
                 <a:tc>
                   <a:txBody>
                     <a:bodyPr/>
@@ -10956,7 +11961,7 @@
                   </a:ext>
                 </a:extLst>
               </a:tr>
-              <a:tr h="412919">
+              <a:tr h="204983">
                 <a:tc>
                   <a:txBody>
                     <a:bodyPr/>
@@ -11092,7 +12097,7 @@
                   </a:ext>
                 </a:extLst>
               </a:tr>
-              <a:tr h="208401">
+              <a:tr h="103455">
                 <a:tc>
                   <a:txBody>
                     <a:bodyPr/>
@@ -11228,7 +12233,7 @@
                   </a:ext>
                 </a:extLst>
               </a:tr>
-              <a:tr h="412919">
+              <a:tr h="204983">
                 <a:tc>
                   <a:txBody>
                     <a:bodyPr/>
@@ -11364,7 +12369,7 @@
                   </a:ext>
                 </a:extLst>
               </a:tr>
-              <a:tr h="821956">
+              <a:tr h="333412">
                 <a:tc>
                   <a:txBody>
                     <a:bodyPr/>
@@ -11500,7 +12505,7 @@
                   </a:ext>
                 </a:extLst>
               </a:tr>
-              <a:tr h="263658">
+              <a:tr h="106948">
                 <a:tc>
                   <a:txBody>
                     <a:bodyPr/>
@@ -11636,7 +12641,7 @@
                   </a:ext>
                 </a:extLst>
               </a:tr>
-              <a:tr h="263658">
+              <a:tr h="106948">
                 <a:tc>
                   <a:txBody>
                     <a:bodyPr/>
@@ -11772,7 +12777,7 @@
                   </a:ext>
                 </a:extLst>
               </a:tr>
-              <a:tr h="208401">
+              <a:tr h="103455">
                 <a:tc>
                   <a:txBody>
                     <a:bodyPr/>
@@ -11908,7 +12913,7 @@
                   </a:ext>
                 </a:extLst>
               </a:tr>
-              <a:tr h="263658">
+              <a:tr h="106948">
                 <a:tc>
                   <a:txBody>
                     <a:bodyPr/>
@@ -12042,7 +13047,7 @@
         </p:nvCxnSpPr>
         <p:spPr>
           <a:xfrm>
-            <a:off x="3712464" y="429768"/>
+            <a:off x="4246625" y="990485"/>
             <a:ext cx="1444752" cy="0"/>
           </a:xfrm>
           <a:prstGeom prst="line">
@@ -12086,7 +13091,7 @@
         </p:nvSpPr>
         <p:spPr>
           <a:xfrm>
-            <a:off x="5230368" y="198935"/>
+            <a:off x="5764529" y="759652"/>
             <a:ext cx="2514600" cy="461665"/>
           </a:xfrm>
           <a:prstGeom prst="rect">
@@ -12130,7 +13135,7 @@
         </p:nvCxnSpPr>
         <p:spPr>
           <a:xfrm>
-            <a:off x="3712464" y="587057"/>
+            <a:off x="4246625" y="1147774"/>
             <a:ext cx="576072" cy="420913"/>
           </a:xfrm>
           <a:prstGeom prst="line">
@@ -12176,7 +13181,7 @@
         </p:nvCxnSpPr>
         <p:spPr>
           <a:xfrm>
-            <a:off x="4276631" y="1007970"/>
+            <a:off x="4810792" y="1568687"/>
             <a:ext cx="880585" cy="0"/>
           </a:xfrm>
           <a:prstGeom prst="line">
@@ -12220,7 +13225,7 @@
         </p:nvSpPr>
         <p:spPr>
           <a:xfrm>
-            <a:off x="5230368" y="777137"/>
+            <a:off x="5764529" y="1337854"/>
             <a:ext cx="2514600" cy="1015663"/>
           </a:xfrm>
           <a:prstGeom prst="rect">
@@ -12292,6 +13297,3436 @@
 </file>
 
 <file path=ppt/slides/slide8.xml><?xml version="1.0" encoding="utf-8"?>
+<p:sld xmlns:a="http://schemas.openxmlformats.org/drawingml/2006/main" xmlns:r="http://schemas.openxmlformats.org/officeDocument/2006/relationships" xmlns:p="http://schemas.openxmlformats.org/presentationml/2006/main">
+  <p:cSld>
+    <p:spTree>
+      <p:nvGrpSpPr>
+        <p:cNvPr id="1" name=""/>
+        <p:cNvGrpSpPr/>
+        <p:nvPr/>
+      </p:nvGrpSpPr>
+      <p:grpSpPr>
+        <a:xfrm>
+          <a:off x="0" y="0"/>
+          <a:ext cx="0" cy="0"/>
+          <a:chOff x="0" y="0"/>
+          <a:chExt cx="0" cy="0"/>
+        </a:xfrm>
+      </p:grpSpPr>
+      <p:graphicFrame>
+        <p:nvGraphicFramePr>
+          <p:cNvPr id="5" name="Table 4">
+            <a:extLst>
+              <a:ext uri="{FF2B5EF4-FFF2-40B4-BE49-F238E27FC236}">
+                <a16:creationId xmlns:a16="http://schemas.microsoft.com/office/drawing/2014/main" id="{21C43D31-4BCA-8439-122C-EDFA32EEF5FB}"/>
+              </a:ext>
+            </a:extLst>
+          </p:cNvPr>
+          <p:cNvGraphicFramePr>
+            <a:graphicFrameLocks noGrp="1"/>
+          </p:cNvGraphicFramePr>
+          <p:nvPr>
+            <p:extLst>
+              <p:ext uri="{D42A27DB-BD31-4B8C-83A1-F6EECF244321}">
+                <p14:modId xmlns:p14="http://schemas.microsoft.com/office/powerpoint/2010/main" val="4068002402"/>
+              </p:ext>
+            </p:extLst>
+          </p:nvPr>
+        </p:nvGraphicFramePr>
+        <p:xfrm>
+          <a:off x="2037319" y="1251878"/>
+          <a:ext cx="3716499" cy="3453724"/>
+        </p:xfrm>
+        <a:graphic>
+          <a:graphicData uri="http://schemas.openxmlformats.org/drawingml/2006/table">
+            <a:tbl>
+              <a:tblPr>
+                <a:tableStyleId>{5940675A-B579-460E-94D1-54222C63F5DA}</a:tableStyleId>
+              </a:tblPr>
+              <a:tblGrid>
+                <a:gridCol w="2845171">
+                  <a:extLst>
+                    <a:ext uri="{9D8B030D-6E8A-4147-A177-3AD203B41FA5}">
+                      <a16:colId xmlns:a16="http://schemas.microsoft.com/office/drawing/2014/main" val="2883141624"/>
+                    </a:ext>
+                  </a:extLst>
+                </a:gridCol>
+                <a:gridCol w="871328">
+                  <a:extLst>
+                    <a:ext uri="{9D8B030D-6E8A-4147-A177-3AD203B41FA5}">
+                      <a16:colId xmlns:a16="http://schemas.microsoft.com/office/drawing/2014/main" val="3161232302"/>
+                    </a:ext>
+                  </a:extLst>
+                </a:gridCol>
+              </a:tblGrid>
+              <a:tr h="143802">
+                <a:tc gridSpan="2">
+                  <a:txBody>
+                    <a:bodyPr/>
+                    <a:lstStyle/>
+                    <a:p>
+                      <a:pPr algn="l" fontAlgn="b">
+                        <a:buNone/>
+                      </a:pPr>
+                      <a:r>
+                        <a:rPr lang="en-US" sz="1400" b="0" i="0" u="none" strike="noStrike" dirty="0">
+                          <a:solidFill>
+                            <a:srgbClr val="000000"/>
+                          </a:solidFill>
+                          <a:effectLst/>
+                          <a:latin typeface="Verdana Pro" panose="020B0604030504040204" pitchFamily="34" charset="0"/>
+                        </a:rPr>
+                        <a:t>A0A4P9X374: gprofiler GO terms</a:t>
+                      </a:r>
+                    </a:p>
+                    <a:p>
+                      <a:pPr algn="l" fontAlgn="b">
+                        <a:buNone/>
+                      </a:pPr>
+                      <a:r>
+                        <a:rPr lang="en-US" sz="1400" b="0" i="0" u="none" strike="noStrike" dirty="0">
+                          <a:solidFill>
+                            <a:srgbClr val="000000"/>
+                          </a:solidFill>
+                          <a:effectLst/>
+                          <a:latin typeface="Verdana Pro" panose="020B0604030504040204" pitchFamily="34" charset="0"/>
+                        </a:rPr>
+                        <a:t>[cluster size: 30]</a:t>
+                      </a:r>
+                      <a:endParaRPr lang="en-CA" sz="1400" b="0" i="0" u="none" strike="noStrike" dirty="0">
+                        <a:solidFill>
+                          <a:srgbClr val="000000"/>
+                        </a:solidFill>
+                        <a:effectLst/>
+                        <a:latin typeface="Verdana Pro" panose="020B0604030504040204" pitchFamily="34" charset="0"/>
+                      </a:endParaRPr>
+                    </a:p>
+                  </a:txBody>
+                  <a:tcPr marL="3472" marR="3472" marT="3472" marB="0" anchor="b"/>
+                </a:tc>
+                <a:tc hMerge="1">
+                  <a:txBody>
+                    <a:bodyPr/>
+                    <a:lstStyle/>
+                    <a:p>
+                      <a:pPr algn="l" fontAlgn="b">
+                        <a:buNone/>
+                      </a:pPr>
+                      <a:endParaRPr lang="en-CA" sz="1400" b="0" i="0" u="none" strike="noStrike" dirty="0">
+                        <a:solidFill>
+                          <a:srgbClr val="000000"/>
+                        </a:solidFill>
+                        <a:effectLst/>
+                        <a:latin typeface="Verdana Pro" panose="020B0604030504040204" pitchFamily="34" charset="0"/>
+                      </a:endParaRPr>
+                    </a:p>
+                  </a:txBody>
+                  <a:tcPr marL="3472" marR="3472" marT="3472" marB="0" anchor="b"/>
+                </a:tc>
+                <a:extLst>
+                  <a:ext uri="{0D108BD9-81ED-4DB2-BD59-A6C34878D82A}">
+                    <a16:rowId xmlns:a16="http://schemas.microsoft.com/office/drawing/2014/main" val="3254720063"/>
+                  </a:ext>
+                </a:extLst>
+              </a:tr>
+              <a:tr h="143802">
+                <a:tc>
+                  <a:txBody>
+                    <a:bodyPr/>
+                    <a:lstStyle/>
+                    <a:p>
+                      <a:pPr algn="l" fontAlgn="b">
+                        <a:buNone/>
+                      </a:pPr>
+                      <a:r>
+                        <a:rPr lang="en-CA" sz="1400" b="0" u="none" strike="noStrike" dirty="0">
+                          <a:solidFill>
+                            <a:srgbClr val="000000"/>
+                          </a:solidFill>
+                          <a:effectLst/>
+                          <a:latin typeface="Verdana Pro" panose="020B0604030504040204" pitchFamily="34" charset="0"/>
+                        </a:rPr>
+                        <a:t>name</a:t>
+                      </a:r>
+                      <a:endParaRPr lang="en-CA" sz="1400" b="0" i="0" u="none" strike="noStrike" dirty="0">
+                        <a:solidFill>
+                          <a:srgbClr val="000000"/>
+                        </a:solidFill>
+                        <a:effectLst/>
+                        <a:latin typeface="Verdana Pro" panose="020B0604030504040204" pitchFamily="34" charset="0"/>
+                      </a:endParaRPr>
+                    </a:p>
+                  </a:txBody>
+                  <a:tcPr marL="3472" marR="3472" marT="3472" marB="0" anchor="b"/>
+                </a:tc>
+                <a:tc>
+                  <a:txBody>
+                    <a:bodyPr/>
+                    <a:lstStyle/>
+                    <a:p>
+                      <a:pPr algn="l" fontAlgn="b">
+                        <a:buNone/>
+                      </a:pPr>
+                      <a:r>
+                        <a:rPr lang="en-CA" sz="1400" b="0" u="none" strike="noStrike" dirty="0">
+                          <a:solidFill>
+                            <a:srgbClr val="000000"/>
+                          </a:solidFill>
+                          <a:effectLst/>
+                          <a:latin typeface="Verdana Pro" panose="020B0604030504040204" pitchFamily="34" charset="0"/>
+                        </a:rPr>
+                        <a:t>p_value</a:t>
+                      </a:r>
+                      <a:endParaRPr lang="en-CA" sz="1400" b="0" i="0" u="none" strike="noStrike" dirty="0">
+                        <a:solidFill>
+                          <a:srgbClr val="000000"/>
+                        </a:solidFill>
+                        <a:effectLst/>
+                        <a:latin typeface="Verdana Pro" panose="020B0604030504040204" pitchFamily="34" charset="0"/>
+                      </a:endParaRPr>
+                    </a:p>
+                  </a:txBody>
+                  <a:tcPr marL="3472" marR="3472" marT="3472" marB="0" anchor="b"/>
+                </a:tc>
+                <a:extLst>
+                  <a:ext uri="{0D108BD9-81ED-4DB2-BD59-A6C34878D82A}">
+                    <a16:rowId xmlns:a16="http://schemas.microsoft.com/office/drawing/2014/main" val="697414357"/>
+                  </a:ext>
+                </a:extLst>
+              </a:tr>
+              <a:tr h="125496">
+                <a:tc>
+                  <a:txBody>
+                    <a:bodyPr/>
+                    <a:lstStyle/>
+                    <a:p>
+                      <a:pPr algn="l" fontAlgn="b">
+                        <a:buNone/>
+                      </a:pPr>
+                      <a:r>
+                        <a:rPr lang="en-CA" sz="1200" b="0" i="0" u="none" strike="noStrike" dirty="0">
+                          <a:solidFill>
+                            <a:srgbClr val="000000"/>
+                          </a:solidFill>
+                          <a:effectLst/>
+                          <a:latin typeface="Courier New" panose="02070309020205020404" pitchFamily="49" charset="0"/>
+                          <a:cs typeface="Courier New" panose="02070309020205020404" pitchFamily="49" charset="0"/>
+                        </a:rPr>
+                        <a:t>ATP hydrolysis activity</a:t>
+                      </a:r>
+                    </a:p>
+                  </a:txBody>
+                  <a:tcPr marL="6350" marR="6350" marT="6350" marB="0" anchor="b">
+                    <a:lnR w="12700" cap="flat" cmpd="sng" algn="ctr">
+                      <a:solidFill>
+                        <a:schemeClr val="tx1"/>
+                      </a:solidFill>
+                      <a:prstDash val="solid"/>
+                      <a:round/>
+                      <a:headEnd type="none" w="med" len="med"/>
+                      <a:tailEnd type="none" w="med" len="med"/>
+                    </a:lnR>
+                    <a:lnB w="12700" cap="flat" cmpd="sng" algn="ctr">
+                      <a:solidFill>
+                        <a:schemeClr val="bg1">
+                          <a:lumMod val="75000"/>
+                        </a:schemeClr>
+                      </a:solidFill>
+                      <a:prstDash val="solid"/>
+                      <a:round/>
+                      <a:headEnd type="none" w="med" len="med"/>
+                      <a:tailEnd type="none" w="med" len="med"/>
+                    </a:lnB>
+                  </a:tcPr>
+                </a:tc>
+                <a:tc>
+                  <a:txBody>
+                    <a:bodyPr/>
+                    <a:lstStyle/>
+                    <a:p>
+                      <a:pPr algn="r" fontAlgn="b">
+                        <a:buNone/>
+                      </a:pPr>
+                      <a:r>
+                        <a:rPr lang="en-CA" sz="1200" b="0" i="0" u="none" strike="noStrike" dirty="0">
+                          <a:solidFill>
+                            <a:srgbClr val="000000"/>
+                          </a:solidFill>
+                          <a:effectLst/>
+                          <a:latin typeface="Courier New" panose="02070309020205020404" pitchFamily="49" charset="0"/>
+                          <a:cs typeface="Courier New" panose="02070309020205020404" pitchFamily="49" charset="0"/>
+                        </a:rPr>
+                        <a:t>0.000001</a:t>
+                      </a:r>
+                    </a:p>
+                  </a:txBody>
+                  <a:tcPr marL="6350" marR="6350" marT="6350" marB="0" anchor="b">
+                    <a:lnL w="12700" cap="flat" cmpd="sng" algn="ctr">
+                      <a:solidFill>
+                        <a:schemeClr val="tx1"/>
+                      </a:solidFill>
+                      <a:prstDash val="solid"/>
+                      <a:round/>
+                      <a:headEnd type="none" w="med" len="med"/>
+                      <a:tailEnd type="none" w="med" len="med"/>
+                    </a:lnL>
+                    <a:lnB w="12700" cap="flat" cmpd="sng" algn="ctr">
+                      <a:solidFill>
+                        <a:schemeClr val="bg1">
+                          <a:lumMod val="75000"/>
+                        </a:schemeClr>
+                      </a:solidFill>
+                      <a:prstDash val="solid"/>
+                      <a:round/>
+                      <a:headEnd type="none" w="med" len="med"/>
+                      <a:tailEnd type="none" w="med" len="med"/>
+                    </a:lnB>
+                  </a:tcPr>
+                </a:tc>
+                <a:extLst>
+                  <a:ext uri="{0D108BD9-81ED-4DB2-BD59-A6C34878D82A}">
+                    <a16:rowId xmlns:a16="http://schemas.microsoft.com/office/drawing/2014/main" val="3517527668"/>
+                  </a:ext>
+                </a:extLst>
+              </a:tr>
+              <a:tr h="125496">
+                <a:tc>
+                  <a:txBody>
+                    <a:bodyPr/>
+                    <a:lstStyle/>
+                    <a:p>
+                      <a:pPr algn="l" fontAlgn="b">
+                        <a:buNone/>
+                      </a:pPr>
+                      <a:r>
+                        <a:rPr lang="en-CA" sz="1200" b="0" i="0" u="none" strike="noStrike">
+                          <a:solidFill>
+                            <a:srgbClr val="000000"/>
+                          </a:solidFill>
+                          <a:effectLst/>
+                          <a:latin typeface="Courier New" panose="02070309020205020404" pitchFamily="49" charset="0"/>
+                          <a:cs typeface="Courier New" panose="02070309020205020404" pitchFamily="49" charset="0"/>
+                        </a:rPr>
+                        <a:t>ATP-dependent activity</a:t>
+                      </a:r>
+                    </a:p>
+                  </a:txBody>
+                  <a:tcPr marL="6350" marR="6350" marT="6350" marB="0" anchor="b">
+                    <a:lnR w="12700" cap="flat" cmpd="sng" algn="ctr">
+                      <a:solidFill>
+                        <a:schemeClr val="tx1"/>
+                      </a:solidFill>
+                      <a:prstDash val="solid"/>
+                      <a:round/>
+                      <a:headEnd type="none" w="med" len="med"/>
+                      <a:tailEnd type="none" w="med" len="med"/>
+                    </a:lnR>
+                    <a:lnT w="12700" cap="flat" cmpd="sng" algn="ctr">
+                      <a:solidFill>
+                        <a:schemeClr val="bg1">
+                          <a:lumMod val="75000"/>
+                        </a:schemeClr>
+                      </a:solidFill>
+                      <a:prstDash val="solid"/>
+                      <a:round/>
+                      <a:headEnd type="none" w="med" len="med"/>
+                      <a:tailEnd type="none" w="med" len="med"/>
+                    </a:lnT>
+                    <a:lnB w="12700" cap="flat" cmpd="sng" algn="ctr">
+                      <a:solidFill>
+                        <a:schemeClr val="bg1">
+                          <a:lumMod val="75000"/>
+                        </a:schemeClr>
+                      </a:solidFill>
+                      <a:prstDash val="solid"/>
+                      <a:round/>
+                      <a:headEnd type="none" w="med" len="med"/>
+                      <a:tailEnd type="none" w="med" len="med"/>
+                    </a:lnB>
+                  </a:tcPr>
+                </a:tc>
+                <a:tc>
+                  <a:txBody>
+                    <a:bodyPr/>
+                    <a:lstStyle/>
+                    <a:p>
+                      <a:pPr algn="r" fontAlgn="b">
+                        <a:buNone/>
+                      </a:pPr>
+                      <a:r>
+                        <a:rPr lang="en-CA" sz="1200" b="0" i="0" u="none" strike="noStrike">
+                          <a:solidFill>
+                            <a:srgbClr val="000000"/>
+                          </a:solidFill>
+                          <a:effectLst/>
+                          <a:latin typeface="Courier New" panose="02070309020205020404" pitchFamily="49" charset="0"/>
+                          <a:cs typeface="Courier New" panose="02070309020205020404" pitchFamily="49" charset="0"/>
+                        </a:rPr>
+                        <a:t>0.000006</a:t>
+                      </a:r>
+                    </a:p>
+                  </a:txBody>
+                  <a:tcPr marL="6350" marR="6350" marT="6350" marB="0" anchor="b">
+                    <a:lnL w="12700" cap="flat" cmpd="sng" algn="ctr">
+                      <a:solidFill>
+                        <a:schemeClr val="tx1"/>
+                      </a:solidFill>
+                      <a:prstDash val="solid"/>
+                      <a:round/>
+                      <a:headEnd type="none" w="med" len="med"/>
+                      <a:tailEnd type="none" w="med" len="med"/>
+                    </a:lnL>
+                    <a:lnT w="12700" cap="flat" cmpd="sng" algn="ctr">
+                      <a:solidFill>
+                        <a:schemeClr val="bg1">
+                          <a:lumMod val="75000"/>
+                        </a:schemeClr>
+                      </a:solidFill>
+                      <a:prstDash val="solid"/>
+                      <a:round/>
+                      <a:headEnd type="none" w="med" len="med"/>
+                      <a:tailEnd type="none" w="med" len="med"/>
+                    </a:lnT>
+                    <a:lnB w="12700" cap="flat" cmpd="sng" algn="ctr">
+                      <a:solidFill>
+                        <a:schemeClr val="bg1">
+                          <a:lumMod val="75000"/>
+                        </a:schemeClr>
+                      </a:solidFill>
+                      <a:prstDash val="solid"/>
+                      <a:round/>
+                      <a:headEnd type="none" w="med" len="med"/>
+                      <a:tailEnd type="none" w="med" len="med"/>
+                    </a:lnB>
+                  </a:tcPr>
+                </a:tc>
+                <a:extLst>
+                  <a:ext uri="{0D108BD9-81ED-4DB2-BD59-A6C34878D82A}">
+                    <a16:rowId xmlns:a16="http://schemas.microsoft.com/office/drawing/2014/main" val="2117434380"/>
+                  </a:ext>
+                </a:extLst>
+              </a:tr>
+              <a:tr h="183642">
+                <a:tc>
+                  <a:txBody>
+                    <a:bodyPr/>
+                    <a:lstStyle/>
+                    <a:p>
+                      <a:pPr algn="l" fontAlgn="b">
+                        <a:buNone/>
+                      </a:pPr>
+                      <a:r>
+                        <a:rPr lang="en-CA" sz="1200" b="0" i="0" u="none" strike="noStrike">
+                          <a:solidFill>
+                            <a:srgbClr val="000000"/>
+                          </a:solidFill>
+                          <a:effectLst/>
+                          <a:latin typeface="Courier New" panose="02070309020205020404" pitchFamily="49" charset="0"/>
+                          <a:cs typeface="Courier New" panose="02070309020205020404" pitchFamily="49" charset="0"/>
+                        </a:rPr>
+                        <a:t>mediator complex binding</a:t>
+                      </a:r>
+                    </a:p>
+                  </a:txBody>
+                  <a:tcPr marL="6350" marR="6350" marT="6350" marB="0" anchor="b">
+                    <a:lnR w="12700" cap="flat" cmpd="sng" algn="ctr">
+                      <a:solidFill>
+                        <a:schemeClr val="tx1"/>
+                      </a:solidFill>
+                      <a:prstDash val="solid"/>
+                      <a:round/>
+                      <a:headEnd type="none" w="med" len="med"/>
+                      <a:tailEnd type="none" w="med" len="med"/>
+                    </a:lnR>
+                    <a:lnT w="12700" cap="flat" cmpd="sng" algn="ctr">
+                      <a:solidFill>
+                        <a:schemeClr val="bg1">
+                          <a:lumMod val="75000"/>
+                        </a:schemeClr>
+                      </a:solidFill>
+                      <a:prstDash val="solid"/>
+                      <a:round/>
+                      <a:headEnd type="none" w="med" len="med"/>
+                      <a:tailEnd type="none" w="med" len="med"/>
+                    </a:lnT>
+                    <a:lnB w="12700" cap="flat" cmpd="sng" algn="ctr">
+                      <a:solidFill>
+                        <a:schemeClr val="bg1">
+                          <a:lumMod val="75000"/>
+                        </a:schemeClr>
+                      </a:solidFill>
+                      <a:prstDash val="solid"/>
+                      <a:round/>
+                      <a:headEnd type="none" w="med" len="med"/>
+                      <a:tailEnd type="none" w="med" len="med"/>
+                    </a:lnB>
+                  </a:tcPr>
+                </a:tc>
+                <a:tc>
+                  <a:txBody>
+                    <a:bodyPr/>
+                    <a:lstStyle/>
+                    <a:p>
+                      <a:pPr algn="r" fontAlgn="b">
+                        <a:buNone/>
+                      </a:pPr>
+                      <a:r>
+                        <a:rPr lang="en-CA" sz="1200" b="0" i="0" u="none" strike="noStrike">
+                          <a:solidFill>
+                            <a:srgbClr val="000000"/>
+                          </a:solidFill>
+                          <a:effectLst/>
+                          <a:latin typeface="Courier New" panose="02070309020205020404" pitchFamily="49" charset="0"/>
+                          <a:cs typeface="Courier New" panose="02070309020205020404" pitchFamily="49" charset="0"/>
+                        </a:rPr>
+                        <a:t>0.000099</a:t>
+                      </a:r>
+                    </a:p>
+                  </a:txBody>
+                  <a:tcPr marL="6350" marR="6350" marT="6350" marB="0" anchor="b">
+                    <a:lnL w="12700" cap="flat" cmpd="sng" algn="ctr">
+                      <a:solidFill>
+                        <a:schemeClr val="tx1"/>
+                      </a:solidFill>
+                      <a:prstDash val="solid"/>
+                      <a:round/>
+                      <a:headEnd type="none" w="med" len="med"/>
+                      <a:tailEnd type="none" w="med" len="med"/>
+                    </a:lnL>
+                    <a:lnT w="12700" cap="flat" cmpd="sng" algn="ctr">
+                      <a:solidFill>
+                        <a:schemeClr val="bg1">
+                          <a:lumMod val="75000"/>
+                        </a:schemeClr>
+                      </a:solidFill>
+                      <a:prstDash val="solid"/>
+                      <a:round/>
+                      <a:headEnd type="none" w="med" len="med"/>
+                      <a:tailEnd type="none" w="med" len="med"/>
+                    </a:lnT>
+                    <a:lnB w="12700" cap="flat" cmpd="sng" algn="ctr">
+                      <a:solidFill>
+                        <a:schemeClr val="bg1">
+                          <a:lumMod val="75000"/>
+                        </a:schemeClr>
+                      </a:solidFill>
+                      <a:prstDash val="solid"/>
+                      <a:round/>
+                      <a:headEnd type="none" w="med" len="med"/>
+                      <a:tailEnd type="none" w="med" len="med"/>
+                    </a:lnB>
+                  </a:tcPr>
+                </a:tc>
+                <a:extLst>
+                  <a:ext uri="{0D108BD9-81ED-4DB2-BD59-A6C34878D82A}">
+                    <a16:rowId xmlns:a16="http://schemas.microsoft.com/office/drawing/2014/main" val="740033294"/>
+                  </a:ext>
+                </a:extLst>
+              </a:tr>
+              <a:tr h="246781">
+                <a:tc>
+                  <a:txBody>
+                    <a:bodyPr/>
+                    <a:lstStyle/>
+                    <a:p>
+                      <a:pPr algn="l" fontAlgn="b">
+                        <a:buNone/>
+                      </a:pPr>
+                      <a:r>
+                        <a:rPr lang="en-CA" sz="1200" b="0" i="0" u="none" strike="noStrike">
+                          <a:solidFill>
+                            <a:srgbClr val="000000"/>
+                          </a:solidFill>
+                          <a:effectLst/>
+                          <a:latin typeface="Courier New" panose="02070309020205020404" pitchFamily="49" charset="0"/>
+                          <a:cs typeface="Courier New" panose="02070309020205020404" pitchFamily="49" charset="0"/>
+                        </a:rPr>
+                        <a:t>ribonucleoside triphosphate phosphatase activity</a:t>
+                      </a:r>
+                    </a:p>
+                  </a:txBody>
+                  <a:tcPr marL="6350" marR="6350" marT="6350" marB="0" anchor="b">
+                    <a:lnR w="12700" cap="flat" cmpd="sng" algn="ctr">
+                      <a:solidFill>
+                        <a:schemeClr val="tx1"/>
+                      </a:solidFill>
+                      <a:prstDash val="solid"/>
+                      <a:round/>
+                      <a:headEnd type="none" w="med" len="med"/>
+                      <a:tailEnd type="none" w="med" len="med"/>
+                    </a:lnR>
+                    <a:lnT w="12700" cap="flat" cmpd="sng" algn="ctr">
+                      <a:solidFill>
+                        <a:schemeClr val="bg1">
+                          <a:lumMod val="75000"/>
+                        </a:schemeClr>
+                      </a:solidFill>
+                      <a:prstDash val="solid"/>
+                      <a:round/>
+                      <a:headEnd type="none" w="med" len="med"/>
+                      <a:tailEnd type="none" w="med" len="med"/>
+                    </a:lnT>
+                    <a:lnB w="12700" cap="flat" cmpd="sng" algn="ctr">
+                      <a:solidFill>
+                        <a:schemeClr val="bg1">
+                          <a:lumMod val="75000"/>
+                        </a:schemeClr>
+                      </a:solidFill>
+                      <a:prstDash val="solid"/>
+                      <a:round/>
+                      <a:headEnd type="none" w="med" len="med"/>
+                      <a:tailEnd type="none" w="med" len="med"/>
+                    </a:lnB>
+                  </a:tcPr>
+                </a:tc>
+                <a:tc>
+                  <a:txBody>
+                    <a:bodyPr/>
+                    <a:lstStyle/>
+                    <a:p>
+                      <a:pPr algn="r" fontAlgn="b">
+                        <a:buNone/>
+                      </a:pPr>
+                      <a:r>
+                        <a:rPr lang="en-CA" sz="1200" b="0" i="0" u="none" strike="noStrike">
+                          <a:solidFill>
+                            <a:srgbClr val="000000"/>
+                          </a:solidFill>
+                          <a:effectLst/>
+                          <a:latin typeface="Courier New" panose="02070309020205020404" pitchFamily="49" charset="0"/>
+                          <a:cs typeface="Courier New" panose="02070309020205020404" pitchFamily="49" charset="0"/>
+                        </a:rPr>
+                        <a:t>0.000148</a:t>
+                      </a:r>
+                    </a:p>
+                  </a:txBody>
+                  <a:tcPr marL="6350" marR="6350" marT="6350" marB="0" anchor="b">
+                    <a:lnL w="12700" cap="flat" cmpd="sng" algn="ctr">
+                      <a:solidFill>
+                        <a:schemeClr val="tx1"/>
+                      </a:solidFill>
+                      <a:prstDash val="solid"/>
+                      <a:round/>
+                      <a:headEnd type="none" w="med" len="med"/>
+                      <a:tailEnd type="none" w="med" len="med"/>
+                    </a:lnL>
+                    <a:lnT w="12700" cap="flat" cmpd="sng" algn="ctr">
+                      <a:solidFill>
+                        <a:schemeClr val="bg1">
+                          <a:lumMod val="75000"/>
+                        </a:schemeClr>
+                      </a:solidFill>
+                      <a:prstDash val="solid"/>
+                      <a:round/>
+                      <a:headEnd type="none" w="med" len="med"/>
+                      <a:tailEnd type="none" w="med" len="med"/>
+                    </a:lnT>
+                    <a:lnB w="12700" cap="flat" cmpd="sng" algn="ctr">
+                      <a:solidFill>
+                        <a:schemeClr val="bg1">
+                          <a:lumMod val="75000"/>
+                        </a:schemeClr>
+                      </a:solidFill>
+                      <a:prstDash val="solid"/>
+                      <a:round/>
+                      <a:headEnd type="none" w="med" len="med"/>
+                      <a:tailEnd type="none" w="med" len="med"/>
+                    </a:lnB>
+                  </a:tcPr>
+                </a:tc>
+                <a:extLst>
+                  <a:ext uri="{0D108BD9-81ED-4DB2-BD59-A6C34878D82A}">
+                    <a16:rowId xmlns:a16="http://schemas.microsoft.com/office/drawing/2014/main" val="2893406690"/>
+                  </a:ext>
+                </a:extLst>
+              </a:tr>
+              <a:tr h="183642">
+                <a:tc>
+                  <a:txBody>
+                    <a:bodyPr/>
+                    <a:lstStyle/>
+                    <a:p>
+                      <a:pPr algn="l" fontAlgn="b">
+                        <a:buNone/>
+                      </a:pPr>
+                      <a:r>
+                        <a:rPr lang="en-CA" sz="1200" b="0" i="0" u="none" strike="noStrike">
+                          <a:solidFill>
+                            <a:srgbClr val="000000"/>
+                          </a:solidFill>
+                          <a:effectLst/>
+                          <a:latin typeface="Courier New" panose="02070309020205020404" pitchFamily="49" charset="0"/>
+                          <a:cs typeface="Courier New" panose="02070309020205020404" pitchFamily="49" charset="0"/>
+                        </a:rPr>
+                        <a:t>pyrophosphatase activity</a:t>
+                      </a:r>
+                    </a:p>
+                  </a:txBody>
+                  <a:tcPr marL="6350" marR="6350" marT="6350" marB="0" anchor="b">
+                    <a:lnR w="12700" cap="flat" cmpd="sng" algn="ctr">
+                      <a:solidFill>
+                        <a:schemeClr val="tx1"/>
+                      </a:solidFill>
+                      <a:prstDash val="solid"/>
+                      <a:round/>
+                      <a:headEnd type="none" w="med" len="med"/>
+                      <a:tailEnd type="none" w="med" len="med"/>
+                    </a:lnR>
+                    <a:lnT w="12700" cap="flat" cmpd="sng" algn="ctr">
+                      <a:solidFill>
+                        <a:schemeClr val="bg1">
+                          <a:lumMod val="75000"/>
+                        </a:schemeClr>
+                      </a:solidFill>
+                      <a:prstDash val="solid"/>
+                      <a:round/>
+                      <a:headEnd type="none" w="med" len="med"/>
+                      <a:tailEnd type="none" w="med" len="med"/>
+                    </a:lnT>
+                    <a:lnB w="12700" cap="flat" cmpd="sng" algn="ctr">
+                      <a:solidFill>
+                        <a:schemeClr val="bg1">
+                          <a:lumMod val="75000"/>
+                        </a:schemeClr>
+                      </a:solidFill>
+                      <a:prstDash val="solid"/>
+                      <a:round/>
+                      <a:headEnd type="none" w="med" len="med"/>
+                      <a:tailEnd type="none" w="med" len="med"/>
+                    </a:lnB>
+                  </a:tcPr>
+                </a:tc>
+                <a:tc>
+                  <a:txBody>
+                    <a:bodyPr/>
+                    <a:lstStyle/>
+                    <a:p>
+                      <a:pPr algn="r" fontAlgn="b">
+                        <a:buNone/>
+                      </a:pPr>
+                      <a:r>
+                        <a:rPr lang="en-CA" sz="1200" b="0" i="0" u="none" strike="noStrike">
+                          <a:solidFill>
+                            <a:srgbClr val="000000"/>
+                          </a:solidFill>
+                          <a:effectLst/>
+                          <a:latin typeface="Courier New" panose="02070309020205020404" pitchFamily="49" charset="0"/>
+                          <a:cs typeface="Courier New" panose="02070309020205020404" pitchFamily="49" charset="0"/>
+                        </a:rPr>
+                        <a:t>0.000188</a:t>
+                      </a:r>
+                    </a:p>
+                  </a:txBody>
+                  <a:tcPr marL="6350" marR="6350" marT="6350" marB="0" anchor="b">
+                    <a:lnL w="12700" cap="flat" cmpd="sng" algn="ctr">
+                      <a:solidFill>
+                        <a:schemeClr val="tx1"/>
+                      </a:solidFill>
+                      <a:prstDash val="solid"/>
+                      <a:round/>
+                      <a:headEnd type="none" w="med" len="med"/>
+                      <a:tailEnd type="none" w="med" len="med"/>
+                    </a:lnL>
+                    <a:lnT w="12700" cap="flat" cmpd="sng" algn="ctr">
+                      <a:solidFill>
+                        <a:schemeClr val="bg1">
+                          <a:lumMod val="75000"/>
+                        </a:schemeClr>
+                      </a:solidFill>
+                      <a:prstDash val="solid"/>
+                      <a:round/>
+                      <a:headEnd type="none" w="med" len="med"/>
+                      <a:tailEnd type="none" w="med" len="med"/>
+                    </a:lnT>
+                    <a:lnB w="12700" cap="flat" cmpd="sng" algn="ctr">
+                      <a:solidFill>
+                        <a:schemeClr val="bg1">
+                          <a:lumMod val="75000"/>
+                        </a:schemeClr>
+                      </a:solidFill>
+                      <a:prstDash val="solid"/>
+                      <a:round/>
+                      <a:headEnd type="none" w="med" len="med"/>
+                      <a:tailEnd type="none" w="med" len="med"/>
+                    </a:lnB>
+                  </a:tcPr>
+                </a:tc>
+                <a:extLst>
+                  <a:ext uri="{0D108BD9-81ED-4DB2-BD59-A6C34878D82A}">
+                    <a16:rowId xmlns:a16="http://schemas.microsoft.com/office/drawing/2014/main" val="1015402240"/>
+                  </a:ext>
+                </a:extLst>
+              </a:tr>
+              <a:tr h="365558">
+                <a:tc>
+                  <a:txBody>
+                    <a:bodyPr/>
+                    <a:lstStyle/>
+                    <a:p>
+                      <a:pPr algn="l" fontAlgn="b">
+                        <a:buNone/>
+                      </a:pPr>
+                      <a:r>
+                        <a:rPr lang="en-US" sz="1200" b="0" i="0" u="none" strike="noStrike" dirty="0">
+                          <a:solidFill>
+                            <a:srgbClr val="000000"/>
+                          </a:solidFill>
+                          <a:effectLst/>
+                          <a:latin typeface="Courier New" panose="02070309020205020404" pitchFamily="49" charset="0"/>
+                          <a:cs typeface="Courier New" panose="02070309020205020404" pitchFamily="49" charset="0"/>
+                        </a:rPr>
+                        <a:t>hydrolase activity, acting on acid anhydrides</a:t>
+                      </a:r>
+                    </a:p>
+                  </a:txBody>
+                  <a:tcPr marL="6350" marR="6350" marT="6350" marB="0" anchor="b">
+                    <a:lnR w="12700" cap="flat" cmpd="sng" algn="ctr">
+                      <a:solidFill>
+                        <a:schemeClr val="tx1"/>
+                      </a:solidFill>
+                      <a:prstDash val="solid"/>
+                      <a:round/>
+                      <a:headEnd type="none" w="med" len="med"/>
+                      <a:tailEnd type="none" w="med" len="med"/>
+                    </a:lnR>
+                    <a:lnT w="12700" cap="flat" cmpd="sng" algn="ctr">
+                      <a:solidFill>
+                        <a:schemeClr val="bg1">
+                          <a:lumMod val="75000"/>
+                        </a:schemeClr>
+                      </a:solidFill>
+                      <a:prstDash val="solid"/>
+                      <a:round/>
+                      <a:headEnd type="none" w="med" len="med"/>
+                      <a:tailEnd type="none" w="med" len="med"/>
+                    </a:lnT>
+                    <a:lnB w="12700" cap="flat" cmpd="sng" algn="ctr">
+                      <a:solidFill>
+                        <a:schemeClr val="bg1">
+                          <a:lumMod val="75000"/>
+                        </a:schemeClr>
+                      </a:solidFill>
+                      <a:prstDash val="solid"/>
+                      <a:round/>
+                      <a:headEnd type="none" w="med" len="med"/>
+                      <a:tailEnd type="none" w="med" len="med"/>
+                    </a:lnB>
+                  </a:tcPr>
+                </a:tc>
+                <a:tc>
+                  <a:txBody>
+                    <a:bodyPr/>
+                    <a:lstStyle/>
+                    <a:p>
+                      <a:pPr algn="r" fontAlgn="b">
+                        <a:buNone/>
+                      </a:pPr>
+                      <a:r>
+                        <a:rPr lang="en-CA" sz="1200" b="0" i="0" u="none" strike="noStrike">
+                          <a:solidFill>
+                            <a:srgbClr val="000000"/>
+                          </a:solidFill>
+                          <a:effectLst/>
+                          <a:latin typeface="Courier New" panose="02070309020205020404" pitchFamily="49" charset="0"/>
+                          <a:cs typeface="Courier New" panose="02070309020205020404" pitchFamily="49" charset="0"/>
+                        </a:rPr>
+                        <a:t>0.000189</a:t>
+                      </a:r>
+                    </a:p>
+                  </a:txBody>
+                  <a:tcPr marL="6350" marR="6350" marT="6350" marB="0" anchor="b">
+                    <a:lnL w="12700" cap="flat" cmpd="sng" algn="ctr">
+                      <a:solidFill>
+                        <a:schemeClr val="tx1"/>
+                      </a:solidFill>
+                      <a:prstDash val="solid"/>
+                      <a:round/>
+                      <a:headEnd type="none" w="med" len="med"/>
+                      <a:tailEnd type="none" w="med" len="med"/>
+                    </a:lnL>
+                    <a:lnT w="12700" cap="flat" cmpd="sng" algn="ctr">
+                      <a:solidFill>
+                        <a:schemeClr val="bg1">
+                          <a:lumMod val="75000"/>
+                        </a:schemeClr>
+                      </a:solidFill>
+                      <a:prstDash val="solid"/>
+                      <a:round/>
+                      <a:headEnd type="none" w="med" len="med"/>
+                      <a:tailEnd type="none" w="med" len="med"/>
+                    </a:lnT>
+                    <a:lnB w="12700" cap="flat" cmpd="sng" algn="ctr">
+                      <a:solidFill>
+                        <a:schemeClr val="bg1">
+                          <a:lumMod val="75000"/>
+                        </a:schemeClr>
+                      </a:solidFill>
+                      <a:prstDash val="solid"/>
+                      <a:round/>
+                      <a:headEnd type="none" w="med" len="med"/>
+                      <a:tailEnd type="none" w="med" len="med"/>
+                    </a:lnB>
+                  </a:tcPr>
+                </a:tc>
+                <a:extLst>
+                  <a:ext uri="{0D108BD9-81ED-4DB2-BD59-A6C34878D82A}">
+                    <a16:rowId xmlns:a16="http://schemas.microsoft.com/office/drawing/2014/main" val="216578652"/>
+                  </a:ext>
+                </a:extLst>
+              </a:tr>
+              <a:tr h="246781">
+                <a:tc>
+                  <a:txBody>
+                    <a:bodyPr/>
+                    <a:lstStyle/>
+                    <a:p>
+                      <a:pPr algn="l" fontAlgn="b">
+                        <a:buNone/>
+                      </a:pPr>
+                      <a:r>
+                        <a:rPr lang="en-US" sz="1200" b="0" i="0" u="none" strike="noStrike" dirty="0">
+                          <a:solidFill>
+                            <a:srgbClr val="000000"/>
+                          </a:solidFill>
+                          <a:effectLst/>
+                          <a:latin typeface="Courier New" panose="02070309020205020404" pitchFamily="49" charset="0"/>
+                          <a:cs typeface="Courier New" panose="02070309020205020404" pitchFamily="49" charset="0"/>
+                        </a:rPr>
+                        <a:t>hydrolase activity, acting on acid anhydrides, in phosphorus-containing anhydrides</a:t>
+                      </a:r>
+                    </a:p>
+                  </a:txBody>
+                  <a:tcPr marL="6350" marR="6350" marT="6350" marB="0" anchor="b">
+                    <a:lnR w="12700" cap="flat" cmpd="sng" algn="ctr">
+                      <a:solidFill>
+                        <a:schemeClr val="tx1"/>
+                      </a:solidFill>
+                      <a:prstDash val="solid"/>
+                      <a:round/>
+                      <a:headEnd type="none" w="med" len="med"/>
+                      <a:tailEnd type="none" w="med" len="med"/>
+                    </a:lnR>
+                    <a:lnT w="12700" cap="flat" cmpd="sng" algn="ctr">
+                      <a:solidFill>
+                        <a:schemeClr val="bg1">
+                          <a:lumMod val="75000"/>
+                        </a:schemeClr>
+                      </a:solidFill>
+                      <a:prstDash val="solid"/>
+                      <a:round/>
+                      <a:headEnd type="none" w="med" len="med"/>
+                      <a:tailEnd type="none" w="med" len="med"/>
+                    </a:lnT>
+                    <a:lnB w="12700" cap="flat" cmpd="sng" algn="ctr">
+                      <a:solidFill>
+                        <a:schemeClr val="bg1">
+                          <a:lumMod val="75000"/>
+                        </a:schemeClr>
+                      </a:solidFill>
+                      <a:prstDash val="solid"/>
+                      <a:round/>
+                      <a:headEnd type="none" w="med" len="med"/>
+                      <a:tailEnd type="none" w="med" len="med"/>
+                    </a:lnB>
+                  </a:tcPr>
+                </a:tc>
+                <a:tc>
+                  <a:txBody>
+                    <a:bodyPr/>
+                    <a:lstStyle/>
+                    <a:p>
+                      <a:pPr algn="r" fontAlgn="b">
+                        <a:buNone/>
+                      </a:pPr>
+                      <a:r>
+                        <a:rPr lang="en-CA" sz="1200" b="0" i="0" u="none" strike="noStrike">
+                          <a:solidFill>
+                            <a:srgbClr val="000000"/>
+                          </a:solidFill>
+                          <a:effectLst/>
+                          <a:latin typeface="Courier New" panose="02070309020205020404" pitchFamily="49" charset="0"/>
+                          <a:cs typeface="Courier New" panose="02070309020205020404" pitchFamily="49" charset="0"/>
+                        </a:rPr>
+                        <a:t>0.000189</a:t>
+                      </a:r>
+                    </a:p>
+                  </a:txBody>
+                  <a:tcPr marL="6350" marR="6350" marT="6350" marB="0" anchor="b">
+                    <a:lnL w="12700" cap="flat" cmpd="sng" algn="ctr">
+                      <a:solidFill>
+                        <a:schemeClr val="tx1"/>
+                      </a:solidFill>
+                      <a:prstDash val="solid"/>
+                      <a:round/>
+                      <a:headEnd type="none" w="med" len="med"/>
+                      <a:tailEnd type="none" w="med" len="med"/>
+                    </a:lnL>
+                    <a:lnT w="12700" cap="flat" cmpd="sng" algn="ctr">
+                      <a:solidFill>
+                        <a:schemeClr val="bg1">
+                          <a:lumMod val="75000"/>
+                        </a:schemeClr>
+                      </a:solidFill>
+                      <a:prstDash val="solid"/>
+                      <a:round/>
+                      <a:headEnd type="none" w="med" len="med"/>
+                      <a:tailEnd type="none" w="med" len="med"/>
+                    </a:lnT>
+                    <a:lnB w="12700" cap="flat" cmpd="sng" algn="ctr">
+                      <a:solidFill>
+                        <a:schemeClr val="bg1">
+                          <a:lumMod val="75000"/>
+                        </a:schemeClr>
+                      </a:solidFill>
+                      <a:prstDash val="solid"/>
+                      <a:round/>
+                      <a:headEnd type="none" w="med" len="med"/>
+                      <a:tailEnd type="none" w="med" len="med"/>
+                    </a:lnB>
+                  </a:tcPr>
+                </a:tc>
+                <a:extLst>
+                  <a:ext uri="{0D108BD9-81ED-4DB2-BD59-A6C34878D82A}">
+                    <a16:rowId xmlns:a16="http://schemas.microsoft.com/office/drawing/2014/main" val="1957212222"/>
+                  </a:ext>
+                </a:extLst>
+              </a:tr>
+              <a:tr h="125496">
+                <a:tc>
+                  <a:txBody>
+                    <a:bodyPr/>
+                    <a:lstStyle/>
+                    <a:p>
+                      <a:pPr algn="l" fontAlgn="b">
+                        <a:buNone/>
+                      </a:pPr>
+                      <a:r>
+                        <a:rPr lang="en-CA" sz="1200" b="0" i="0" u="none" strike="noStrike" dirty="0">
+                          <a:solidFill>
+                            <a:srgbClr val="000000"/>
+                          </a:solidFill>
+                          <a:effectLst/>
+                          <a:latin typeface="Courier New" panose="02070309020205020404" pitchFamily="49" charset="0"/>
+                          <a:cs typeface="Courier New" panose="02070309020205020404" pitchFamily="49" charset="0"/>
+                        </a:rPr>
+                        <a:t>ATP binding</a:t>
+                      </a:r>
+                    </a:p>
+                  </a:txBody>
+                  <a:tcPr marL="6350" marR="6350" marT="6350" marB="0" anchor="b">
+                    <a:lnR w="12700" cap="flat" cmpd="sng" algn="ctr">
+                      <a:solidFill>
+                        <a:schemeClr val="tx1"/>
+                      </a:solidFill>
+                      <a:prstDash val="solid"/>
+                      <a:round/>
+                      <a:headEnd type="none" w="med" len="med"/>
+                      <a:tailEnd type="none" w="med" len="med"/>
+                    </a:lnR>
+                    <a:lnT w="12700" cap="flat" cmpd="sng" algn="ctr">
+                      <a:solidFill>
+                        <a:schemeClr val="bg1">
+                          <a:lumMod val="75000"/>
+                        </a:schemeClr>
+                      </a:solidFill>
+                      <a:prstDash val="solid"/>
+                      <a:round/>
+                      <a:headEnd type="none" w="med" len="med"/>
+                      <a:tailEnd type="none" w="med" len="med"/>
+                    </a:lnT>
+                    <a:lnB w="12700" cap="flat" cmpd="sng" algn="ctr">
+                      <a:solidFill>
+                        <a:schemeClr val="bg1">
+                          <a:lumMod val="75000"/>
+                        </a:schemeClr>
+                      </a:solidFill>
+                      <a:prstDash val="solid"/>
+                      <a:round/>
+                      <a:headEnd type="none" w="med" len="med"/>
+                      <a:tailEnd type="none" w="med" len="med"/>
+                    </a:lnB>
+                  </a:tcPr>
+                </a:tc>
+                <a:tc>
+                  <a:txBody>
+                    <a:bodyPr/>
+                    <a:lstStyle/>
+                    <a:p>
+                      <a:pPr algn="r" fontAlgn="b">
+                        <a:buNone/>
+                      </a:pPr>
+                      <a:r>
+                        <a:rPr lang="en-CA" sz="1200" b="0" i="0" u="none" strike="noStrike">
+                          <a:solidFill>
+                            <a:srgbClr val="000000"/>
+                          </a:solidFill>
+                          <a:effectLst/>
+                          <a:latin typeface="Courier New" panose="02070309020205020404" pitchFamily="49" charset="0"/>
+                          <a:cs typeface="Courier New" panose="02070309020205020404" pitchFamily="49" charset="0"/>
+                        </a:rPr>
+                        <a:t>0.000474</a:t>
+                      </a:r>
+                    </a:p>
+                  </a:txBody>
+                  <a:tcPr marL="6350" marR="6350" marT="6350" marB="0" anchor="b">
+                    <a:lnL w="12700" cap="flat" cmpd="sng" algn="ctr">
+                      <a:solidFill>
+                        <a:schemeClr val="tx1"/>
+                      </a:solidFill>
+                      <a:prstDash val="solid"/>
+                      <a:round/>
+                      <a:headEnd type="none" w="med" len="med"/>
+                      <a:tailEnd type="none" w="med" len="med"/>
+                    </a:lnL>
+                    <a:lnT w="12700" cap="flat" cmpd="sng" algn="ctr">
+                      <a:solidFill>
+                        <a:schemeClr val="bg1">
+                          <a:lumMod val="75000"/>
+                        </a:schemeClr>
+                      </a:solidFill>
+                      <a:prstDash val="solid"/>
+                      <a:round/>
+                      <a:headEnd type="none" w="med" len="med"/>
+                      <a:tailEnd type="none" w="med" len="med"/>
+                    </a:lnT>
+                    <a:lnB w="12700" cap="flat" cmpd="sng" algn="ctr">
+                      <a:solidFill>
+                        <a:schemeClr val="bg1">
+                          <a:lumMod val="75000"/>
+                        </a:schemeClr>
+                      </a:solidFill>
+                      <a:prstDash val="solid"/>
+                      <a:round/>
+                      <a:headEnd type="none" w="med" len="med"/>
+                      <a:tailEnd type="none" w="med" len="med"/>
+                    </a:lnB>
+                  </a:tcPr>
+                </a:tc>
+                <a:extLst>
+                  <a:ext uri="{0D108BD9-81ED-4DB2-BD59-A6C34878D82A}">
+                    <a16:rowId xmlns:a16="http://schemas.microsoft.com/office/drawing/2014/main" val="4151670983"/>
+                  </a:ext>
+                </a:extLst>
+              </a:tr>
+              <a:tr h="125496">
+                <a:tc>
+                  <a:txBody>
+                    <a:bodyPr/>
+                    <a:lstStyle/>
+                    <a:p>
+                      <a:pPr algn="l" fontAlgn="b">
+                        <a:buNone/>
+                      </a:pPr>
+                      <a:r>
+                        <a:rPr lang="en-CA" sz="1200" b="0" i="0" u="none" strike="noStrike">
+                          <a:solidFill>
+                            <a:srgbClr val="000000"/>
+                          </a:solidFill>
+                          <a:effectLst/>
+                          <a:latin typeface="Courier New" panose="02070309020205020404" pitchFamily="49" charset="0"/>
+                          <a:cs typeface="Courier New" panose="02070309020205020404" pitchFamily="49" charset="0"/>
+                        </a:rPr>
+                        <a:t>adenyl ribonucleotide binding</a:t>
+                      </a:r>
+                    </a:p>
+                  </a:txBody>
+                  <a:tcPr marL="6350" marR="6350" marT="6350" marB="0" anchor="b">
+                    <a:lnR w="12700" cap="flat" cmpd="sng" algn="ctr">
+                      <a:solidFill>
+                        <a:schemeClr val="tx1"/>
+                      </a:solidFill>
+                      <a:prstDash val="solid"/>
+                      <a:round/>
+                      <a:headEnd type="none" w="med" len="med"/>
+                      <a:tailEnd type="none" w="med" len="med"/>
+                    </a:lnR>
+                    <a:lnT w="12700" cap="flat" cmpd="sng" algn="ctr">
+                      <a:solidFill>
+                        <a:schemeClr val="bg1">
+                          <a:lumMod val="75000"/>
+                        </a:schemeClr>
+                      </a:solidFill>
+                      <a:prstDash val="solid"/>
+                      <a:round/>
+                      <a:headEnd type="none" w="med" len="med"/>
+                      <a:tailEnd type="none" w="med" len="med"/>
+                    </a:lnT>
+                    <a:lnB w="12700" cap="flat" cmpd="sng" algn="ctr">
+                      <a:solidFill>
+                        <a:schemeClr val="bg1">
+                          <a:lumMod val="75000"/>
+                        </a:schemeClr>
+                      </a:solidFill>
+                      <a:prstDash val="solid"/>
+                      <a:round/>
+                      <a:headEnd type="none" w="med" len="med"/>
+                      <a:tailEnd type="none" w="med" len="med"/>
+                    </a:lnB>
+                  </a:tcPr>
+                </a:tc>
+                <a:tc>
+                  <a:txBody>
+                    <a:bodyPr/>
+                    <a:lstStyle/>
+                    <a:p>
+                      <a:pPr algn="r" fontAlgn="b">
+                        <a:buNone/>
+                      </a:pPr>
+                      <a:r>
+                        <a:rPr lang="en-CA" sz="1200" b="0" i="0" u="none" strike="noStrike">
+                          <a:solidFill>
+                            <a:srgbClr val="000000"/>
+                          </a:solidFill>
+                          <a:effectLst/>
+                          <a:latin typeface="Courier New" panose="02070309020205020404" pitchFamily="49" charset="0"/>
+                          <a:cs typeface="Courier New" panose="02070309020205020404" pitchFamily="49" charset="0"/>
+                        </a:rPr>
+                        <a:t>0.000543</a:t>
+                      </a:r>
+                    </a:p>
+                  </a:txBody>
+                  <a:tcPr marL="6350" marR="6350" marT="6350" marB="0" anchor="b">
+                    <a:lnL w="12700" cap="flat" cmpd="sng" algn="ctr">
+                      <a:solidFill>
+                        <a:schemeClr val="tx1"/>
+                      </a:solidFill>
+                      <a:prstDash val="solid"/>
+                      <a:round/>
+                      <a:headEnd type="none" w="med" len="med"/>
+                      <a:tailEnd type="none" w="med" len="med"/>
+                    </a:lnL>
+                    <a:lnT w="12700" cap="flat" cmpd="sng" algn="ctr">
+                      <a:solidFill>
+                        <a:schemeClr val="bg1">
+                          <a:lumMod val="75000"/>
+                        </a:schemeClr>
+                      </a:solidFill>
+                      <a:prstDash val="solid"/>
+                      <a:round/>
+                      <a:headEnd type="none" w="med" len="med"/>
+                      <a:tailEnd type="none" w="med" len="med"/>
+                    </a:lnT>
+                    <a:lnB w="12700" cap="flat" cmpd="sng" algn="ctr">
+                      <a:solidFill>
+                        <a:schemeClr val="bg1">
+                          <a:lumMod val="75000"/>
+                        </a:schemeClr>
+                      </a:solidFill>
+                      <a:prstDash val="solid"/>
+                      <a:round/>
+                      <a:headEnd type="none" w="med" len="med"/>
+                      <a:tailEnd type="none" w="med" len="med"/>
+                    </a:lnB>
+                  </a:tcPr>
+                </a:tc>
+                <a:extLst>
+                  <a:ext uri="{0D108BD9-81ED-4DB2-BD59-A6C34878D82A}">
+                    <a16:rowId xmlns:a16="http://schemas.microsoft.com/office/drawing/2014/main" val="694408269"/>
+                  </a:ext>
+                </a:extLst>
+              </a:tr>
+              <a:tr h="125496">
+                <a:tc>
+                  <a:txBody>
+                    <a:bodyPr/>
+                    <a:lstStyle/>
+                    <a:p>
+                      <a:pPr algn="l" fontAlgn="b">
+                        <a:buNone/>
+                      </a:pPr>
+                      <a:r>
+                        <a:rPr lang="en-CA" sz="1200" b="0" i="0" u="none" strike="noStrike" dirty="0">
+                          <a:solidFill>
+                            <a:srgbClr val="000000"/>
+                          </a:solidFill>
+                          <a:effectLst/>
+                          <a:latin typeface="Courier New" panose="02070309020205020404" pitchFamily="49" charset="0"/>
+                          <a:cs typeface="Courier New" panose="02070309020205020404" pitchFamily="49" charset="0"/>
+                        </a:rPr>
+                        <a:t>adenyl nucleotide binding</a:t>
+                      </a:r>
+                    </a:p>
+                  </a:txBody>
+                  <a:tcPr marL="6350" marR="6350" marT="6350" marB="0" anchor="b">
+                    <a:lnR w="12700" cap="flat" cmpd="sng" algn="ctr">
+                      <a:solidFill>
+                        <a:schemeClr val="tx1"/>
+                      </a:solidFill>
+                      <a:prstDash val="solid"/>
+                      <a:round/>
+                      <a:headEnd type="none" w="med" len="med"/>
+                      <a:tailEnd type="none" w="med" len="med"/>
+                    </a:lnR>
+                    <a:lnT w="12700" cap="flat" cmpd="sng" algn="ctr">
+                      <a:solidFill>
+                        <a:schemeClr val="bg1">
+                          <a:lumMod val="75000"/>
+                        </a:schemeClr>
+                      </a:solidFill>
+                      <a:prstDash val="solid"/>
+                      <a:round/>
+                      <a:headEnd type="none" w="med" len="med"/>
+                      <a:tailEnd type="none" w="med" len="med"/>
+                    </a:lnT>
+                  </a:tcPr>
+                </a:tc>
+                <a:tc>
+                  <a:txBody>
+                    <a:bodyPr/>
+                    <a:lstStyle/>
+                    <a:p>
+                      <a:pPr algn="r" fontAlgn="b">
+                        <a:buNone/>
+                      </a:pPr>
+                      <a:r>
+                        <a:rPr lang="en-CA" sz="1200" b="0" i="0" u="none" strike="noStrike" dirty="0">
+                          <a:solidFill>
+                            <a:srgbClr val="000000"/>
+                          </a:solidFill>
+                          <a:effectLst/>
+                          <a:latin typeface="Courier New" panose="02070309020205020404" pitchFamily="49" charset="0"/>
+                          <a:cs typeface="Courier New" panose="02070309020205020404" pitchFamily="49" charset="0"/>
+                        </a:rPr>
+                        <a:t>0.000726</a:t>
+                      </a:r>
+                    </a:p>
+                  </a:txBody>
+                  <a:tcPr marL="6350" marR="6350" marT="6350" marB="0" anchor="b">
+                    <a:lnL w="12700" cap="flat" cmpd="sng" algn="ctr">
+                      <a:solidFill>
+                        <a:schemeClr val="tx1"/>
+                      </a:solidFill>
+                      <a:prstDash val="solid"/>
+                      <a:round/>
+                      <a:headEnd type="none" w="med" len="med"/>
+                      <a:tailEnd type="none" w="med" len="med"/>
+                    </a:lnL>
+                    <a:lnT w="12700" cap="flat" cmpd="sng" algn="ctr">
+                      <a:solidFill>
+                        <a:schemeClr val="bg1">
+                          <a:lumMod val="75000"/>
+                        </a:schemeClr>
+                      </a:solidFill>
+                      <a:prstDash val="solid"/>
+                      <a:round/>
+                      <a:headEnd type="none" w="med" len="med"/>
+                      <a:tailEnd type="none" w="med" len="med"/>
+                    </a:lnT>
+                  </a:tcPr>
+                </a:tc>
+                <a:extLst>
+                  <a:ext uri="{0D108BD9-81ED-4DB2-BD59-A6C34878D82A}">
+                    <a16:rowId xmlns:a16="http://schemas.microsoft.com/office/drawing/2014/main" val="1892658907"/>
+                  </a:ext>
+                </a:extLst>
+              </a:tr>
+            </a:tbl>
+          </a:graphicData>
+        </a:graphic>
+      </p:graphicFrame>
+      <p:graphicFrame>
+        <p:nvGraphicFramePr>
+          <p:cNvPr id="6" name="Table 5">
+            <a:extLst>
+              <a:ext uri="{FF2B5EF4-FFF2-40B4-BE49-F238E27FC236}">
+                <a16:creationId xmlns:a16="http://schemas.microsoft.com/office/drawing/2014/main" id="{BE6E92DF-4FF5-F227-892F-E58F10E7E9CE}"/>
+              </a:ext>
+            </a:extLst>
+          </p:cNvPr>
+          <p:cNvGraphicFramePr>
+            <a:graphicFrameLocks noGrp="1"/>
+          </p:cNvGraphicFramePr>
+          <p:nvPr>
+            <p:extLst>
+              <p:ext uri="{D42A27DB-BD31-4B8C-83A1-F6EECF244321}">
+                <p14:modId xmlns:p14="http://schemas.microsoft.com/office/powerpoint/2010/main" val="1591905065"/>
+              </p:ext>
+            </p:extLst>
+          </p:nvPr>
+        </p:nvGraphicFramePr>
+        <p:xfrm>
+          <a:off x="6528803" y="5343984"/>
+          <a:ext cx="3716499" cy="1019134"/>
+        </p:xfrm>
+        <a:graphic>
+          <a:graphicData uri="http://schemas.openxmlformats.org/drawingml/2006/table">
+            <a:tbl>
+              <a:tblPr>
+                <a:tableStyleId>{5940675A-B579-460E-94D1-54222C63F5DA}</a:tableStyleId>
+              </a:tblPr>
+              <a:tblGrid>
+                <a:gridCol w="2845171">
+                  <a:extLst>
+                    <a:ext uri="{9D8B030D-6E8A-4147-A177-3AD203B41FA5}">
+                      <a16:colId xmlns:a16="http://schemas.microsoft.com/office/drawing/2014/main" val="2883141624"/>
+                    </a:ext>
+                  </a:extLst>
+                </a:gridCol>
+                <a:gridCol w="871328">
+                  <a:extLst>
+                    <a:ext uri="{9D8B030D-6E8A-4147-A177-3AD203B41FA5}">
+                      <a16:colId xmlns:a16="http://schemas.microsoft.com/office/drawing/2014/main" val="3161232302"/>
+                    </a:ext>
+                  </a:extLst>
+                </a:gridCol>
+              </a:tblGrid>
+              <a:tr h="143802">
+                <a:tc gridSpan="2">
+                  <a:txBody>
+                    <a:bodyPr/>
+                    <a:lstStyle/>
+                    <a:p>
+                      <a:pPr algn="l" fontAlgn="b">
+                        <a:buNone/>
+                      </a:pPr>
+                      <a:r>
+                        <a:rPr lang="en-US" sz="1400" b="0" i="0" u="none" strike="noStrike" dirty="0">
+                          <a:solidFill>
+                            <a:srgbClr val="000000"/>
+                          </a:solidFill>
+                          <a:effectLst/>
+                          <a:latin typeface="Verdana Pro" panose="020B0604030504040204" pitchFamily="34" charset="0"/>
+                        </a:rPr>
+                        <a:t>A0A846H7L1: gprofiler GO terms</a:t>
+                      </a:r>
+                    </a:p>
+                    <a:p>
+                      <a:pPr algn="l" fontAlgn="b">
+                        <a:buNone/>
+                      </a:pPr>
+                      <a:r>
+                        <a:rPr lang="en-US" sz="1400" b="0" i="0" u="none" strike="noStrike" dirty="0">
+                          <a:solidFill>
+                            <a:srgbClr val="000000"/>
+                          </a:solidFill>
+                          <a:effectLst/>
+                          <a:latin typeface="Verdana Pro" panose="020B0604030504040204" pitchFamily="34" charset="0"/>
+                        </a:rPr>
+                        <a:t>[cluster size: 4]</a:t>
+                      </a:r>
+                      <a:endParaRPr lang="en-CA" sz="1400" b="0" i="0" u="none" strike="noStrike" dirty="0">
+                        <a:solidFill>
+                          <a:srgbClr val="000000"/>
+                        </a:solidFill>
+                        <a:effectLst/>
+                        <a:latin typeface="Verdana Pro" panose="020B0604030504040204" pitchFamily="34" charset="0"/>
+                      </a:endParaRPr>
+                    </a:p>
+                  </a:txBody>
+                  <a:tcPr marL="3472" marR="3472" marT="3472" marB="0" anchor="b"/>
+                </a:tc>
+                <a:tc hMerge="1">
+                  <a:txBody>
+                    <a:bodyPr/>
+                    <a:lstStyle/>
+                    <a:p>
+                      <a:pPr algn="l" fontAlgn="b">
+                        <a:buNone/>
+                      </a:pPr>
+                      <a:endParaRPr lang="en-CA" sz="1400" b="0" i="0" u="none" strike="noStrike" dirty="0">
+                        <a:solidFill>
+                          <a:srgbClr val="000000"/>
+                        </a:solidFill>
+                        <a:effectLst/>
+                        <a:latin typeface="Verdana Pro" panose="020B0604030504040204" pitchFamily="34" charset="0"/>
+                      </a:endParaRPr>
+                    </a:p>
+                  </a:txBody>
+                  <a:tcPr marL="3472" marR="3472" marT="3472" marB="0" anchor="b"/>
+                </a:tc>
+                <a:extLst>
+                  <a:ext uri="{0D108BD9-81ED-4DB2-BD59-A6C34878D82A}">
+                    <a16:rowId xmlns:a16="http://schemas.microsoft.com/office/drawing/2014/main" val="3254720063"/>
+                  </a:ext>
+                </a:extLst>
+              </a:tr>
+              <a:tr h="143802">
+                <a:tc>
+                  <a:txBody>
+                    <a:bodyPr/>
+                    <a:lstStyle/>
+                    <a:p>
+                      <a:pPr algn="l" fontAlgn="b">
+                        <a:buNone/>
+                      </a:pPr>
+                      <a:r>
+                        <a:rPr lang="en-CA" sz="1400" b="0" u="none" strike="noStrike" dirty="0">
+                          <a:solidFill>
+                            <a:srgbClr val="000000"/>
+                          </a:solidFill>
+                          <a:effectLst/>
+                          <a:latin typeface="Verdana Pro" panose="020B0604030504040204" pitchFamily="34" charset="0"/>
+                        </a:rPr>
+                        <a:t>name</a:t>
+                      </a:r>
+                      <a:endParaRPr lang="en-CA" sz="1400" b="0" i="0" u="none" strike="noStrike" dirty="0">
+                        <a:solidFill>
+                          <a:srgbClr val="000000"/>
+                        </a:solidFill>
+                        <a:effectLst/>
+                        <a:latin typeface="Verdana Pro" panose="020B0604030504040204" pitchFamily="34" charset="0"/>
+                      </a:endParaRPr>
+                    </a:p>
+                  </a:txBody>
+                  <a:tcPr marL="3472" marR="3472" marT="3472" marB="0" anchor="b"/>
+                </a:tc>
+                <a:tc>
+                  <a:txBody>
+                    <a:bodyPr/>
+                    <a:lstStyle/>
+                    <a:p>
+                      <a:pPr algn="l" fontAlgn="b">
+                        <a:buNone/>
+                      </a:pPr>
+                      <a:r>
+                        <a:rPr lang="en-CA" sz="1400" b="0" u="none" strike="noStrike" dirty="0">
+                          <a:solidFill>
+                            <a:srgbClr val="000000"/>
+                          </a:solidFill>
+                          <a:effectLst/>
+                          <a:latin typeface="Verdana Pro" panose="020B0604030504040204" pitchFamily="34" charset="0"/>
+                        </a:rPr>
+                        <a:t>p_value</a:t>
+                      </a:r>
+                      <a:endParaRPr lang="en-CA" sz="1400" b="0" i="0" u="none" strike="noStrike" dirty="0">
+                        <a:solidFill>
+                          <a:srgbClr val="000000"/>
+                        </a:solidFill>
+                        <a:effectLst/>
+                        <a:latin typeface="Verdana Pro" panose="020B0604030504040204" pitchFamily="34" charset="0"/>
+                      </a:endParaRPr>
+                    </a:p>
+                  </a:txBody>
+                  <a:tcPr marL="3472" marR="3472" marT="3472" marB="0" anchor="b"/>
+                </a:tc>
+                <a:extLst>
+                  <a:ext uri="{0D108BD9-81ED-4DB2-BD59-A6C34878D82A}">
+                    <a16:rowId xmlns:a16="http://schemas.microsoft.com/office/drawing/2014/main" val="697414357"/>
+                  </a:ext>
+                </a:extLst>
+              </a:tr>
+              <a:tr h="125496">
+                <a:tc>
+                  <a:txBody>
+                    <a:bodyPr/>
+                    <a:lstStyle/>
+                    <a:p>
+                      <a:pPr algn="l" fontAlgn="b">
+                        <a:buNone/>
+                      </a:pPr>
+                      <a:r>
+                        <a:rPr lang="en-CA" sz="1200" b="0" i="0" u="none" strike="noStrike" dirty="0">
+                          <a:solidFill>
+                            <a:srgbClr val="000000"/>
+                          </a:solidFill>
+                          <a:effectLst/>
+                          <a:latin typeface="Courier New" panose="02070309020205020404" pitchFamily="49" charset="0"/>
+                          <a:cs typeface="Courier New" panose="02070309020205020404" pitchFamily="49" charset="0"/>
+                        </a:rPr>
+                        <a:t>5-hydroxymethyl-dUMP N-hydrolase activity</a:t>
+                      </a:r>
+                    </a:p>
+                  </a:txBody>
+                  <a:tcPr marL="6350" marR="6350" marT="6350" marB="0" anchor="b">
+                    <a:lnR w="12700" cap="flat" cmpd="sng" algn="ctr">
+                      <a:solidFill>
+                        <a:schemeClr val="tx1"/>
+                      </a:solidFill>
+                      <a:prstDash val="solid"/>
+                      <a:round/>
+                      <a:headEnd type="none" w="med" len="med"/>
+                      <a:tailEnd type="none" w="med" len="med"/>
+                    </a:lnR>
+                    <a:lnB w="12700" cap="flat" cmpd="sng" algn="ctr">
+                      <a:solidFill>
+                        <a:schemeClr val="bg1">
+                          <a:lumMod val="75000"/>
+                        </a:schemeClr>
+                      </a:solidFill>
+                      <a:prstDash val="solid"/>
+                      <a:round/>
+                      <a:headEnd type="none" w="med" len="med"/>
+                      <a:tailEnd type="none" w="med" len="med"/>
+                    </a:lnB>
+                  </a:tcPr>
+                </a:tc>
+                <a:tc>
+                  <a:txBody>
+                    <a:bodyPr/>
+                    <a:lstStyle/>
+                    <a:p>
+                      <a:pPr algn="r" fontAlgn="b">
+                        <a:buNone/>
+                      </a:pPr>
+                      <a:r>
+                        <a:rPr lang="en-CA" sz="1200" b="0" i="0" u="none" strike="noStrike" dirty="0">
+                          <a:solidFill>
+                            <a:srgbClr val="000000"/>
+                          </a:solidFill>
+                          <a:effectLst/>
+                          <a:latin typeface="Courier New" panose="02070309020205020404" pitchFamily="49" charset="0"/>
+                          <a:cs typeface="Courier New" panose="02070309020205020404" pitchFamily="49" charset="0"/>
+                        </a:rPr>
+                        <a:t>0.049891</a:t>
+                      </a:r>
+                    </a:p>
+                  </a:txBody>
+                  <a:tcPr marL="6350" marR="6350" marT="6350" marB="0" anchor="b">
+                    <a:lnL w="12700" cap="flat" cmpd="sng" algn="ctr">
+                      <a:solidFill>
+                        <a:schemeClr val="tx1"/>
+                      </a:solidFill>
+                      <a:prstDash val="solid"/>
+                      <a:round/>
+                      <a:headEnd type="none" w="med" len="med"/>
+                      <a:tailEnd type="none" w="med" len="med"/>
+                    </a:lnL>
+                    <a:lnB w="12700" cap="flat" cmpd="sng" algn="ctr">
+                      <a:solidFill>
+                        <a:schemeClr val="bg1">
+                          <a:lumMod val="75000"/>
+                        </a:schemeClr>
+                      </a:solidFill>
+                      <a:prstDash val="solid"/>
+                      <a:round/>
+                      <a:headEnd type="none" w="med" len="med"/>
+                      <a:tailEnd type="none" w="med" len="med"/>
+                    </a:lnB>
+                  </a:tcPr>
+                </a:tc>
+                <a:extLst>
+                  <a:ext uri="{0D108BD9-81ED-4DB2-BD59-A6C34878D82A}">
+                    <a16:rowId xmlns:a16="http://schemas.microsoft.com/office/drawing/2014/main" val="3517527668"/>
+                  </a:ext>
+                </a:extLst>
+              </a:tr>
+            </a:tbl>
+          </a:graphicData>
+        </a:graphic>
+      </p:graphicFrame>
+      <p:graphicFrame>
+        <p:nvGraphicFramePr>
+          <p:cNvPr id="7" name="Table 6">
+            <a:extLst>
+              <a:ext uri="{FF2B5EF4-FFF2-40B4-BE49-F238E27FC236}">
+                <a16:creationId xmlns:a16="http://schemas.microsoft.com/office/drawing/2014/main" id="{987C003A-0574-3B9E-4438-037F5B56DDFD}"/>
+              </a:ext>
+            </a:extLst>
+          </p:cNvPr>
+          <p:cNvGraphicFramePr>
+            <a:graphicFrameLocks noGrp="1"/>
+          </p:cNvGraphicFramePr>
+          <p:nvPr>
+            <p:extLst>
+              <p:ext uri="{D42A27DB-BD31-4B8C-83A1-F6EECF244321}">
+                <p14:modId xmlns:p14="http://schemas.microsoft.com/office/powerpoint/2010/main" val="3726188392"/>
+              </p:ext>
+            </p:extLst>
+          </p:nvPr>
+        </p:nvGraphicFramePr>
+        <p:xfrm>
+          <a:off x="6528805" y="1251878"/>
+          <a:ext cx="3716499" cy="2520274"/>
+        </p:xfrm>
+        <a:graphic>
+          <a:graphicData uri="http://schemas.openxmlformats.org/drawingml/2006/table">
+            <a:tbl>
+              <a:tblPr>
+                <a:tableStyleId>{5940675A-B579-460E-94D1-54222C63F5DA}</a:tableStyleId>
+              </a:tblPr>
+              <a:tblGrid>
+                <a:gridCol w="2845171">
+                  <a:extLst>
+                    <a:ext uri="{9D8B030D-6E8A-4147-A177-3AD203B41FA5}">
+                      <a16:colId xmlns:a16="http://schemas.microsoft.com/office/drawing/2014/main" val="2883141624"/>
+                    </a:ext>
+                  </a:extLst>
+                </a:gridCol>
+                <a:gridCol w="871328">
+                  <a:extLst>
+                    <a:ext uri="{9D8B030D-6E8A-4147-A177-3AD203B41FA5}">
+                      <a16:colId xmlns:a16="http://schemas.microsoft.com/office/drawing/2014/main" val="3161232302"/>
+                    </a:ext>
+                  </a:extLst>
+                </a:gridCol>
+              </a:tblGrid>
+              <a:tr h="103985">
+                <a:tc gridSpan="2">
+                  <a:txBody>
+                    <a:bodyPr/>
+                    <a:lstStyle/>
+                    <a:p>
+                      <a:pPr algn="l" fontAlgn="b">
+                        <a:buNone/>
+                      </a:pPr>
+                      <a:r>
+                        <a:rPr lang="en-US" sz="1400" b="0" i="0" u="none" strike="noStrike" dirty="0">
+                          <a:solidFill>
+                            <a:srgbClr val="000000"/>
+                          </a:solidFill>
+                          <a:effectLst/>
+                          <a:latin typeface="Verdana Pro" panose="020B0604030504040204" pitchFamily="34" charset="0"/>
+                        </a:rPr>
+                        <a:t>A0A4Q9LAP2: gprofiler GO terms </a:t>
+                      </a:r>
+                    </a:p>
+                    <a:p>
+                      <a:pPr algn="l" fontAlgn="b">
+                        <a:buNone/>
+                      </a:pPr>
+                      <a:r>
+                        <a:rPr lang="en-US" sz="1400" b="0" i="0" u="none" strike="noStrike" dirty="0">
+                          <a:solidFill>
+                            <a:srgbClr val="000000"/>
+                          </a:solidFill>
+                          <a:effectLst/>
+                          <a:latin typeface="Verdana Pro" panose="020B0604030504040204" pitchFamily="34" charset="0"/>
+                        </a:rPr>
+                        <a:t>[cluster size: 21]</a:t>
+                      </a:r>
+                      <a:endParaRPr lang="en-CA" sz="1400" b="0" i="0" u="none" strike="noStrike" dirty="0">
+                        <a:solidFill>
+                          <a:srgbClr val="000000"/>
+                        </a:solidFill>
+                        <a:effectLst/>
+                        <a:latin typeface="Verdana Pro" panose="020B0604030504040204" pitchFamily="34" charset="0"/>
+                      </a:endParaRPr>
+                    </a:p>
+                  </a:txBody>
+                  <a:tcPr marL="3472" marR="3472" marT="3472" marB="0" anchor="b"/>
+                </a:tc>
+                <a:tc hMerge="1">
+                  <a:txBody>
+                    <a:bodyPr/>
+                    <a:lstStyle/>
+                    <a:p>
+                      <a:pPr algn="l" fontAlgn="b">
+                        <a:buNone/>
+                      </a:pPr>
+                      <a:endParaRPr lang="en-CA" sz="1400" b="0" i="0" u="none" strike="noStrike" dirty="0">
+                        <a:solidFill>
+                          <a:srgbClr val="000000"/>
+                        </a:solidFill>
+                        <a:effectLst/>
+                        <a:latin typeface="Verdana Pro" panose="020B0604030504040204" pitchFamily="34" charset="0"/>
+                      </a:endParaRPr>
+                    </a:p>
+                  </a:txBody>
+                  <a:tcPr marL="3472" marR="3472" marT="3472" marB="0" anchor="b"/>
+                </a:tc>
+                <a:extLst>
+                  <a:ext uri="{0D108BD9-81ED-4DB2-BD59-A6C34878D82A}">
+                    <a16:rowId xmlns:a16="http://schemas.microsoft.com/office/drawing/2014/main" val="3254720063"/>
+                  </a:ext>
+                </a:extLst>
+              </a:tr>
+              <a:tr h="103985">
+                <a:tc>
+                  <a:txBody>
+                    <a:bodyPr/>
+                    <a:lstStyle/>
+                    <a:p>
+                      <a:pPr algn="l" fontAlgn="b">
+                        <a:buNone/>
+                      </a:pPr>
+                      <a:r>
+                        <a:rPr lang="en-CA" sz="1400" b="0" u="none" strike="noStrike" dirty="0">
+                          <a:solidFill>
+                            <a:srgbClr val="000000"/>
+                          </a:solidFill>
+                          <a:effectLst/>
+                          <a:latin typeface="Verdana Pro" panose="020B0604030504040204" pitchFamily="34" charset="0"/>
+                        </a:rPr>
+                        <a:t>name</a:t>
+                      </a:r>
+                      <a:endParaRPr lang="en-CA" sz="1400" b="0" i="0" u="none" strike="noStrike" dirty="0">
+                        <a:solidFill>
+                          <a:srgbClr val="000000"/>
+                        </a:solidFill>
+                        <a:effectLst/>
+                        <a:latin typeface="Verdana Pro" panose="020B0604030504040204" pitchFamily="34" charset="0"/>
+                      </a:endParaRPr>
+                    </a:p>
+                  </a:txBody>
+                  <a:tcPr marL="3472" marR="3472" marT="3472" marB="0" anchor="b"/>
+                </a:tc>
+                <a:tc>
+                  <a:txBody>
+                    <a:bodyPr/>
+                    <a:lstStyle/>
+                    <a:p>
+                      <a:pPr algn="l" fontAlgn="b">
+                        <a:buNone/>
+                      </a:pPr>
+                      <a:r>
+                        <a:rPr lang="en-CA" sz="1400" b="0" u="none" strike="noStrike" dirty="0">
+                          <a:solidFill>
+                            <a:srgbClr val="000000"/>
+                          </a:solidFill>
+                          <a:effectLst/>
+                          <a:latin typeface="Verdana Pro" panose="020B0604030504040204" pitchFamily="34" charset="0"/>
+                        </a:rPr>
+                        <a:t>p_value</a:t>
+                      </a:r>
+                      <a:endParaRPr lang="en-CA" sz="1400" b="0" i="0" u="none" strike="noStrike" dirty="0">
+                        <a:solidFill>
+                          <a:srgbClr val="000000"/>
+                        </a:solidFill>
+                        <a:effectLst/>
+                        <a:latin typeface="Verdana Pro" panose="020B0604030504040204" pitchFamily="34" charset="0"/>
+                      </a:endParaRPr>
+                    </a:p>
+                  </a:txBody>
+                  <a:tcPr marL="3472" marR="3472" marT="3472" marB="0" anchor="b"/>
+                </a:tc>
+                <a:extLst>
+                  <a:ext uri="{0D108BD9-81ED-4DB2-BD59-A6C34878D82A}">
+                    <a16:rowId xmlns:a16="http://schemas.microsoft.com/office/drawing/2014/main" val="697414357"/>
+                  </a:ext>
+                </a:extLst>
+              </a:tr>
+              <a:tr h="178452">
+                <a:tc>
+                  <a:txBody>
+                    <a:bodyPr/>
+                    <a:lstStyle/>
+                    <a:p>
+                      <a:pPr algn="l" fontAlgn="b">
+                        <a:buNone/>
+                      </a:pPr>
+                      <a:r>
+                        <a:rPr lang="en-CA" sz="1200" b="0" i="0" u="none" strike="noStrike" dirty="0">
+                          <a:solidFill>
+                            <a:srgbClr val="000000"/>
+                          </a:solidFill>
+                          <a:effectLst/>
+                          <a:latin typeface="Courier New" panose="02070309020205020404" pitchFamily="49" charset="0"/>
+                          <a:cs typeface="Courier New" panose="02070309020205020404" pitchFamily="49" charset="0"/>
+                        </a:rPr>
+                        <a:t>4 iron, 4 sulfur cluster binding</a:t>
+                      </a:r>
+                    </a:p>
+                  </a:txBody>
+                  <a:tcPr marL="6350" marR="6350" marT="6350" marB="0" anchor="b">
+                    <a:lnR w="12700" cap="flat" cmpd="sng" algn="ctr">
+                      <a:solidFill>
+                        <a:schemeClr val="tx1"/>
+                      </a:solidFill>
+                      <a:prstDash val="solid"/>
+                      <a:round/>
+                      <a:headEnd type="none" w="med" len="med"/>
+                      <a:tailEnd type="none" w="med" len="med"/>
+                    </a:lnR>
+                    <a:lnB w="12700" cap="flat" cmpd="sng" algn="ctr">
+                      <a:solidFill>
+                        <a:schemeClr val="bg1">
+                          <a:lumMod val="75000"/>
+                        </a:schemeClr>
+                      </a:solidFill>
+                      <a:prstDash val="solid"/>
+                      <a:round/>
+                      <a:headEnd type="none" w="med" len="med"/>
+                      <a:tailEnd type="none" w="med" len="med"/>
+                    </a:lnB>
+                  </a:tcPr>
+                </a:tc>
+                <a:tc>
+                  <a:txBody>
+                    <a:bodyPr/>
+                    <a:lstStyle/>
+                    <a:p>
+                      <a:pPr algn="r" fontAlgn="b">
+                        <a:buNone/>
+                      </a:pPr>
+                      <a:r>
+                        <a:rPr lang="en-CA" sz="1200" b="0" i="0" u="none" strike="noStrike" dirty="0">
+                          <a:solidFill>
+                            <a:srgbClr val="000000"/>
+                          </a:solidFill>
+                          <a:effectLst/>
+                          <a:latin typeface="Courier New" panose="02070309020205020404" pitchFamily="49" charset="0"/>
+                          <a:cs typeface="Courier New" panose="02070309020205020404" pitchFamily="49" charset="0"/>
+                        </a:rPr>
+                        <a:t>0.002664</a:t>
+                      </a:r>
+                    </a:p>
+                  </a:txBody>
+                  <a:tcPr marL="6350" marR="6350" marT="6350" marB="0" anchor="b">
+                    <a:lnL w="12700" cap="flat" cmpd="sng" algn="ctr">
+                      <a:solidFill>
+                        <a:schemeClr val="tx1"/>
+                      </a:solidFill>
+                      <a:prstDash val="solid"/>
+                      <a:round/>
+                      <a:headEnd type="none" w="med" len="med"/>
+                      <a:tailEnd type="none" w="med" len="med"/>
+                    </a:lnL>
+                    <a:lnB w="12700" cap="flat" cmpd="sng" algn="ctr">
+                      <a:solidFill>
+                        <a:schemeClr val="bg1">
+                          <a:lumMod val="75000"/>
+                        </a:schemeClr>
+                      </a:solidFill>
+                      <a:prstDash val="solid"/>
+                      <a:round/>
+                      <a:headEnd type="none" w="med" len="med"/>
+                      <a:tailEnd type="none" w="med" len="med"/>
+                    </a:lnB>
+                  </a:tcPr>
+                </a:tc>
+                <a:extLst>
+                  <a:ext uri="{0D108BD9-81ED-4DB2-BD59-A6C34878D82A}">
+                    <a16:rowId xmlns:a16="http://schemas.microsoft.com/office/drawing/2014/main" val="3517527668"/>
+                  </a:ext>
+                </a:extLst>
+              </a:tr>
+              <a:tr h="90748">
+                <a:tc>
+                  <a:txBody>
+                    <a:bodyPr/>
+                    <a:lstStyle/>
+                    <a:p>
+                      <a:pPr algn="l" fontAlgn="b">
+                        <a:buNone/>
+                      </a:pPr>
+                      <a:r>
+                        <a:rPr lang="en-CA" sz="1200" b="0" i="0" u="none" strike="noStrike">
+                          <a:solidFill>
+                            <a:srgbClr val="000000"/>
+                          </a:solidFill>
+                          <a:effectLst/>
+                          <a:latin typeface="Courier New" panose="02070309020205020404" pitchFamily="49" charset="0"/>
+                          <a:cs typeface="Courier New" panose="02070309020205020404" pitchFamily="49" charset="0"/>
+                        </a:rPr>
+                        <a:t>DNA helicase activity</a:t>
+                      </a:r>
+                    </a:p>
+                  </a:txBody>
+                  <a:tcPr marL="6350" marR="6350" marT="6350" marB="0" anchor="b">
+                    <a:lnR w="12700" cap="flat" cmpd="sng" algn="ctr">
+                      <a:solidFill>
+                        <a:schemeClr val="tx1"/>
+                      </a:solidFill>
+                      <a:prstDash val="solid"/>
+                      <a:round/>
+                      <a:headEnd type="none" w="med" len="med"/>
+                      <a:tailEnd type="none" w="med" len="med"/>
+                    </a:lnR>
+                    <a:lnT w="12700" cap="flat" cmpd="sng" algn="ctr">
+                      <a:solidFill>
+                        <a:schemeClr val="bg1">
+                          <a:lumMod val="75000"/>
+                        </a:schemeClr>
+                      </a:solidFill>
+                      <a:prstDash val="solid"/>
+                      <a:round/>
+                      <a:headEnd type="none" w="med" len="med"/>
+                      <a:tailEnd type="none" w="med" len="med"/>
+                    </a:lnT>
+                    <a:lnB w="12700" cap="flat" cmpd="sng" algn="ctr">
+                      <a:solidFill>
+                        <a:schemeClr val="bg1">
+                          <a:lumMod val="75000"/>
+                        </a:schemeClr>
+                      </a:solidFill>
+                      <a:prstDash val="solid"/>
+                      <a:round/>
+                      <a:headEnd type="none" w="med" len="med"/>
+                      <a:tailEnd type="none" w="med" len="med"/>
+                    </a:lnB>
+                  </a:tcPr>
+                </a:tc>
+                <a:tc>
+                  <a:txBody>
+                    <a:bodyPr/>
+                    <a:lstStyle/>
+                    <a:p>
+                      <a:pPr algn="r" fontAlgn="b">
+                        <a:buNone/>
+                      </a:pPr>
+                      <a:r>
+                        <a:rPr lang="en-CA" sz="1200" b="0" i="0" u="none" strike="noStrike">
+                          <a:solidFill>
+                            <a:srgbClr val="000000"/>
+                          </a:solidFill>
+                          <a:effectLst/>
+                          <a:latin typeface="Courier New" panose="02070309020205020404" pitchFamily="49" charset="0"/>
+                          <a:cs typeface="Courier New" panose="02070309020205020404" pitchFamily="49" charset="0"/>
+                        </a:rPr>
+                        <a:t>0.004217</a:t>
+                      </a:r>
+                    </a:p>
+                  </a:txBody>
+                  <a:tcPr marL="6350" marR="6350" marT="6350" marB="0" anchor="b">
+                    <a:lnL w="12700" cap="flat" cmpd="sng" algn="ctr">
+                      <a:solidFill>
+                        <a:schemeClr val="tx1"/>
+                      </a:solidFill>
+                      <a:prstDash val="solid"/>
+                      <a:round/>
+                      <a:headEnd type="none" w="med" len="med"/>
+                      <a:tailEnd type="none" w="med" len="med"/>
+                    </a:lnL>
+                    <a:lnT w="12700" cap="flat" cmpd="sng" algn="ctr">
+                      <a:solidFill>
+                        <a:schemeClr val="bg1">
+                          <a:lumMod val="75000"/>
+                        </a:schemeClr>
+                      </a:solidFill>
+                      <a:prstDash val="solid"/>
+                      <a:round/>
+                      <a:headEnd type="none" w="med" len="med"/>
+                      <a:tailEnd type="none" w="med" len="med"/>
+                    </a:lnT>
+                    <a:lnB w="12700" cap="flat" cmpd="sng" algn="ctr">
+                      <a:solidFill>
+                        <a:schemeClr val="bg1">
+                          <a:lumMod val="75000"/>
+                        </a:schemeClr>
+                      </a:solidFill>
+                      <a:prstDash val="solid"/>
+                      <a:round/>
+                      <a:headEnd type="none" w="med" len="med"/>
+                      <a:tailEnd type="none" w="med" len="med"/>
+                    </a:lnB>
+                  </a:tcPr>
+                </a:tc>
+                <a:extLst>
+                  <a:ext uri="{0D108BD9-81ED-4DB2-BD59-A6C34878D82A}">
+                    <a16:rowId xmlns:a16="http://schemas.microsoft.com/office/drawing/2014/main" val="2117434380"/>
+                  </a:ext>
+                </a:extLst>
+              </a:tr>
+              <a:tr h="90748">
+                <a:tc>
+                  <a:txBody>
+                    <a:bodyPr/>
+                    <a:lstStyle/>
+                    <a:p>
+                      <a:pPr algn="l" fontAlgn="b">
+                        <a:buNone/>
+                      </a:pPr>
+                      <a:r>
+                        <a:rPr lang="en-CA" sz="1200" b="0" i="0" u="none" strike="noStrike" dirty="0">
+                          <a:solidFill>
+                            <a:srgbClr val="000000"/>
+                          </a:solidFill>
+                          <a:effectLst/>
+                          <a:latin typeface="Courier New" panose="02070309020205020404" pitchFamily="49" charset="0"/>
+                          <a:cs typeface="Courier New" panose="02070309020205020404" pitchFamily="49" charset="0"/>
+                        </a:rPr>
+                        <a:t>iron-sulfur cluster binding</a:t>
+                      </a:r>
+                    </a:p>
+                  </a:txBody>
+                  <a:tcPr marL="6350" marR="6350" marT="6350" marB="0" anchor="b">
+                    <a:lnR w="12700" cap="flat" cmpd="sng" algn="ctr">
+                      <a:solidFill>
+                        <a:schemeClr val="tx1"/>
+                      </a:solidFill>
+                      <a:prstDash val="solid"/>
+                      <a:round/>
+                      <a:headEnd type="none" w="med" len="med"/>
+                      <a:tailEnd type="none" w="med" len="med"/>
+                    </a:lnR>
+                    <a:lnT w="12700" cap="flat" cmpd="sng" algn="ctr">
+                      <a:solidFill>
+                        <a:schemeClr val="bg1">
+                          <a:lumMod val="75000"/>
+                        </a:schemeClr>
+                      </a:solidFill>
+                      <a:prstDash val="solid"/>
+                      <a:round/>
+                      <a:headEnd type="none" w="med" len="med"/>
+                      <a:tailEnd type="none" w="med" len="med"/>
+                    </a:lnT>
+                    <a:lnB w="12700" cap="flat" cmpd="sng" algn="ctr">
+                      <a:solidFill>
+                        <a:schemeClr val="bg1">
+                          <a:lumMod val="75000"/>
+                        </a:schemeClr>
+                      </a:solidFill>
+                      <a:prstDash val="solid"/>
+                      <a:round/>
+                      <a:headEnd type="none" w="med" len="med"/>
+                      <a:tailEnd type="none" w="med" len="med"/>
+                    </a:lnB>
+                  </a:tcPr>
+                </a:tc>
+                <a:tc>
+                  <a:txBody>
+                    <a:bodyPr/>
+                    <a:lstStyle/>
+                    <a:p>
+                      <a:pPr algn="r" fontAlgn="b">
+                        <a:buNone/>
+                      </a:pPr>
+                      <a:r>
+                        <a:rPr lang="en-CA" sz="1200" b="0" i="0" u="none" strike="noStrike">
+                          <a:solidFill>
+                            <a:srgbClr val="000000"/>
+                          </a:solidFill>
+                          <a:effectLst/>
+                          <a:latin typeface="Courier New" panose="02070309020205020404" pitchFamily="49" charset="0"/>
+                          <a:cs typeface="Courier New" panose="02070309020205020404" pitchFamily="49" charset="0"/>
+                        </a:rPr>
+                        <a:t>0.007401</a:t>
+                      </a:r>
+                    </a:p>
+                  </a:txBody>
+                  <a:tcPr marL="6350" marR="6350" marT="6350" marB="0" anchor="b">
+                    <a:lnL w="12700" cap="flat" cmpd="sng" algn="ctr">
+                      <a:solidFill>
+                        <a:schemeClr val="tx1"/>
+                      </a:solidFill>
+                      <a:prstDash val="solid"/>
+                      <a:round/>
+                      <a:headEnd type="none" w="med" len="med"/>
+                      <a:tailEnd type="none" w="med" len="med"/>
+                    </a:lnL>
+                    <a:lnT w="12700" cap="flat" cmpd="sng" algn="ctr">
+                      <a:solidFill>
+                        <a:schemeClr val="bg1">
+                          <a:lumMod val="75000"/>
+                        </a:schemeClr>
+                      </a:solidFill>
+                      <a:prstDash val="solid"/>
+                      <a:round/>
+                      <a:headEnd type="none" w="med" len="med"/>
+                      <a:tailEnd type="none" w="med" len="med"/>
+                    </a:lnT>
+                    <a:lnB w="12700" cap="flat" cmpd="sng" algn="ctr">
+                      <a:solidFill>
+                        <a:schemeClr val="bg1">
+                          <a:lumMod val="75000"/>
+                        </a:schemeClr>
+                      </a:solidFill>
+                      <a:prstDash val="solid"/>
+                      <a:round/>
+                      <a:headEnd type="none" w="med" len="med"/>
+                      <a:tailEnd type="none" w="med" len="med"/>
+                    </a:lnB>
+                  </a:tcPr>
+                </a:tc>
+                <a:extLst>
+                  <a:ext uri="{0D108BD9-81ED-4DB2-BD59-A6C34878D82A}">
+                    <a16:rowId xmlns:a16="http://schemas.microsoft.com/office/drawing/2014/main" val="740033294"/>
+                  </a:ext>
+                </a:extLst>
+              </a:tr>
+              <a:tr h="90748">
+                <a:tc>
+                  <a:txBody>
+                    <a:bodyPr/>
+                    <a:lstStyle/>
+                    <a:p>
+                      <a:pPr algn="l" fontAlgn="b">
+                        <a:buNone/>
+                      </a:pPr>
+                      <a:r>
+                        <a:rPr lang="en-CA" sz="1200" b="0" i="0" u="none" strike="noStrike">
+                          <a:solidFill>
+                            <a:srgbClr val="000000"/>
+                          </a:solidFill>
+                          <a:effectLst/>
+                          <a:latin typeface="Courier New" panose="02070309020205020404" pitchFamily="49" charset="0"/>
+                          <a:cs typeface="Courier New" panose="02070309020205020404" pitchFamily="49" charset="0"/>
+                        </a:rPr>
+                        <a:t>metal cluster binding</a:t>
+                      </a:r>
+                    </a:p>
+                  </a:txBody>
+                  <a:tcPr marL="6350" marR="6350" marT="6350" marB="0" anchor="b">
+                    <a:lnR w="12700" cap="flat" cmpd="sng" algn="ctr">
+                      <a:solidFill>
+                        <a:schemeClr val="tx1"/>
+                      </a:solidFill>
+                      <a:prstDash val="solid"/>
+                      <a:round/>
+                      <a:headEnd type="none" w="med" len="med"/>
+                      <a:tailEnd type="none" w="med" len="med"/>
+                    </a:lnR>
+                    <a:lnT w="12700" cap="flat" cmpd="sng" algn="ctr">
+                      <a:solidFill>
+                        <a:schemeClr val="bg1">
+                          <a:lumMod val="75000"/>
+                        </a:schemeClr>
+                      </a:solidFill>
+                      <a:prstDash val="solid"/>
+                      <a:round/>
+                      <a:headEnd type="none" w="med" len="med"/>
+                      <a:tailEnd type="none" w="med" len="med"/>
+                    </a:lnT>
+                    <a:lnB w="12700" cap="flat" cmpd="sng" algn="ctr">
+                      <a:solidFill>
+                        <a:schemeClr val="bg1">
+                          <a:lumMod val="75000"/>
+                        </a:schemeClr>
+                      </a:solidFill>
+                      <a:prstDash val="solid"/>
+                      <a:round/>
+                      <a:headEnd type="none" w="med" len="med"/>
+                      <a:tailEnd type="none" w="med" len="med"/>
+                    </a:lnB>
+                  </a:tcPr>
+                </a:tc>
+                <a:tc>
+                  <a:txBody>
+                    <a:bodyPr/>
+                    <a:lstStyle/>
+                    <a:p>
+                      <a:pPr algn="r" fontAlgn="b">
+                        <a:buNone/>
+                      </a:pPr>
+                      <a:r>
+                        <a:rPr lang="en-CA" sz="1200" b="0" i="0" u="none" strike="noStrike">
+                          <a:solidFill>
+                            <a:srgbClr val="000000"/>
+                          </a:solidFill>
+                          <a:effectLst/>
+                          <a:latin typeface="Courier New" panose="02070309020205020404" pitchFamily="49" charset="0"/>
+                          <a:cs typeface="Courier New" panose="02070309020205020404" pitchFamily="49" charset="0"/>
+                        </a:rPr>
+                        <a:t>0.007593</a:t>
+                      </a:r>
+                    </a:p>
+                  </a:txBody>
+                  <a:tcPr marL="6350" marR="6350" marT="6350" marB="0" anchor="b">
+                    <a:lnL w="12700" cap="flat" cmpd="sng" algn="ctr">
+                      <a:solidFill>
+                        <a:schemeClr val="tx1"/>
+                      </a:solidFill>
+                      <a:prstDash val="solid"/>
+                      <a:round/>
+                      <a:headEnd type="none" w="med" len="med"/>
+                      <a:tailEnd type="none" w="med" len="med"/>
+                    </a:lnL>
+                    <a:lnT w="12700" cap="flat" cmpd="sng" algn="ctr">
+                      <a:solidFill>
+                        <a:schemeClr val="bg1">
+                          <a:lumMod val="75000"/>
+                        </a:schemeClr>
+                      </a:solidFill>
+                      <a:prstDash val="solid"/>
+                      <a:round/>
+                      <a:headEnd type="none" w="med" len="med"/>
+                      <a:tailEnd type="none" w="med" len="med"/>
+                    </a:lnT>
+                    <a:lnB w="12700" cap="flat" cmpd="sng" algn="ctr">
+                      <a:solidFill>
+                        <a:schemeClr val="bg1">
+                          <a:lumMod val="75000"/>
+                        </a:schemeClr>
+                      </a:solidFill>
+                      <a:prstDash val="solid"/>
+                      <a:round/>
+                      <a:headEnd type="none" w="med" len="med"/>
+                      <a:tailEnd type="none" w="med" len="med"/>
+                    </a:lnB>
+                  </a:tcPr>
+                </a:tc>
+                <a:extLst>
+                  <a:ext uri="{0D108BD9-81ED-4DB2-BD59-A6C34878D82A}">
+                    <a16:rowId xmlns:a16="http://schemas.microsoft.com/office/drawing/2014/main" val="2893406690"/>
+                  </a:ext>
+                </a:extLst>
+              </a:tr>
+              <a:tr h="178452">
+                <a:tc>
+                  <a:txBody>
+                    <a:bodyPr/>
+                    <a:lstStyle/>
+                    <a:p>
+                      <a:pPr algn="l" fontAlgn="b">
+                        <a:buNone/>
+                      </a:pPr>
+                      <a:r>
+                        <a:rPr lang="en-US" sz="1200" b="0" i="0" u="none" strike="noStrike" dirty="0">
+                          <a:solidFill>
+                            <a:srgbClr val="000000"/>
+                          </a:solidFill>
+                          <a:effectLst/>
+                          <a:latin typeface="Courier New" panose="02070309020205020404" pitchFamily="49" charset="0"/>
+                          <a:cs typeface="Courier New" panose="02070309020205020404" pitchFamily="49" charset="0"/>
+                        </a:rPr>
+                        <a:t>ATP-dependent activity, acting on DNA</a:t>
+                      </a:r>
+                    </a:p>
+                  </a:txBody>
+                  <a:tcPr marL="6350" marR="6350" marT="6350" marB="0" anchor="b">
+                    <a:lnR w="12700" cap="flat" cmpd="sng" algn="ctr">
+                      <a:solidFill>
+                        <a:schemeClr val="tx1"/>
+                      </a:solidFill>
+                      <a:prstDash val="solid"/>
+                      <a:round/>
+                      <a:headEnd type="none" w="med" len="med"/>
+                      <a:tailEnd type="none" w="med" len="med"/>
+                    </a:lnR>
+                    <a:lnT w="12700" cap="flat" cmpd="sng" algn="ctr">
+                      <a:solidFill>
+                        <a:schemeClr val="bg1">
+                          <a:lumMod val="75000"/>
+                        </a:schemeClr>
+                      </a:solidFill>
+                      <a:prstDash val="solid"/>
+                      <a:round/>
+                      <a:headEnd type="none" w="med" len="med"/>
+                      <a:tailEnd type="none" w="med" len="med"/>
+                    </a:lnT>
+                    <a:lnB w="12700" cap="flat" cmpd="sng" algn="ctr">
+                      <a:solidFill>
+                        <a:schemeClr val="bg1">
+                          <a:lumMod val="75000"/>
+                        </a:schemeClr>
+                      </a:solidFill>
+                      <a:prstDash val="solid"/>
+                      <a:round/>
+                      <a:headEnd type="none" w="med" len="med"/>
+                      <a:tailEnd type="none" w="med" len="med"/>
+                    </a:lnB>
+                  </a:tcPr>
+                </a:tc>
+                <a:tc>
+                  <a:txBody>
+                    <a:bodyPr/>
+                    <a:lstStyle/>
+                    <a:p>
+                      <a:pPr algn="r" fontAlgn="b">
+                        <a:buNone/>
+                      </a:pPr>
+                      <a:r>
+                        <a:rPr lang="en-CA" sz="1200" b="0" i="0" u="none" strike="noStrike">
+                          <a:solidFill>
+                            <a:srgbClr val="000000"/>
+                          </a:solidFill>
+                          <a:effectLst/>
+                          <a:latin typeface="Courier New" panose="02070309020205020404" pitchFamily="49" charset="0"/>
+                          <a:cs typeface="Courier New" panose="02070309020205020404" pitchFamily="49" charset="0"/>
+                        </a:rPr>
+                        <a:t>0.018793</a:t>
+                      </a:r>
+                    </a:p>
+                  </a:txBody>
+                  <a:tcPr marL="6350" marR="6350" marT="6350" marB="0" anchor="b">
+                    <a:lnL w="12700" cap="flat" cmpd="sng" algn="ctr">
+                      <a:solidFill>
+                        <a:schemeClr val="tx1"/>
+                      </a:solidFill>
+                      <a:prstDash val="solid"/>
+                      <a:round/>
+                      <a:headEnd type="none" w="med" len="med"/>
+                      <a:tailEnd type="none" w="med" len="med"/>
+                    </a:lnL>
+                    <a:lnT w="12700" cap="flat" cmpd="sng" algn="ctr">
+                      <a:solidFill>
+                        <a:schemeClr val="bg1">
+                          <a:lumMod val="75000"/>
+                        </a:schemeClr>
+                      </a:solidFill>
+                      <a:prstDash val="solid"/>
+                      <a:round/>
+                      <a:headEnd type="none" w="med" len="med"/>
+                      <a:tailEnd type="none" w="med" len="med"/>
+                    </a:lnT>
+                    <a:lnB w="12700" cap="flat" cmpd="sng" algn="ctr">
+                      <a:solidFill>
+                        <a:schemeClr val="bg1">
+                          <a:lumMod val="75000"/>
+                        </a:schemeClr>
+                      </a:solidFill>
+                      <a:prstDash val="solid"/>
+                      <a:round/>
+                      <a:headEnd type="none" w="med" len="med"/>
+                      <a:tailEnd type="none" w="med" len="med"/>
+                    </a:lnB>
+                  </a:tcPr>
+                </a:tc>
+                <a:extLst>
+                  <a:ext uri="{0D108BD9-81ED-4DB2-BD59-A6C34878D82A}">
+                    <a16:rowId xmlns:a16="http://schemas.microsoft.com/office/drawing/2014/main" val="1015402240"/>
+                  </a:ext>
+                </a:extLst>
+              </a:tr>
+              <a:tr h="90748">
+                <a:tc>
+                  <a:txBody>
+                    <a:bodyPr/>
+                    <a:lstStyle/>
+                    <a:p>
+                      <a:pPr algn="l" fontAlgn="b">
+                        <a:buNone/>
+                      </a:pPr>
+                      <a:r>
+                        <a:rPr lang="en-CA" sz="1200" b="0" i="0" u="none" strike="noStrike" dirty="0">
+                          <a:solidFill>
+                            <a:srgbClr val="000000"/>
+                          </a:solidFill>
+                          <a:effectLst/>
+                          <a:latin typeface="Courier New" panose="02070309020205020404" pitchFamily="49" charset="0"/>
+                          <a:cs typeface="Courier New" panose="02070309020205020404" pitchFamily="49" charset="0"/>
+                        </a:rPr>
+                        <a:t>helicase activity</a:t>
+                      </a:r>
+                    </a:p>
+                  </a:txBody>
+                  <a:tcPr marL="6350" marR="6350" marT="6350" marB="0" anchor="b">
+                    <a:lnR w="12700" cap="flat" cmpd="sng" algn="ctr">
+                      <a:solidFill>
+                        <a:schemeClr val="tx1"/>
+                      </a:solidFill>
+                      <a:prstDash val="solid"/>
+                      <a:round/>
+                      <a:headEnd type="none" w="med" len="med"/>
+                      <a:tailEnd type="none" w="med" len="med"/>
+                    </a:lnR>
+                    <a:lnT w="12700" cap="flat" cmpd="sng" algn="ctr">
+                      <a:solidFill>
+                        <a:schemeClr val="bg1">
+                          <a:lumMod val="75000"/>
+                        </a:schemeClr>
+                      </a:solidFill>
+                      <a:prstDash val="solid"/>
+                      <a:round/>
+                      <a:headEnd type="none" w="med" len="med"/>
+                      <a:tailEnd type="none" w="med" len="med"/>
+                    </a:lnT>
+                    <a:lnB w="12700" cap="flat" cmpd="sng" algn="ctr">
+                      <a:solidFill>
+                        <a:schemeClr val="bg1">
+                          <a:lumMod val="75000"/>
+                        </a:schemeClr>
+                      </a:solidFill>
+                      <a:prstDash val="solid"/>
+                      <a:round/>
+                      <a:headEnd type="none" w="med" len="med"/>
+                      <a:tailEnd type="none" w="med" len="med"/>
+                    </a:lnB>
+                  </a:tcPr>
+                </a:tc>
+                <a:tc>
+                  <a:txBody>
+                    <a:bodyPr/>
+                    <a:lstStyle/>
+                    <a:p>
+                      <a:pPr algn="r" fontAlgn="b">
+                        <a:buNone/>
+                      </a:pPr>
+                      <a:r>
+                        <a:rPr lang="en-CA" sz="1200" b="0" i="0" u="none" strike="noStrike">
+                          <a:solidFill>
+                            <a:srgbClr val="000000"/>
+                          </a:solidFill>
+                          <a:effectLst/>
+                          <a:latin typeface="Courier New" panose="02070309020205020404" pitchFamily="49" charset="0"/>
+                          <a:cs typeface="Courier New" panose="02070309020205020404" pitchFamily="49" charset="0"/>
+                        </a:rPr>
+                        <a:t>0.030955</a:t>
+                      </a:r>
+                    </a:p>
+                  </a:txBody>
+                  <a:tcPr marL="6350" marR="6350" marT="6350" marB="0" anchor="b">
+                    <a:lnL w="12700" cap="flat" cmpd="sng" algn="ctr">
+                      <a:solidFill>
+                        <a:schemeClr val="tx1"/>
+                      </a:solidFill>
+                      <a:prstDash val="solid"/>
+                      <a:round/>
+                      <a:headEnd type="none" w="med" len="med"/>
+                      <a:tailEnd type="none" w="med" len="med"/>
+                    </a:lnL>
+                    <a:lnT w="12700" cap="flat" cmpd="sng" algn="ctr">
+                      <a:solidFill>
+                        <a:schemeClr val="bg1">
+                          <a:lumMod val="75000"/>
+                        </a:schemeClr>
+                      </a:solidFill>
+                      <a:prstDash val="solid"/>
+                      <a:round/>
+                      <a:headEnd type="none" w="med" len="med"/>
+                      <a:tailEnd type="none" w="med" len="med"/>
+                    </a:lnT>
+                    <a:lnB w="12700" cap="flat" cmpd="sng" algn="ctr">
+                      <a:solidFill>
+                        <a:schemeClr val="bg1">
+                          <a:lumMod val="75000"/>
+                        </a:schemeClr>
+                      </a:solidFill>
+                      <a:prstDash val="solid"/>
+                      <a:round/>
+                      <a:headEnd type="none" w="med" len="med"/>
+                      <a:tailEnd type="none" w="med" len="med"/>
+                    </a:lnB>
+                  </a:tcPr>
+                </a:tc>
+                <a:extLst>
+                  <a:ext uri="{0D108BD9-81ED-4DB2-BD59-A6C34878D82A}">
+                    <a16:rowId xmlns:a16="http://schemas.microsoft.com/office/drawing/2014/main" val="216578652"/>
+                  </a:ext>
+                </a:extLst>
+              </a:tr>
+              <a:tr h="178452">
+                <a:tc>
+                  <a:txBody>
+                    <a:bodyPr/>
+                    <a:lstStyle/>
+                    <a:p>
+                      <a:pPr algn="l" fontAlgn="b">
+                        <a:buNone/>
+                      </a:pPr>
+                      <a:r>
+                        <a:rPr lang="en-US" sz="1200" b="0" i="0" u="none" strike="noStrike" dirty="0">
+                          <a:solidFill>
+                            <a:srgbClr val="000000"/>
+                          </a:solidFill>
+                          <a:effectLst/>
+                          <a:latin typeface="Courier New" panose="02070309020205020404" pitchFamily="49" charset="0"/>
+                          <a:cs typeface="Courier New" panose="02070309020205020404" pitchFamily="49" charset="0"/>
+                        </a:rPr>
+                        <a:t>nucleic acid conformation isomerase activity</a:t>
+                      </a:r>
+                    </a:p>
+                  </a:txBody>
+                  <a:tcPr marL="6350" marR="6350" marT="6350" marB="0" anchor="b">
+                    <a:lnR w="12700" cap="flat" cmpd="sng" algn="ctr">
+                      <a:solidFill>
+                        <a:schemeClr val="tx1"/>
+                      </a:solidFill>
+                      <a:prstDash val="solid"/>
+                      <a:round/>
+                      <a:headEnd type="none" w="med" len="med"/>
+                      <a:tailEnd type="none" w="med" len="med"/>
+                    </a:lnR>
+                    <a:lnT w="12700" cap="flat" cmpd="sng" algn="ctr">
+                      <a:solidFill>
+                        <a:schemeClr val="bg1">
+                          <a:lumMod val="75000"/>
+                        </a:schemeClr>
+                      </a:solidFill>
+                      <a:prstDash val="solid"/>
+                      <a:round/>
+                      <a:headEnd type="none" w="med" len="med"/>
+                      <a:tailEnd type="none" w="med" len="med"/>
+                    </a:lnT>
+                    <a:lnB w="12700" cap="flat" cmpd="sng" algn="ctr">
+                      <a:solidFill>
+                        <a:schemeClr val="bg1">
+                          <a:lumMod val="75000"/>
+                        </a:schemeClr>
+                      </a:solidFill>
+                      <a:prstDash val="solid"/>
+                      <a:round/>
+                      <a:headEnd type="none" w="med" len="med"/>
+                      <a:tailEnd type="none" w="med" len="med"/>
+                    </a:lnB>
+                  </a:tcPr>
+                </a:tc>
+                <a:tc>
+                  <a:txBody>
+                    <a:bodyPr/>
+                    <a:lstStyle/>
+                    <a:p>
+                      <a:pPr algn="r" fontAlgn="b">
+                        <a:buNone/>
+                      </a:pPr>
+                      <a:r>
+                        <a:rPr lang="en-CA" sz="1200" b="0" i="0" u="none" strike="noStrike" dirty="0">
+                          <a:solidFill>
+                            <a:srgbClr val="000000"/>
+                          </a:solidFill>
+                          <a:effectLst/>
+                          <a:latin typeface="Courier New" panose="02070309020205020404" pitchFamily="49" charset="0"/>
+                          <a:cs typeface="Courier New" panose="02070309020205020404" pitchFamily="49" charset="0"/>
+                        </a:rPr>
+                        <a:t>0.034984</a:t>
+                      </a:r>
+                    </a:p>
+                  </a:txBody>
+                  <a:tcPr marL="6350" marR="6350" marT="6350" marB="0" anchor="b">
+                    <a:lnL w="12700" cap="flat" cmpd="sng" algn="ctr">
+                      <a:solidFill>
+                        <a:schemeClr val="tx1"/>
+                      </a:solidFill>
+                      <a:prstDash val="solid"/>
+                      <a:round/>
+                      <a:headEnd type="none" w="med" len="med"/>
+                      <a:tailEnd type="none" w="med" len="med"/>
+                    </a:lnL>
+                    <a:lnT w="12700" cap="flat" cmpd="sng" algn="ctr">
+                      <a:solidFill>
+                        <a:schemeClr val="bg1">
+                          <a:lumMod val="75000"/>
+                        </a:schemeClr>
+                      </a:solidFill>
+                      <a:prstDash val="solid"/>
+                      <a:round/>
+                      <a:headEnd type="none" w="med" len="med"/>
+                      <a:tailEnd type="none" w="med" len="med"/>
+                    </a:lnT>
+                    <a:lnB w="12700" cap="flat" cmpd="sng" algn="ctr">
+                      <a:solidFill>
+                        <a:schemeClr val="bg1">
+                          <a:lumMod val="75000"/>
+                        </a:schemeClr>
+                      </a:solidFill>
+                      <a:prstDash val="solid"/>
+                      <a:round/>
+                      <a:headEnd type="none" w="med" len="med"/>
+                      <a:tailEnd type="none" w="med" len="med"/>
+                    </a:lnB>
+                  </a:tcPr>
+                </a:tc>
+                <a:extLst>
+                  <a:ext uri="{0D108BD9-81ED-4DB2-BD59-A6C34878D82A}">
+                    <a16:rowId xmlns:a16="http://schemas.microsoft.com/office/drawing/2014/main" val="1957212222"/>
+                  </a:ext>
+                </a:extLst>
+              </a:tr>
+            </a:tbl>
+          </a:graphicData>
+        </a:graphic>
+      </p:graphicFrame>
+      <p:graphicFrame>
+        <p:nvGraphicFramePr>
+          <p:cNvPr id="8" name="Table 7">
+            <a:extLst>
+              <a:ext uri="{FF2B5EF4-FFF2-40B4-BE49-F238E27FC236}">
+                <a16:creationId xmlns:a16="http://schemas.microsoft.com/office/drawing/2014/main" id="{804EB072-9B4E-70BE-AE9F-E28C1A7BB4BF}"/>
+              </a:ext>
+            </a:extLst>
+          </p:cNvPr>
+          <p:cNvGraphicFramePr>
+            <a:graphicFrameLocks noGrp="1"/>
+          </p:cNvGraphicFramePr>
+          <p:nvPr>
+            <p:extLst>
+              <p:ext uri="{D42A27DB-BD31-4B8C-83A1-F6EECF244321}">
+                <p14:modId xmlns:p14="http://schemas.microsoft.com/office/powerpoint/2010/main" val="2924797898"/>
+              </p:ext>
+            </p:extLst>
+          </p:nvPr>
+        </p:nvGraphicFramePr>
+        <p:xfrm>
+          <a:off x="6528803" y="4048501"/>
+          <a:ext cx="3716499" cy="1019134"/>
+        </p:xfrm>
+        <a:graphic>
+          <a:graphicData uri="http://schemas.openxmlformats.org/drawingml/2006/table">
+            <a:tbl>
+              <a:tblPr>
+                <a:tableStyleId>{5940675A-B579-460E-94D1-54222C63F5DA}</a:tableStyleId>
+              </a:tblPr>
+              <a:tblGrid>
+                <a:gridCol w="2845171">
+                  <a:extLst>
+                    <a:ext uri="{9D8B030D-6E8A-4147-A177-3AD203B41FA5}">
+                      <a16:colId xmlns:a16="http://schemas.microsoft.com/office/drawing/2014/main" val="2883141624"/>
+                    </a:ext>
+                  </a:extLst>
+                </a:gridCol>
+                <a:gridCol w="871328">
+                  <a:extLst>
+                    <a:ext uri="{9D8B030D-6E8A-4147-A177-3AD203B41FA5}">
+                      <a16:colId xmlns:a16="http://schemas.microsoft.com/office/drawing/2014/main" val="3161232302"/>
+                    </a:ext>
+                  </a:extLst>
+                </a:gridCol>
+              </a:tblGrid>
+              <a:tr h="143802">
+                <a:tc gridSpan="2">
+                  <a:txBody>
+                    <a:bodyPr/>
+                    <a:lstStyle/>
+                    <a:p>
+                      <a:pPr algn="l" fontAlgn="b">
+                        <a:buNone/>
+                      </a:pPr>
+                      <a:r>
+                        <a:rPr lang="en-US" sz="1400" b="0" i="0" u="none" strike="noStrike" dirty="0">
+                          <a:solidFill>
+                            <a:srgbClr val="000000"/>
+                          </a:solidFill>
+                          <a:effectLst/>
+                          <a:latin typeface="Verdana Pro" panose="020B0604030504040204" pitchFamily="34" charset="0"/>
+                        </a:rPr>
+                        <a:t>A0A2H6NEM0: gprofiler GO terms </a:t>
+                      </a:r>
+                    </a:p>
+                    <a:p>
+                      <a:pPr algn="l" fontAlgn="b">
+                        <a:buNone/>
+                      </a:pPr>
+                      <a:r>
+                        <a:rPr lang="en-US" sz="1400" b="0" i="0" u="none" strike="noStrike" dirty="0">
+                          <a:solidFill>
+                            <a:srgbClr val="000000"/>
+                          </a:solidFill>
+                          <a:effectLst/>
+                          <a:latin typeface="Verdana Pro" panose="020B0604030504040204" pitchFamily="34" charset="0"/>
+                        </a:rPr>
+                        <a:t>[cluster size: 7]</a:t>
+                      </a:r>
+                      <a:endParaRPr lang="en-CA" sz="1400" b="0" i="0" u="none" strike="noStrike" dirty="0">
+                        <a:solidFill>
+                          <a:srgbClr val="000000"/>
+                        </a:solidFill>
+                        <a:effectLst/>
+                        <a:latin typeface="Verdana Pro" panose="020B0604030504040204" pitchFamily="34" charset="0"/>
+                      </a:endParaRPr>
+                    </a:p>
+                  </a:txBody>
+                  <a:tcPr marL="3472" marR="3472" marT="3472" marB="0" anchor="b"/>
+                </a:tc>
+                <a:tc hMerge="1">
+                  <a:txBody>
+                    <a:bodyPr/>
+                    <a:lstStyle/>
+                    <a:p>
+                      <a:pPr algn="l" fontAlgn="b">
+                        <a:buNone/>
+                      </a:pPr>
+                      <a:endParaRPr lang="en-CA" sz="1400" b="0" i="0" u="none" strike="noStrike" dirty="0">
+                        <a:solidFill>
+                          <a:srgbClr val="000000"/>
+                        </a:solidFill>
+                        <a:effectLst/>
+                        <a:latin typeface="Verdana Pro" panose="020B0604030504040204" pitchFamily="34" charset="0"/>
+                      </a:endParaRPr>
+                    </a:p>
+                  </a:txBody>
+                  <a:tcPr marL="3472" marR="3472" marT="3472" marB="0" anchor="b"/>
+                </a:tc>
+                <a:extLst>
+                  <a:ext uri="{0D108BD9-81ED-4DB2-BD59-A6C34878D82A}">
+                    <a16:rowId xmlns:a16="http://schemas.microsoft.com/office/drawing/2014/main" val="3254720063"/>
+                  </a:ext>
+                </a:extLst>
+              </a:tr>
+              <a:tr h="143802">
+                <a:tc>
+                  <a:txBody>
+                    <a:bodyPr/>
+                    <a:lstStyle/>
+                    <a:p>
+                      <a:pPr algn="l" fontAlgn="b">
+                        <a:buNone/>
+                      </a:pPr>
+                      <a:r>
+                        <a:rPr lang="en-CA" sz="1400" b="0" u="none" strike="noStrike" dirty="0">
+                          <a:solidFill>
+                            <a:srgbClr val="000000"/>
+                          </a:solidFill>
+                          <a:effectLst/>
+                          <a:latin typeface="Verdana Pro" panose="020B0604030504040204" pitchFamily="34" charset="0"/>
+                        </a:rPr>
+                        <a:t>name</a:t>
+                      </a:r>
+                      <a:endParaRPr lang="en-CA" sz="1400" b="0" i="0" u="none" strike="noStrike" dirty="0">
+                        <a:solidFill>
+                          <a:srgbClr val="000000"/>
+                        </a:solidFill>
+                        <a:effectLst/>
+                        <a:latin typeface="Verdana Pro" panose="020B0604030504040204" pitchFamily="34" charset="0"/>
+                      </a:endParaRPr>
+                    </a:p>
+                  </a:txBody>
+                  <a:tcPr marL="3472" marR="3472" marT="3472" marB="0" anchor="b"/>
+                </a:tc>
+                <a:tc>
+                  <a:txBody>
+                    <a:bodyPr/>
+                    <a:lstStyle/>
+                    <a:p>
+                      <a:pPr algn="l" fontAlgn="b">
+                        <a:buNone/>
+                      </a:pPr>
+                      <a:r>
+                        <a:rPr lang="en-CA" sz="1400" b="0" u="none" strike="noStrike" dirty="0">
+                          <a:solidFill>
+                            <a:srgbClr val="000000"/>
+                          </a:solidFill>
+                          <a:effectLst/>
+                          <a:latin typeface="Verdana Pro" panose="020B0604030504040204" pitchFamily="34" charset="0"/>
+                        </a:rPr>
+                        <a:t>p_value</a:t>
+                      </a:r>
+                      <a:endParaRPr lang="en-CA" sz="1400" b="0" i="0" u="none" strike="noStrike" dirty="0">
+                        <a:solidFill>
+                          <a:srgbClr val="000000"/>
+                        </a:solidFill>
+                        <a:effectLst/>
+                        <a:latin typeface="Verdana Pro" panose="020B0604030504040204" pitchFamily="34" charset="0"/>
+                      </a:endParaRPr>
+                    </a:p>
+                  </a:txBody>
+                  <a:tcPr marL="3472" marR="3472" marT="3472" marB="0" anchor="b"/>
+                </a:tc>
+                <a:extLst>
+                  <a:ext uri="{0D108BD9-81ED-4DB2-BD59-A6C34878D82A}">
+                    <a16:rowId xmlns:a16="http://schemas.microsoft.com/office/drawing/2014/main" val="697414357"/>
+                  </a:ext>
+                </a:extLst>
+              </a:tr>
+              <a:tr h="125496">
+                <a:tc>
+                  <a:txBody>
+                    <a:bodyPr/>
+                    <a:lstStyle/>
+                    <a:p>
+                      <a:pPr algn="l" fontAlgn="b">
+                        <a:buNone/>
+                      </a:pPr>
+                      <a:r>
+                        <a:rPr lang="en-CA" sz="1200" b="0" i="0" u="none" strike="noStrike" dirty="0">
+                          <a:solidFill>
+                            <a:srgbClr val="000000"/>
+                          </a:solidFill>
+                          <a:effectLst/>
+                          <a:latin typeface="Courier New" panose="02070309020205020404" pitchFamily="49" charset="0"/>
+                          <a:cs typeface="Courier New" panose="02070309020205020404" pitchFamily="49" charset="0"/>
+                        </a:rPr>
+                        <a:t>membrane protein dislocase activity</a:t>
+                      </a:r>
+                    </a:p>
+                  </a:txBody>
+                  <a:tcPr marL="6350" marR="6350" marT="6350" marB="0" anchor="b">
+                    <a:lnR w="12700" cap="flat" cmpd="sng" algn="ctr">
+                      <a:solidFill>
+                        <a:schemeClr val="tx1"/>
+                      </a:solidFill>
+                      <a:prstDash val="solid"/>
+                      <a:round/>
+                      <a:headEnd type="none" w="med" len="med"/>
+                      <a:tailEnd type="none" w="med" len="med"/>
+                    </a:lnR>
+                    <a:lnB w="12700" cap="flat" cmpd="sng" algn="ctr">
+                      <a:solidFill>
+                        <a:schemeClr val="bg1">
+                          <a:lumMod val="75000"/>
+                        </a:schemeClr>
+                      </a:solidFill>
+                      <a:prstDash val="solid"/>
+                      <a:round/>
+                      <a:headEnd type="none" w="med" len="med"/>
+                      <a:tailEnd type="none" w="med" len="med"/>
+                    </a:lnB>
+                  </a:tcPr>
+                </a:tc>
+                <a:tc>
+                  <a:txBody>
+                    <a:bodyPr/>
+                    <a:lstStyle/>
+                    <a:p>
+                      <a:pPr algn="r" fontAlgn="b">
+                        <a:buNone/>
+                      </a:pPr>
+                      <a:r>
+                        <a:rPr lang="en-CA" sz="1200" b="0" i="0" u="none" strike="noStrike" dirty="0">
+                          <a:solidFill>
+                            <a:srgbClr val="000000"/>
+                          </a:solidFill>
+                          <a:effectLst/>
+                          <a:latin typeface="Courier New" panose="02070309020205020404" pitchFamily="49" charset="0"/>
+                          <a:cs typeface="Courier New" panose="02070309020205020404" pitchFamily="49" charset="0"/>
+                        </a:rPr>
+                        <a:t>0.049891</a:t>
+                      </a:r>
+                    </a:p>
+                  </a:txBody>
+                  <a:tcPr marL="6350" marR="6350" marT="6350" marB="0" anchor="b">
+                    <a:lnL w="12700" cap="flat" cmpd="sng" algn="ctr">
+                      <a:solidFill>
+                        <a:schemeClr val="tx1"/>
+                      </a:solidFill>
+                      <a:prstDash val="solid"/>
+                      <a:round/>
+                      <a:headEnd type="none" w="med" len="med"/>
+                      <a:tailEnd type="none" w="med" len="med"/>
+                    </a:lnL>
+                    <a:lnB w="12700" cap="flat" cmpd="sng" algn="ctr">
+                      <a:solidFill>
+                        <a:schemeClr val="bg1">
+                          <a:lumMod val="75000"/>
+                        </a:schemeClr>
+                      </a:solidFill>
+                      <a:prstDash val="solid"/>
+                      <a:round/>
+                      <a:headEnd type="none" w="med" len="med"/>
+                      <a:tailEnd type="none" w="med" len="med"/>
+                    </a:lnB>
+                  </a:tcPr>
+                </a:tc>
+                <a:extLst>
+                  <a:ext uri="{0D108BD9-81ED-4DB2-BD59-A6C34878D82A}">
+                    <a16:rowId xmlns:a16="http://schemas.microsoft.com/office/drawing/2014/main" val="3517527668"/>
+                  </a:ext>
+                </a:extLst>
+              </a:tr>
+            </a:tbl>
+          </a:graphicData>
+        </a:graphic>
+      </p:graphicFrame>
+      <p:graphicFrame>
+        <p:nvGraphicFramePr>
+          <p:cNvPr id="9" name="Table 8">
+            <a:extLst>
+              <a:ext uri="{FF2B5EF4-FFF2-40B4-BE49-F238E27FC236}">
+                <a16:creationId xmlns:a16="http://schemas.microsoft.com/office/drawing/2014/main" id="{F16BB703-A416-4C39-1360-B0E70E7404C7}"/>
+              </a:ext>
+            </a:extLst>
+          </p:cNvPr>
+          <p:cNvGraphicFramePr>
+            <a:graphicFrameLocks noGrp="1"/>
+          </p:cNvGraphicFramePr>
+          <p:nvPr>
+            <p:extLst>
+              <p:ext uri="{D42A27DB-BD31-4B8C-83A1-F6EECF244321}">
+                <p14:modId xmlns:p14="http://schemas.microsoft.com/office/powerpoint/2010/main" val="4204979906"/>
+              </p:ext>
+            </p:extLst>
+          </p:nvPr>
+        </p:nvGraphicFramePr>
+        <p:xfrm>
+          <a:off x="2037319" y="5154755"/>
+          <a:ext cx="3716499" cy="1208364"/>
+        </p:xfrm>
+        <a:graphic>
+          <a:graphicData uri="http://schemas.openxmlformats.org/drawingml/2006/table">
+            <a:tbl>
+              <a:tblPr>
+                <a:tableStyleId>{5940675A-B579-460E-94D1-54222C63F5DA}</a:tableStyleId>
+              </a:tblPr>
+              <a:tblGrid>
+                <a:gridCol w="2845171">
+                  <a:extLst>
+                    <a:ext uri="{9D8B030D-6E8A-4147-A177-3AD203B41FA5}">
+                      <a16:colId xmlns:a16="http://schemas.microsoft.com/office/drawing/2014/main" val="2883141624"/>
+                    </a:ext>
+                  </a:extLst>
+                </a:gridCol>
+                <a:gridCol w="871328">
+                  <a:extLst>
+                    <a:ext uri="{9D8B030D-6E8A-4147-A177-3AD203B41FA5}">
+                      <a16:colId xmlns:a16="http://schemas.microsoft.com/office/drawing/2014/main" val="3161232302"/>
+                    </a:ext>
+                  </a:extLst>
+                </a:gridCol>
+              </a:tblGrid>
+              <a:tr h="143802">
+                <a:tc gridSpan="2">
+                  <a:txBody>
+                    <a:bodyPr/>
+                    <a:lstStyle/>
+                    <a:p>
+                      <a:pPr algn="l" fontAlgn="b">
+                        <a:buNone/>
+                      </a:pPr>
+                      <a:r>
+                        <a:rPr lang="en-US" sz="1400" b="0" i="0" u="none" strike="noStrike" dirty="0">
+                          <a:solidFill>
+                            <a:srgbClr val="000000"/>
+                          </a:solidFill>
+                          <a:effectLst/>
+                          <a:latin typeface="Verdana Pro" panose="020B0604030504040204" pitchFamily="34" charset="0"/>
+                        </a:rPr>
+                        <a:t>A0A1W9R9X2: gprofiler GO terms </a:t>
+                      </a:r>
+                    </a:p>
+                    <a:p>
+                      <a:pPr algn="l" fontAlgn="b">
+                        <a:buNone/>
+                      </a:pPr>
+                      <a:r>
+                        <a:rPr lang="en-US" sz="1400" b="0" i="0" u="none" strike="noStrike" dirty="0">
+                          <a:solidFill>
+                            <a:srgbClr val="000000"/>
+                          </a:solidFill>
+                          <a:effectLst/>
+                          <a:latin typeface="Verdana Pro" panose="020B0604030504040204" pitchFamily="34" charset="0"/>
+                        </a:rPr>
+                        <a:t>[cluster size: 4]</a:t>
+                      </a:r>
+                      <a:endParaRPr lang="en-CA" sz="1400" b="0" i="0" u="none" strike="noStrike" dirty="0">
+                        <a:solidFill>
+                          <a:srgbClr val="000000"/>
+                        </a:solidFill>
+                        <a:effectLst/>
+                        <a:latin typeface="Verdana Pro" panose="020B0604030504040204" pitchFamily="34" charset="0"/>
+                      </a:endParaRPr>
+                    </a:p>
+                  </a:txBody>
+                  <a:tcPr marL="3472" marR="3472" marT="3472" marB="0" anchor="b"/>
+                </a:tc>
+                <a:tc hMerge="1">
+                  <a:txBody>
+                    <a:bodyPr/>
+                    <a:lstStyle/>
+                    <a:p>
+                      <a:pPr algn="l" fontAlgn="b">
+                        <a:buNone/>
+                      </a:pPr>
+                      <a:endParaRPr lang="en-CA" sz="1400" b="0" i="0" u="none" strike="noStrike" dirty="0">
+                        <a:solidFill>
+                          <a:srgbClr val="000000"/>
+                        </a:solidFill>
+                        <a:effectLst/>
+                        <a:latin typeface="Verdana Pro" panose="020B0604030504040204" pitchFamily="34" charset="0"/>
+                      </a:endParaRPr>
+                    </a:p>
+                  </a:txBody>
+                  <a:tcPr marL="3472" marR="3472" marT="3472" marB="0" anchor="b"/>
+                </a:tc>
+                <a:extLst>
+                  <a:ext uri="{0D108BD9-81ED-4DB2-BD59-A6C34878D82A}">
+                    <a16:rowId xmlns:a16="http://schemas.microsoft.com/office/drawing/2014/main" val="3254720063"/>
+                  </a:ext>
+                </a:extLst>
+              </a:tr>
+              <a:tr h="143802">
+                <a:tc>
+                  <a:txBody>
+                    <a:bodyPr/>
+                    <a:lstStyle/>
+                    <a:p>
+                      <a:pPr algn="l" fontAlgn="b">
+                        <a:buNone/>
+                      </a:pPr>
+                      <a:r>
+                        <a:rPr lang="en-CA" sz="1400" b="0" u="none" strike="noStrike" dirty="0">
+                          <a:solidFill>
+                            <a:srgbClr val="000000"/>
+                          </a:solidFill>
+                          <a:effectLst/>
+                          <a:latin typeface="Verdana Pro" panose="020B0604030504040204" pitchFamily="34" charset="0"/>
+                        </a:rPr>
+                        <a:t>name</a:t>
+                      </a:r>
+                      <a:endParaRPr lang="en-CA" sz="1400" b="0" i="0" u="none" strike="noStrike" dirty="0">
+                        <a:solidFill>
+                          <a:srgbClr val="000000"/>
+                        </a:solidFill>
+                        <a:effectLst/>
+                        <a:latin typeface="Verdana Pro" panose="020B0604030504040204" pitchFamily="34" charset="0"/>
+                      </a:endParaRPr>
+                    </a:p>
+                  </a:txBody>
+                  <a:tcPr marL="3472" marR="3472" marT="3472" marB="0" anchor="b"/>
+                </a:tc>
+                <a:tc>
+                  <a:txBody>
+                    <a:bodyPr/>
+                    <a:lstStyle/>
+                    <a:p>
+                      <a:pPr algn="l" fontAlgn="b">
+                        <a:buNone/>
+                      </a:pPr>
+                      <a:r>
+                        <a:rPr lang="en-CA" sz="1400" b="0" u="none" strike="noStrike" dirty="0">
+                          <a:solidFill>
+                            <a:srgbClr val="000000"/>
+                          </a:solidFill>
+                          <a:effectLst/>
+                          <a:latin typeface="Verdana Pro" panose="020B0604030504040204" pitchFamily="34" charset="0"/>
+                        </a:rPr>
+                        <a:t>p_value</a:t>
+                      </a:r>
+                      <a:endParaRPr lang="en-CA" sz="1400" b="0" i="0" u="none" strike="noStrike" dirty="0">
+                        <a:solidFill>
+                          <a:srgbClr val="000000"/>
+                        </a:solidFill>
+                        <a:effectLst/>
+                        <a:latin typeface="Verdana Pro" panose="020B0604030504040204" pitchFamily="34" charset="0"/>
+                      </a:endParaRPr>
+                    </a:p>
+                  </a:txBody>
+                  <a:tcPr marL="3472" marR="3472" marT="3472" marB="0" anchor="b"/>
+                </a:tc>
+                <a:extLst>
+                  <a:ext uri="{0D108BD9-81ED-4DB2-BD59-A6C34878D82A}">
+                    <a16:rowId xmlns:a16="http://schemas.microsoft.com/office/drawing/2014/main" val="697414357"/>
+                  </a:ext>
+                </a:extLst>
+              </a:tr>
+              <a:tr h="125496">
+                <a:tc>
+                  <a:txBody>
+                    <a:bodyPr/>
+                    <a:lstStyle/>
+                    <a:p>
+                      <a:pPr algn="l" fontAlgn="b">
+                        <a:buNone/>
+                      </a:pPr>
+                      <a:r>
+                        <a:rPr lang="en-CA" sz="1200" b="0" i="0" u="none" strike="noStrike" dirty="0">
+                          <a:solidFill>
+                            <a:srgbClr val="000000"/>
+                          </a:solidFill>
+                          <a:effectLst/>
+                          <a:latin typeface="Courier New" panose="02070309020205020404" pitchFamily="49" charset="0"/>
+                          <a:cs typeface="Courier New" panose="02070309020205020404" pitchFamily="49" charset="0"/>
+                        </a:rPr>
+                        <a:t>DNA secondary structure binding</a:t>
+                      </a:r>
+                    </a:p>
+                  </a:txBody>
+                  <a:tcPr marL="6350" marR="6350" marT="6350" marB="0" anchor="b">
+                    <a:lnR w="12700" cap="flat" cmpd="sng" algn="ctr">
+                      <a:solidFill>
+                        <a:schemeClr val="tx1"/>
+                      </a:solidFill>
+                      <a:prstDash val="solid"/>
+                      <a:round/>
+                      <a:headEnd type="none" w="med" len="med"/>
+                      <a:tailEnd type="none" w="med" len="med"/>
+                    </a:lnR>
+                  </a:tcPr>
+                </a:tc>
+                <a:tc>
+                  <a:txBody>
+                    <a:bodyPr/>
+                    <a:lstStyle/>
+                    <a:p>
+                      <a:pPr algn="r" fontAlgn="b">
+                        <a:buNone/>
+                      </a:pPr>
+                      <a:r>
+                        <a:rPr lang="en-CA" sz="1200" b="0" i="0" u="none" strike="noStrike" dirty="0">
+                          <a:solidFill>
+                            <a:srgbClr val="000000"/>
+                          </a:solidFill>
+                          <a:effectLst/>
+                          <a:latin typeface="Courier New" panose="02070309020205020404" pitchFamily="49" charset="0"/>
+                          <a:cs typeface="Courier New" panose="02070309020205020404" pitchFamily="49" charset="0"/>
+                        </a:rPr>
+                        <a:t>0.001922</a:t>
+                      </a:r>
+                    </a:p>
+                  </a:txBody>
+                  <a:tcPr marL="6350" marR="6350" marT="6350" marB="0" anchor="b">
+                    <a:lnL w="12700" cap="flat" cmpd="sng" algn="ctr">
+                      <a:solidFill>
+                        <a:schemeClr val="tx1"/>
+                      </a:solidFill>
+                      <a:prstDash val="solid"/>
+                      <a:round/>
+                      <a:headEnd type="none" w="med" len="med"/>
+                      <a:tailEnd type="none" w="med" len="med"/>
+                    </a:lnL>
+                  </a:tcPr>
+                </a:tc>
+                <a:extLst>
+                  <a:ext uri="{0D108BD9-81ED-4DB2-BD59-A6C34878D82A}">
+                    <a16:rowId xmlns:a16="http://schemas.microsoft.com/office/drawing/2014/main" val="3517527668"/>
+                  </a:ext>
+                </a:extLst>
+              </a:tr>
+              <a:tr h="125496">
+                <a:tc>
+                  <a:txBody>
+                    <a:bodyPr/>
+                    <a:lstStyle/>
+                    <a:p>
+                      <a:pPr algn="l" fontAlgn="b">
+                        <a:buNone/>
+                      </a:pPr>
+                      <a:r>
+                        <a:rPr lang="en-CA" sz="1200" b="0" i="0" u="none" strike="noStrike" dirty="0">
+                          <a:solidFill>
+                            <a:srgbClr val="000000"/>
+                          </a:solidFill>
+                          <a:effectLst/>
+                          <a:latin typeface="Courier New" panose="02070309020205020404" pitchFamily="49" charset="0"/>
+                          <a:cs typeface="Courier New" panose="02070309020205020404" pitchFamily="49" charset="0"/>
+                        </a:rPr>
+                        <a:t>single-stranded DNA binding	</a:t>
+                      </a:r>
+                    </a:p>
+                  </a:txBody>
+                  <a:tcPr marL="6350" marR="6350" marT="6350" marB="0" anchor="b">
+                    <a:lnR w="12700" cap="flat" cmpd="sng" algn="ctr">
+                      <a:solidFill>
+                        <a:schemeClr val="tx1"/>
+                      </a:solidFill>
+                      <a:prstDash val="solid"/>
+                      <a:round/>
+                      <a:headEnd type="none" w="med" len="med"/>
+                      <a:tailEnd type="none" w="med" len="med"/>
+                    </a:lnR>
+                    <a:lnB w="12700" cap="flat" cmpd="sng" algn="ctr">
+                      <a:solidFill>
+                        <a:schemeClr val="bg1">
+                          <a:lumMod val="75000"/>
+                        </a:schemeClr>
+                      </a:solidFill>
+                      <a:prstDash val="solid"/>
+                      <a:round/>
+                      <a:headEnd type="none" w="med" len="med"/>
+                      <a:tailEnd type="none" w="med" len="med"/>
+                    </a:lnB>
+                  </a:tcPr>
+                </a:tc>
+                <a:tc>
+                  <a:txBody>
+                    <a:bodyPr/>
+                    <a:lstStyle/>
+                    <a:p>
+                      <a:pPr algn="r" fontAlgn="b">
+                        <a:buNone/>
+                      </a:pPr>
+                      <a:r>
+                        <a:rPr lang="en-CA" sz="1200" b="0" i="0" u="none" strike="noStrike" dirty="0">
+                          <a:solidFill>
+                            <a:srgbClr val="000000"/>
+                          </a:solidFill>
+                          <a:effectLst/>
+                          <a:latin typeface="Courier New" panose="02070309020205020404" pitchFamily="49" charset="0"/>
+                          <a:cs typeface="Courier New" panose="02070309020205020404" pitchFamily="49" charset="0"/>
+                        </a:rPr>
+                        <a:t>0.01819</a:t>
+                      </a:r>
+                    </a:p>
+                  </a:txBody>
+                  <a:tcPr marL="6350" marR="6350" marT="6350" marB="0" anchor="b">
+                    <a:lnL w="12700" cap="flat" cmpd="sng" algn="ctr">
+                      <a:solidFill>
+                        <a:schemeClr val="tx1"/>
+                      </a:solidFill>
+                      <a:prstDash val="solid"/>
+                      <a:round/>
+                      <a:headEnd type="none" w="med" len="med"/>
+                      <a:tailEnd type="none" w="med" len="med"/>
+                    </a:lnL>
+                    <a:lnB w="12700" cap="flat" cmpd="sng" algn="ctr">
+                      <a:solidFill>
+                        <a:schemeClr val="bg1">
+                          <a:lumMod val="75000"/>
+                        </a:schemeClr>
+                      </a:solidFill>
+                      <a:prstDash val="solid"/>
+                      <a:round/>
+                      <a:headEnd type="none" w="med" len="med"/>
+                      <a:tailEnd type="none" w="med" len="med"/>
+                    </a:lnB>
+                  </a:tcPr>
+                </a:tc>
+                <a:extLst>
+                  <a:ext uri="{0D108BD9-81ED-4DB2-BD59-A6C34878D82A}">
+                    <a16:rowId xmlns:a16="http://schemas.microsoft.com/office/drawing/2014/main" val="2909593651"/>
+                  </a:ext>
+                </a:extLst>
+              </a:tr>
+            </a:tbl>
+          </a:graphicData>
+        </a:graphic>
+      </p:graphicFrame>
+      <p:sp>
+        <p:nvSpPr>
+          <p:cNvPr id="11" name="Rectangle: Rounded Corners 10">
+            <a:extLst>
+              <a:ext uri="{FF2B5EF4-FFF2-40B4-BE49-F238E27FC236}">
+                <a16:creationId xmlns:a16="http://schemas.microsoft.com/office/drawing/2014/main" id="{1B2C39A7-4393-ED33-E9E9-ACCDD7CEB027}"/>
+              </a:ext>
+            </a:extLst>
+          </p:cNvPr>
+          <p:cNvSpPr/>
+          <p:nvPr/>
+        </p:nvSpPr>
+        <p:spPr>
+          <a:xfrm>
+            <a:off x="366637" y="275480"/>
+            <a:ext cx="7917391" cy="712072"/>
+          </a:xfrm>
+          <a:prstGeom prst="roundRect">
+            <a:avLst/>
+          </a:prstGeom>
+          <a:solidFill>
+            <a:srgbClr val="0162B3"/>
+          </a:solidFill>
+          <a:ln>
+            <a:solidFill>
+              <a:srgbClr val="0162B3"/>
+            </a:solidFill>
+          </a:ln>
+        </p:spPr>
+        <p:style>
+          <a:lnRef idx="2">
+            <a:schemeClr val="accent1">
+              <a:shade val="50000"/>
+            </a:schemeClr>
+          </a:lnRef>
+          <a:fillRef idx="1">
+            <a:schemeClr val="accent1"/>
+          </a:fillRef>
+          <a:effectRef idx="0">
+            <a:schemeClr val="accent1"/>
+          </a:effectRef>
+          <a:fontRef idx="minor">
+            <a:schemeClr val="lt1"/>
+          </a:fontRef>
+        </p:style>
+        <p:txBody>
+          <a:bodyPr rtlCol="0" anchor="ctr"/>
+          <a:lstStyle>
+            <a:defPPr>
+              <a:defRPr lang="en-US"/>
+            </a:defPPr>
+            <a:lvl1pPr marL="0" algn="l" defTabSz="914400" rtl="0" eaLnBrk="1" latinLnBrk="0" hangingPunct="1">
+              <a:defRPr sz="1800" kern="1200">
+                <a:solidFill>
+                  <a:schemeClr val="lt1"/>
+                </a:solidFill>
+                <a:latin typeface="+mn-lt"/>
+                <a:ea typeface="+mn-ea"/>
+                <a:cs typeface="+mn-cs"/>
+              </a:defRPr>
+            </a:lvl1pPr>
+            <a:lvl2pPr marL="457200" algn="l" defTabSz="914400" rtl="0" eaLnBrk="1" latinLnBrk="0" hangingPunct="1">
+              <a:defRPr sz="1800" kern="1200">
+                <a:solidFill>
+                  <a:schemeClr val="lt1"/>
+                </a:solidFill>
+                <a:latin typeface="+mn-lt"/>
+                <a:ea typeface="+mn-ea"/>
+                <a:cs typeface="+mn-cs"/>
+              </a:defRPr>
+            </a:lvl2pPr>
+            <a:lvl3pPr marL="914400" algn="l" defTabSz="914400" rtl="0" eaLnBrk="1" latinLnBrk="0" hangingPunct="1">
+              <a:defRPr sz="1800" kern="1200">
+                <a:solidFill>
+                  <a:schemeClr val="lt1"/>
+                </a:solidFill>
+                <a:latin typeface="+mn-lt"/>
+                <a:ea typeface="+mn-ea"/>
+                <a:cs typeface="+mn-cs"/>
+              </a:defRPr>
+            </a:lvl3pPr>
+            <a:lvl4pPr marL="1371600" algn="l" defTabSz="914400" rtl="0" eaLnBrk="1" latinLnBrk="0" hangingPunct="1">
+              <a:defRPr sz="1800" kern="1200">
+                <a:solidFill>
+                  <a:schemeClr val="lt1"/>
+                </a:solidFill>
+                <a:latin typeface="+mn-lt"/>
+                <a:ea typeface="+mn-ea"/>
+                <a:cs typeface="+mn-cs"/>
+              </a:defRPr>
+            </a:lvl4pPr>
+            <a:lvl5pPr marL="1828800" algn="l" defTabSz="914400" rtl="0" eaLnBrk="1" latinLnBrk="0" hangingPunct="1">
+              <a:defRPr sz="1800" kern="1200">
+                <a:solidFill>
+                  <a:schemeClr val="lt1"/>
+                </a:solidFill>
+                <a:latin typeface="+mn-lt"/>
+                <a:ea typeface="+mn-ea"/>
+                <a:cs typeface="+mn-cs"/>
+              </a:defRPr>
+            </a:lvl5pPr>
+            <a:lvl6pPr marL="2286000" algn="l" defTabSz="914400" rtl="0" eaLnBrk="1" latinLnBrk="0" hangingPunct="1">
+              <a:defRPr sz="1800" kern="1200">
+                <a:solidFill>
+                  <a:schemeClr val="lt1"/>
+                </a:solidFill>
+                <a:latin typeface="+mn-lt"/>
+                <a:ea typeface="+mn-ea"/>
+                <a:cs typeface="+mn-cs"/>
+              </a:defRPr>
+            </a:lvl6pPr>
+            <a:lvl7pPr marL="2743200" algn="l" defTabSz="914400" rtl="0" eaLnBrk="1" latinLnBrk="0" hangingPunct="1">
+              <a:defRPr sz="1800" kern="1200">
+                <a:solidFill>
+                  <a:schemeClr val="lt1"/>
+                </a:solidFill>
+                <a:latin typeface="+mn-lt"/>
+                <a:ea typeface="+mn-ea"/>
+                <a:cs typeface="+mn-cs"/>
+              </a:defRPr>
+            </a:lvl7pPr>
+            <a:lvl8pPr marL="3200400" algn="l" defTabSz="914400" rtl="0" eaLnBrk="1" latinLnBrk="0" hangingPunct="1">
+              <a:defRPr sz="1800" kern="1200">
+                <a:solidFill>
+                  <a:schemeClr val="lt1"/>
+                </a:solidFill>
+                <a:latin typeface="+mn-lt"/>
+                <a:ea typeface="+mn-ea"/>
+                <a:cs typeface="+mn-cs"/>
+              </a:defRPr>
+            </a:lvl8pPr>
+            <a:lvl9pPr marL="3657600" algn="l" defTabSz="914400" rtl="0" eaLnBrk="1" latinLnBrk="0" hangingPunct="1">
+              <a:defRPr sz="1800" kern="1200">
+                <a:solidFill>
+                  <a:schemeClr val="lt1"/>
+                </a:solidFill>
+                <a:latin typeface="+mn-lt"/>
+                <a:ea typeface="+mn-ea"/>
+                <a:cs typeface="+mn-cs"/>
+              </a:defRPr>
+            </a:lvl9pPr>
+          </a:lstStyle>
+          <a:p>
+            <a:pPr algn="ctr"/>
+            <a:endParaRPr lang="en-CA"/>
+          </a:p>
+        </p:txBody>
+      </p:sp>
+      <p:sp>
+        <p:nvSpPr>
+          <p:cNvPr id="12" name="TextBox 11">
+            <a:extLst>
+              <a:ext uri="{FF2B5EF4-FFF2-40B4-BE49-F238E27FC236}">
+                <a16:creationId xmlns:a16="http://schemas.microsoft.com/office/drawing/2014/main" id="{FA753A44-9893-4449-A77E-627B0A88902C}"/>
+              </a:ext>
+            </a:extLst>
+          </p:cNvPr>
+          <p:cNvSpPr txBox="1"/>
+          <p:nvPr/>
+        </p:nvSpPr>
+        <p:spPr>
+          <a:xfrm>
+            <a:off x="508580" y="311794"/>
+            <a:ext cx="7561362" cy="584775"/>
+          </a:xfrm>
+          <a:prstGeom prst="rect">
+            <a:avLst/>
+          </a:prstGeom>
+          <a:noFill/>
+        </p:spPr>
+        <p:txBody>
+          <a:bodyPr wrap="square" rtlCol="0">
+            <a:spAutoFit/>
+          </a:bodyPr>
+          <a:lstStyle/>
+          <a:p>
+            <a:r>
+              <a:rPr lang="en-US" sz="3200" b="1" dirty="0">
+                <a:solidFill>
+                  <a:schemeClr val="bg1"/>
+                </a:solidFill>
+                <a:latin typeface="Georgia Pro" panose="02040502050405020303" pitchFamily="18" charset="0"/>
+              </a:rPr>
+              <a:t>GO-term enrichment per cluster</a:t>
+            </a:r>
+            <a:endParaRPr lang="en-US" sz="2000" b="1" dirty="0">
+              <a:solidFill>
+                <a:schemeClr val="bg1"/>
+              </a:solidFill>
+              <a:latin typeface="Georgia Pro" panose="02040502050405020303" pitchFamily="18" charset="0"/>
+            </a:endParaRPr>
+          </a:p>
+        </p:txBody>
+      </p:sp>
+    </p:spTree>
+    <p:extLst>
+      <p:ext uri="{BB962C8B-B14F-4D97-AF65-F5344CB8AC3E}">
+        <p14:creationId xmlns:p14="http://schemas.microsoft.com/office/powerpoint/2010/main" val="1671510795"/>
+      </p:ext>
+    </p:extLst>
+  </p:cSld>
+  <p:clrMapOvr>
+    <a:masterClrMapping/>
+  </p:clrMapOvr>
+</p:sld>
+</file>
+
+<file path=ppt/slides/slide9.xml><?xml version="1.0" encoding="utf-8"?>
 <p:sld xmlns:a="http://schemas.openxmlformats.org/drawingml/2006/main" xmlns:r="http://schemas.openxmlformats.org/officeDocument/2006/relationships" xmlns:p="http://schemas.openxmlformats.org/presentationml/2006/main">
   <p:cSld>
     <p:spTree>
@@ -12806,7 +17241,7 @@
             <a:fld id="{3899FC77-40C7-4C49-9A19-86BDE9B75E8A}" type="slidenum">
               <a:rPr lang="en-CA" smtClean="0"/>
               <a:pPr/>
-              <a:t>8</a:t>
+              <a:t>9</a:t>
             </a:fld>
             <a:endParaRPr lang="en-CA" sz="1400"/>
           </a:p>
@@ -13185,103 +17620,12 @@
           </a:prstGeom>
         </p:spPr>
       </p:pic>
-    </p:spTree>
-    <p:extLst>
-      <p:ext uri="{BB962C8B-B14F-4D97-AF65-F5344CB8AC3E}">
-        <p14:creationId xmlns:p14="http://schemas.microsoft.com/office/powerpoint/2010/main" val="3504614833"/>
-      </p:ext>
-    </p:extLst>
-  </p:cSld>
-  <p:clrMapOvr>
-    <a:masterClrMapping/>
-  </p:clrMapOvr>
-</p:sld>
-</file>
-
-<file path=ppt/slides/slide9.xml><?xml version="1.0" encoding="utf-8"?>
-<p:sld xmlns:a="http://schemas.openxmlformats.org/drawingml/2006/main" xmlns:r="http://schemas.openxmlformats.org/officeDocument/2006/relationships" xmlns:p="http://schemas.openxmlformats.org/presentationml/2006/main">
-  <p:cSld>
-    <p:spTree>
-      <p:nvGrpSpPr>
-        <p:cNvPr id="1" name=""/>
-        <p:cNvGrpSpPr/>
-        <p:nvPr/>
-      </p:nvGrpSpPr>
-      <p:grpSpPr>
-        <a:xfrm>
-          <a:off x="0" y="0"/>
-          <a:ext cx="0" cy="0"/>
-          <a:chOff x="0" y="0"/>
-          <a:chExt cx="0" cy="0"/>
-        </a:xfrm>
-      </p:grpSpPr>
       <p:sp>
         <p:nvSpPr>
-          <p:cNvPr id="4" name="Slide Number Placeholder 3">
+          <p:cNvPr id="5" name="TextBox 4">
             <a:extLst>
               <a:ext uri="{FF2B5EF4-FFF2-40B4-BE49-F238E27FC236}">
-                <a16:creationId xmlns:a16="http://schemas.microsoft.com/office/drawing/2014/main" id="{4CCEFCD4-D316-F0B9-8A49-0284EA756802}"/>
-              </a:ext>
-            </a:extLst>
-          </p:cNvPr>
-          <p:cNvSpPr>
-            <a:spLocks noGrp="1"/>
-          </p:cNvSpPr>
-          <p:nvPr>
-            <p:ph type="sldNum" sz="quarter" idx="12"/>
-          </p:nvPr>
-        </p:nvSpPr>
-        <p:spPr/>
-        <p:txBody>
-          <a:bodyPr/>
-          <a:lstStyle/>
-          <a:p>
-            <a:fld id="{3899FC77-40C7-4C49-9A19-86BDE9B75E8A}" type="slidenum">
-              <a:rPr lang="en-CA" smtClean="0"/>
-              <a:pPr/>
-              <a:t>9</a:t>
-            </a:fld>
-            <a:endParaRPr lang="en-CA" sz="1400"/>
-          </a:p>
-        </p:txBody>
-      </p:sp>
-      <p:pic>
-        <p:nvPicPr>
-          <p:cNvPr id="6" name="Picture 5">
-            <a:extLst>
-              <a:ext uri="{FF2B5EF4-FFF2-40B4-BE49-F238E27FC236}">
-                <a16:creationId xmlns:a16="http://schemas.microsoft.com/office/drawing/2014/main" id="{D9CA41CC-BBC5-640E-E309-6E417079B36A}"/>
-              </a:ext>
-            </a:extLst>
-          </p:cNvPr>
-          <p:cNvPicPr>
-            <a:picLocks noChangeAspect="1"/>
-          </p:cNvPicPr>
-          <p:nvPr/>
-        </p:nvPicPr>
-        <p:blipFill>
-          <a:blip r:embed="rId3"/>
-          <a:srcRect l="4394" t="5615" r="12846" b="3898"/>
-          <a:stretch>
-            <a:fillRect/>
-          </a:stretch>
-        </p:blipFill>
-        <p:spPr>
-          <a:xfrm>
-            <a:off x="6576821" y="1998345"/>
-            <a:ext cx="4305301" cy="3990975"/>
-          </a:xfrm>
-          <a:prstGeom prst="rect">
-            <a:avLst/>
-          </a:prstGeom>
-        </p:spPr>
-      </p:pic>
-      <p:sp>
-        <p:nvSpPr>
-          <p:cNvPr id="7" name="TextBox 6">
-            <a:extLst>
-              <a:ext uri="{FF2B5EF4-FFF2-40B4-BE49-F238E27FC236}">
-                <a16:creationId xmlns:a16="http://schemas.microsoft.com/office/drawing/2014/main" id="{8716480E-4A8B-1E19-6056-65D8B92B1E86}"/>
+                <a16:creationId xmlns:a16="http://schemas.microsoft.com/office/drawing/2014/main" id="{76DA0663-4F1D-232C-EF7F-8C26BFC51E7B}"/>
               </a:ext>
             </a:extLst>
           </p:cNvPr>
@@ -13290,8 +17634,8 @@
         </p:nvSpPr>
         <p:spPr>
           <a:xfrm>
-            <a:off x="1659446" y="255884"/>
-            <a:ext cx="4324868" cy="1815882"/>
+            <a:off x="709871" y="3310854"/>
+            <a:ext cx="4324868" cy="523220"/>
           </a:xfrm>
           <a:prstGeom prst="rect">
             <a:avLst/>
@@ -13299,792 +17643,63 @@
           <a:noFill/>
           <a:ln>
             <a:solidFill>
-              <a:srgbClr val="4779C6"/>
+              <a:schemeClr val="tx1">
+                <a:lumMod val="65000"/>
+                <a:lumOff val="35000"/>
+              </a:schemeClr>
             </a:solidFill>
           </a:ln>
         </p:spPr>
         <p:txBody>
-          <a:bodyPr wrap="square" rtlCol="0">
+          <a:bodyPr wrap="square">
             <a:spAutoFit/>
           </a:bodyPr>
           <a:lstStyle/>
           <a:p>
             <a:r>
-              <a:rPr lang="en-US" sz="1400" b="1" dirty="0">
+              <a:rPr lang="en-CA" sz="1400" b="0" i="0" dirty="0">
                 <a:solidFill>
-                  <a:srgbClr val="4779C6"/>
+                  <a:schemeClr val="tx1">
+                    <a:lumMod val="65000"/>
+                    <a:lumOff val="35000"/>
+                  </a:schemeClr>
                 </a:solidFill>
+                <a:effectLst/>
                 <a:latin typeface="Verdana Pro" panose="020B0604030504040204" pitchFamily="34" charset="0"/>
-                <a:cs typeface="Courier New" panose="02070309020205020404" pitchFamily="49" charset="0"/>
               </a:rPr>
-              <a:t>Radical S-adenosyl methionine domain containing 2</a:t>
-            </a:r>
-          </a:p>
-          <a:p>
+              <a:t>Cluster ID: A0A480PGP1 </a:t>
+            </a:r>
+          </a:p>
+          <a:p>
+            <a:r>
+              <a:rPr lang="en-CA" sz="1400" b="0" i="0" dirty="0">
+                <a:solidFill>
+                  <a:schemeClr val="tx1">
+                    <a:lumMod val="65000"/>
+                    <a:lumOff val="35000"/>
+                  </a:schemeClr>
+                </a:solidFill>
+                <a:effectLst/>
+                <a:latin typeface="Verdana Pro" panose="020B0604030504040204" pitchFamily="34" charset="0"/>
+              </a:rPr>
+              <a:t>[no enriched molecular functions]</a:t>
+            </a:r>
             <a:endParaRPr lang="en-CA" sz="1400" dirty="0">
               <a:solidFill>
-                <a:srgbClr val="4779C6"/>
+                <a:schemeClr val="tx1">
+                  <a:lumMod val="65000"/>
+                  <a:lumOff val="35000"/>
+                </a:schemeClr>
               </a:solidFill>
               <a:latin typeface="Verdana Pro" panose="020B0604030504040204" pitchFamily="34" charset="0"/>
-              <a:cs typeface="Courier New" panose="02070309020205020404" pitchFamily="49" charset="0"/>
             </a:endParaRPr>
-          </a:p>
-          <a:p>
-            <a:r>
-              <a:rPr lang="en-CA" sz="1400" dirty="0">
-                <a:solidFill>
-                  <a:srgbClr val="4779C6"/>
-                </a:solidFill>
-                <a:latin typeface="Verdana Pro" panose="020B0604030504040204" pitchFamily="34" charset="0"/>
-                <a:cs typeface="Courier New" panose="02070309020205020404" pitchFamily="49" charset="0"/>
-              </a:rPr>
-              <a:t>Molecular functions</a:t>
-            </a:r>
-          </a:p>
-          <a:p>
-            <a:pPr marL="285750" indent="-285750">
-              <a:buFont typeface="Arial" panose="020B0604020202020204" pitchFamily="34" charset="0"/>
-              <a:buChar char="•"/>
-            </a:pPr>
-            <a:r>
-              <a:rPr lang="en-CA" sz="1400" dirty="0">
-                <a:solidFill>
-                  <a:srgbClr val="4779C6"/>
-                </a:solidFill>
-                <a:latin typeface="Verdana Pro" panose="020B0604030504040204" pitchFamily="34" charset="0"/>
-                <a:cs typeface="Courier New" panose="02070309020205020404" pitchFamily="49" charset="0"/>
-              </a:rPr>
-              <a:t>Small molecule binding</a:t>
-            </a:r>
-          </a:p>
-          <a:p>
-            <a:endParaRPr lang="en-CA" sz="1400" dirty="0">
-              <a:solidFill>
-                <a:srgbClr val="4779C6"/>
-              </a:solidFill>
-              <a:latin typeface="Verdana Pro" panose="020B0604030504040204" pitchFamily="34" charset="0"/>
-              <a:cs typeface="Courier New" panose="02070309020205020404" pitchFamily="49" charset="0"/>
-            </a:endParaRPr>
-          </a:p>
-          <a:p>
-            <a:r>
-              <a:rPr lang="en-CA" sz="1400" dirty="0">
-                <a:solidFill>
-                  <a:srgbClr val="4779C6"/>
-                </a:solidFill>
-                <a:latin typeface="Verdana Pro" panose="020B0604030504040204" pitchFamily="34" charset="0"/>
-                <a:cs typeface="Courier New" panose="02070309020205020404" pitchFamily="49" charset="0"/>
-              </a:rPr>
-              <a:t>Domains</a:t>
-            </a:r>
-          </a:p>
-          <a:p>
-            <a:pPr marL="285750" indent="-285750">
-              <a:buFont typeface="Arial" panose="020B0604020202020204" pitchFamily="34" charset="0"/>
-              <a:buChar char="•"/>
-            </a:pPr>
-            <a:r>
-              <a:rPr lang="en-CA" sz="1400" dirty="0">
-                <a:solidFill>
-                  <a:srgbClr val="4779C6"/>
-                </a:solidFill>
-                <a:latin typeface="Verdana Pro" panose="020B0604030504040204" pitchFamily="34" charset="0"/>
-                <a:cs typeface="Courier New" panose="02070309020205020404" pitchFamily="49" charset="0"/>
-              </a:rPr>
-              <a:t>RSAD2 and Vipirin antiviral (47-239)</a:t>
-            </a:r>
           </a:p>
         </p:txBody>
       </p:sp>
-      <p:sp>
-        <p:nvSpPr>
-          <p:cNvPr id="8" name="TextBox 7">
-            <a:extLst>
-              <a:ext uri="{FF2B5EF4-FFF2-40B4-BE49-F238E27FC236}">
-                <a16:creationId xmlns:a16="http://schemas.microsoft.com/office/drawing/2014/main" id="{238A68DA-70F2-75E2-91D6-2190B751C350}"/>
-              </a:ext>
-            </a:extLst>
-          </p:cNvPr>
-          <p:cNvSpPr txBox="1"/>
-          <p:nvPr/>
-        </p:nvSpPr>
-        <p:spPr>
-          <a:xfrm>
-            <a:off x="4633359" y="5201749"/>
-            <a:ext cx="3240615" cy="646331"/>
-          </a:xfrm>
-          <a:prstGeom prst="rect">
-            <a:avLst/>
-          </a:prstGeom>
-          <a:noFill/>
-        </p:spPr>
-        <p:txBody>
-          <a:bodyPr wrap="square" rtlCol="0">
-            <a:spAutoFit/>
-          </a:bodyPr>
-          <a:lstStyle/>
-          <a:p>
-            <a:r>
-              <a:rPr lang="en-CA" b="1" dirty="0">
-                <a:solidFill>
-                  <a:srgbClr val="E0913A"/>
-                </a:solidFill>
-                <a:latin typeface="Verdana Pro" panose="020B0604030504040204" pitchFamily="34" charset="0"/>
-                <a:cs typeface="Courier New" panose="02070309020205020404" pitchFamily="49" charset="0"/>
-              </a:rPr>
-              <a:t>A0A2K8UJG1</a:t>
-            </a:r>
-          </a:p>
-          <a:p>
-            <a:r>
-              <a:rPr lang="en-CA" dirty="0">
-                <a:solidFill>
-                  <a:srgbClr val="E0913A"/>
-                </a:solidFill>
-                <a:latin typeface="Verdana Pro" panose="020B0604030504040204" pitchFamily="34" charset="0"/>
-                <a:cs typeface="Courier New" panose="02070309020205020404" pitchFamily="49" charset="0"/>
-              </a:rPr>
-              <a:t>(284 AAs)</a:t>
-            </a:r>
-          </a:p>
-        </p:txBody>
-      </p:sp>
-      <p:sp>
-        <p:nvSpPr>
-          <p:cNvPr id="9" name="TextBox 8">
-            <a:extLst>
-              <a:ext uri="{FF2B5EF4-FFF2-40B4-BE49-F238E27FC236}">
-                <a16:creationId xmlns:a16="http://schemas.microsoft.com/office/drawing/2014/main" id="{E01C6E5A-4274-485B-4F48-0589303AC076}"/>
-              </a:ext>
-            </a:extLst>
-          </p:cNvPr>
-          <p:cNvSpPr txBox="1"/>
-          <p:nvPr/>
-        </p:nvSpPr>
-        <p:spPr>
-          <a:xfrm>
-            <a:off x="6125037" y="1491665"/>
-            <a:ext cx="3901015" cy="646331"/>
-          </a:xfrm>
-          <a:prstGeom prst="rect">
-            <a:avLst/>
-          </a:prstGeom>
-          <a:noFill/>
-        </p:spPr>
-        <p:txBody>
-          <a:bodyPr wrap="square" rtlCol="0">
-            <a:spAutoFit/>
-          </a:bodyPr>
-          <a:lstStyle/>
-          <a:p>
-            <a:r>
-              <a:rPr lang="en-CA" b="1" dirty="0">
-                <a:solidFill>
-                  <a:srgbClr val="4779C6"/>
-                </a:solidFill>
-                <a:latin typeface="Verdana Pro" panose="020B0604030504040204" pitchFamily="34" charset="0"/>
-                <a:cs typeface="Courier New" panose="02070309020205020404" pitchFamily="49" charset="0"/>
-              </a:rPr>
-              <a:t>A0A7P0TA11_HUMAN</a:t>
-            </a:r>
-          </a:p>
-          <a:p>
-            <a:r>
-              <a:rPr lang="en-CA" dirty="0">
-                <a:solidFill>
-                  <a:srgbClr val="4779C6"/>
-                </a:solidFill>
-                <a:latin typeface="Verdana Pro" panose="020B0604030504040204" pitchFamily="34" charset="0"/>
-                <a:cs typeface="Courier New" panose="02070309020205020404" pitchFamily="49" charset="0"/>
-              </a:rPr>
-              <a:t>(239 AAs)</a:t>
-            </a:r>
-          </a:p>
-        </p:txBody>
-      </p:sp>
-      <p:sp>
-        <p:nvSpPr>
-          <p:cNvPr id="13" name="TextBox 12">
-            <a:extLst>
-              <a:ext uri="{FF2B5EF4-FFF2-40B4-BE49-F238E27FC236}">
-                <a16:creationId xmlns:a16="http://schemas.microsoft.com/office/drawing/2014/main" id="{04EAE1D1-13B8-A22C-2B0B-B85661FE96C7}"/>
-              </a:ext>
-            </a:extLst>
-          </p:cNvPr>
-          <p:cNvSpPr txBox="1"/>
-          <p:nvPr/>
-        </p:nvSpPr>
-        <p:spPr>
-          <a:xfrm>
-            <a:off x="9945156" y="2429900"/>
-            <a:ext cx="2246844" cy="954107"/>
-          </a:xfrm>
-          <a:prstGeom prst="rect">
-            <a:avLst/>
-          </a:prstGeom>
-          <a:noFill/>
-        </p:spPr>
-        <p:txBody>
-          <a:bodyPr wrap="square" rtlCol="0">
-            <a:spAutoFit/>
-          </a:bodyPr>
-          <a:lstStyle/>
-          <a:p>
-            <a:r>
-              <a:rPr lang="en-US" sz="1400" dirty="0">
-                <a:latin typeface="Verdana Pro" panose="020B0604030504040204" pitchFamily="34" charset="0"/>
-                <a:cs typeface="Courier New" panose="02070309020205020404" pitchFamily="49" charset="0"/>
-              </a:rPr>
-              <a:t>RMSD: 2.70 Å</a:t>
-            </a:r>
-            <a:endParaRPr lang="en-CA" sz="1400" dirty="0">
-              <a:latin typeface="Verdana Pro" panose="020B0604030504040204" pitchFamily="34" charset="0"/>
-              <a:cs typeface="Courier New" panose="02070309020205020404" pitchFamily="49" charset="0"/>
-            </a:endParaRPr>
-          </a:p>
-          <a:p>
-            <a:r>
-              <a:rPr lang="en-US" sz="1400" dirty="0">
-                <a:latin typeface="Verdana Pro" panose="020B0604030504040204" pitchFamily="34" charset="0"/>
-                <a:cs typeface="Courier New" panose="02070309020205020404" pitchFamily="49" charset="0"/>
-              </a:rPr>
-              <a:t>TM-score: 0.64</a:t>
-            </a:r>
-          </a:p>
-          <a:p>
-            <a:r>
-              <a:rPr lang="en-US" sz="1400" dirty="0">
-                <a:latin typeface="Verdana Pro" panose="020B0604030504040204" pitchFamily="34" charset="0"/>
-                <a:cs typeface="Courier New" panose="02070309020205020404" pitchFamily="49" charset="0"/>
-              </a:rPr>
-              <a:t>Identity: 32%</a:t>
-            </a:r>
-          </a:p>
-          <a:p>
-            <a:r>
-              <a:rPr lang="en-US" sz="1400" dirty="0">
-                <a:latin typeface="Verdana Pro" panose="020B0604030504040204" pitchFamily="34" charset="0"/>
-                <a:cs typeface="Courier New" panose="02070309020205020404" pitchFamily="49" charset="0"/>
-              </a:rPr>
-              <a:t>Aligned residues: 186</a:t>
-            </a:r>
-          </a:p>
-        </p:txBody>
-      </p:sp>
-      <p:sp>
-        <p:nvSpPr>
-          <p:cNvPr id="20" name="TextBox 19">
-            <a:extLst>
-              <a:ext uri="{FF2B5EF4-FFF2-40B4-BE49-F238E27FC236}">
-                <a16:creationId xmlns:a16="http://schemas.microsoft.com/office/drawing/2014/main" id="{C05F8735-064F-BBC8-D640-F8AA7E73374A}"/>
-              </a:ext>
-            </a:extLst>
-          </p:cNvPr>
-          <p:cNvSpPr txBox="1"/>
-          <p:nvPr/>
-        </p:nvSpPr>
-        <p:spPr>
-          <a:xfrm>
-            <a:off x="257489" y="3032363"/>
-            <a:ext cx="4324868" cy="2246769"/>
-          </a:xfrm>
-          <a:prstGeom prst="rect">
-            <a:avLst/>
-          </a:prstGeom>
-          <a:noFill/>
-          <a:ln>
-            <a:solidFill>
-              <a:srgbClr val="E0913A"/>
-            </a:solidFill>
-          </a:ln>
-        </p:spPr>
-        <p:txBody>
-          <a:bodyPr wrap="square" rtlCol="0">
-            <a:spAutoFit/>
-          </a:bodyPr>
-          <a:lstStyle/>
-          <a:p>
-            <a:r>
-              <a:rPr lang="en-US" sz="1400" b="1" dirty="0">
-                <a:solidFill>
-                  <a:srgbClr val="E0913A"/>
-                </a:solidFill>
-                <a:latin typeface="Verdana Pro" panose="020B0604030504040204" pitchFamily="34" charset="0"/>
-                <a:cs typeface="Courier New" panose="02070309020205020404" pitchFamily="49" charset="0"/>
-              </a:rPr>
-              <a:t>S-adenosylmethionine-dependent nucleotide dehydratase (Candidatus Thiodictyon syntrophicum)</a:t>
-            </a:r>
-          </a:p>
-          <a:p>
-            <a:endParaRPr lang="en-US" sz="1400" dirty="0">
-              <a:solidFill>
-                <a:srgbClr val="E0913A"/>
-              </a:solidFill>
-              <a:latin typeface="Verdana Pro" panose="020B0604030504040204" pitchFamily="34" charset="0"/>
-              <a:cs typeface="Courier New" panose="02070309020205020404" pitchFamily="49" charset="0"/>
-            </a:endParaRPr>
-          </a:p>
-          <a:p>
-            <a:r>
-              <a:rPr lang="en-US" sz="1400" dirty="0">
-                <a:solidFill>
-                  <a:srgbClr val="E0913A"/>
-                </a:solidFill>
-                <a:latin typeface="Verdana Pro" panose="020B0604030504040204" pitchFamily="34" charset="0"/>
-                <a:cs typeface="Courier New" panose="02070309020205020404" pitchFamily="49" charset="0"/>
-              </a:rPr>
-              <a:t>Molecular functions</a:t>
-            </a:r>
-          </a:p>
-          <a:p>
-            <a:pPr marL="285750" indent="-285750">
-              <a:buFont typeface="Arial" panose="020B0604020202020204" pitchFamily="34" charset="0"/>
-              <a:buChar char="•"/>
-            </a:pPr>
-            <a:r>
-              <a:rPr lang="en-US" sz="1400" dirty="0">
-                <a:solidFill>
-                  <a:srgbClr val="E0913A"/>
-                </a:solidFill>
-                <a:latin typeface="Verdana Pro" panose="020B0604030504040204" pitchFamily="34" charset="0"/>
-                <a:cs typeface="Courier New" panose="02070309020205020404" pitchFamily="49" charset="0"/>
-              </a:rPr>
-              <a:t>Catalytic activity</a:t>
-            </a:r>
-          </a:p>
-          <a:p>
-            <a:pPr marL="285750" indent="-285750">
-              <a:buFont typeface="Arial" panose="020B0604020202020204" pitchFamily="34" charset="0"/>
-              <a:buChar char="•"/>
-            </a:pPr>
-            <a:r>
-              <a:rPr lang="en-US" sz="1400" dirty="0">
-                <a:solidFill>
-                  <a:srgbClr val="E0913A"/>
-                </a:solidFill>
-                <a:latin typeface="Verdana Pro" panose="020B0604030504040204" pitchFamily="34" charset="0"/>
-                <a:cs typeface="Courier New" panose="02070309020205020404" pitchFamily="49" charset="0"/>
-              </a:rPr>
-              <a:t>Small molecule binding</a:t>
-            </a:r>
-          </a:p>
-          <a:p>
-            <a:endParaRPr lang="en-US" sz="1400" dirty="0">
-              <a:solidFill>
-                <a:srgbClr val="E0913A"/>
-              </a:solidFill>
-              <a:latin typeface="Verdana Pro" panose="020B0604030504040204" pitchFamily="34" charset="0"/>
-              <a:cs typeface="Courier New" panose="02070309020205020404" pitchFamily="49" charset="0"/>
-            </a:endParaRPr>
-          </a:p>
-          <a:p>
-            <a:r>
-              <a:rPr lang="en-US" sz="1400" dirty="0">
-                <a:solidFill>
-                  <a:srgbClr val="E0913A"/>
-                </a:solidFill>
-                <a:latin typeface="Verdana Pro" panose="020B0604030504040204" pitchFamily="34" charset="0"/>
-                <a:cs typeface="Courier New" panose="02070309020205020404" pitchFamily="49" charset="0"/>
-              </a:rPr>
-              <a:t>Biological functions</a:t>
-            </a:r>
-          </a:p>
-          <a:p>
-            <a:pPr marL="285750" indent="-285750">
-              <a:buFont typeface="Arial" panose="020B0604020202020204" pitchFamily="34" charset="0"/>
-              <a:buChar char="•"/>
-            </a:pPr>
-            <a:r>
-              <a:rPr lang="en-US" sz="1400" dirty="0">
-                <a:solidFill>
-                  <a:srgbClr val="E0913A"/>
-                </a:solidFill>
-                <a:latin typeface="Verdana Pro" panose="020B0604030504040204" pitchFamily="34" charset="0"/>
-                <a:cs typeface="Courier New" panose="02070309020205020404" pitchFamily="49" charset="0"/>
-              </a:rPr>
-              <a:t>response to stimulus</a:t>
-            </a:r>
-          </a:p>
-        </p:txBody>
-      </p:sp>
-      <p:pic>
-        <p:nvPicPr>
-          <p:cNvPr id="22" name="Picture 21">
-            <a:extLst>
-              <a:ext uri="{FF2B5EF4-FFF2-40B4-BE49-F238E27FC236}">
-                <a16:creationId xmlns:a16="http://schemas.microsoft.com/office/drawing/2014/main" id="{AF30A37C-8979-D23A-E4B7-41EECBCCD317}"/>
-              </a:ext>
-            </a:extLst>
-          </p:cNvPr>
-          <p:cNvPicPr>
-            <a:picLocks noChangeAspect="1"/>
-          </p:cNvPicPr>
-          <p:nvPr/>
-        </p:nvPicPr>
-        <p:blipFill>
-          <a:blip r:embed="rId4"/>
-          <a:stretch>
-            <a:fillRect/>
-          </a:stretch>
-        </p:blipFill>
-        <p:spPr>
-          <a:xfrm>
-            <a:off x="4734933" y="3032363"/>
-            <a:ext cx="1361067" cy="1141343"/>
-          </a:xfrm>
-          <a:prstGeom prst="rect">
-            <a:avLst/>
-          </a:prstGeom>
-        </p:spPr>
-      </p:pic>
-      <p:grpSp>
-        <p:nvGrpSpPr>
-          <p:cNvPr id="24" name="Group 23">
-            <a:extLst>
-              <a:ext uri="{FF2B5EF4-FFF2-40B4-BE49-F238E27FC236}">
-                <a16:creationId xmlns:a16="http://schemas.microsoft.com/office/drawing/2014/main" id="{B6788DBC-D03F-BBC1-0A9D-DCB4408A69B4}"/>
-              </a:ext>
-            </a:extLst>
-          </p:cNvPr>
-          <p:cNvGrpSpPr/>
-          <p:nvPr/>
-        </p:nvGrpSpPr>
-        <p:grpSpPr>
-          <a:xfrm>
-            <a:off x="4722741" y="4185841"/>
-            <a:ext cx="2850668" cy="946413"/>
-            <a:chOff x="6640481" y="349968"/>
-            <a:chExt cx="2850668" cy="946413"/>
-          </a:xfrm>
-        </p:grpSpPr>
-        <p:sp>
-          <p:nvSpPr>
-            <p:cNvPr id="25" name="TextBox 24">
-              <a:extLst>
-                <a:ext uri="{FF2B5EF4-FFF2-40B4-BE49-F238E27FC236}">
-                  <a16:creationId xmlns:a16="http://schemas.microsoft.com/office/drawing/2014/main" id="{F17C6C5E-698C-586F-23BD-40C622987323}"/>
-                </a:ext>
-              </a:extLst>
-            </p:cNvPr>
-            <p:cNvSpPr txBox="1"/>
-            <p:nvPr/>
-          </p:nvSpPr>
-          <p:spPr>
-            <a:xfrm>
-              <a:off x="6795573" y="349968"/>
-              <a:ext cx="2695576" cy="946413"/>
-            </a:xfrm>
-            <a:prstGeom prst="rect">
-              <a:avLst/>
-            </a:prstGeom>
-            <a:noFill/>
-          </p:spPr>
-          <p:txBody>
-            <a:bodyPr wrap="square" rtlCol="0">
-              <a:spAutoFit/>
-            </a:bodyPr>
-            <a:lstStyle/>
-            <a:p>
-              <a:pPr>
-                <a:spcAft>
-                  <a:spcPts val="300"/>
-                </a:spcAft>
-              </a:pPr>
-              <a:r>
-                <a:rPr lang="en-US" sz="1200" dirty="0">
-                  <a:latin typeface="Verdana Pro" panose="020B0604030504040204" pitchFamily="34" charset="0"/>
-                </a:rPr>
-                <a:t>Very high (pLDDT &gt; 90)</a:t>
-              </a:r>
-            </a:p>
-            <a:p>
-              <a:pPr>
-                <a:spcAft>
-                  <a:spcPts val="300"/>
-                </a:spcAft>
-              </a:pPr>
-              <a:r>
-                <a:rPr lang="en-US" sz="1200" dirty="0">
-                  <a:latin typeface="Verdana Pro" panose="020B0604030504040204" pitchFamily="34" charset="0"/>
-                </a:rPr>
-                <a:t>Confident (90 &gt; pLDDT &gt; 70)</a:t>
-              </a:r>
-            </a:p>
-            <a:p>
-              <a:pPr>
-                <a:spcAft>
-                  <a:spcPts val="300"/>
-                </a:spcAft>
-              </a:pPr>
-              <a:r>
-                <a:rPr lang="en-US" sz="1200" dirty="0">
-                  <a:latin typeface="Verdana Pro" panose="020B0604030504040204" pitchFamily="34" charset="0"/>
-                </a:rPr>
-                <a:t>Low (70 &gt; pLDDT &gt; 50)</a:t>
-              </a:r>
-            </a:p>
-            <a:p>
-              <a:pPr>
-                <a:spcAft>
-                  <a:spcPts val="300"/>
-                </a:spcAft>
-              </a:pPr>
-              <a:r>
-                <a:rPr lang="en-US" sz="1200" dirty="0">
-                  <a:latin typeface="Verdana Pro" panose="020B0604030504040204" pitchFamily="34" charset="0"/>
-                </a:rPr>
-                <a:t>Very low (pLDDT &lt; 50) </a:t>
-              </a:r>
-              <a:endParaRPr lang="en-CA" sz="1200" dirty="0">
-                <a:latin typeface="Verdana Pro" panose="020B0604030504040204" pitchFamily="34" charset="0"/>
-              </a:endParaRPr>
-            </a:p>
-          </p:txBody>
-        </p:sp>
-        <p:sp>
-          <p:nvSpPr>
-            <p:cNvPr id="26" name="Rectangle 25">
-              <a:extLst>
-                <a:ext uri="{FF2B5EF4-FFF2-40B4-BE49-F238E27FC236}">
-                  <a16:creationId xmlns:a16="http://schemas.microsoft.com/office/drawing/2014/main" id="{EB550897-651D-B780-0A9F-F2F265225A48}"/>
-                </a:ext>
-              </a:extLst>
-            </p:cNvPr>
-            <p:cNvSpPr/>
-            <p:nvPr/>
-          </p:nvSpPr>
-          <p:spPr>
-            <a:xfrm>
-              <a:off x="6640481" y="419947"/>
-              <a:ext cx="182770" cy="152362"/>
-            </a:xfrm>
-            <a:prstGeom prst="rect">
-              <a:avLst/>
-            </a:prstGeom>
-            <a:solidFill>
-              <a:srgbClr val="024BC3"/>
-            </a:solidFill>
-            <a:ln>
-              <a:noFill/>
-            </a:ln>
-          </p:spPr>
-          <p:style>
-            <a:lnRef idx="2">
-              <a:schemeClr val="accent1">
-                <a:shade val="15000"/>
-              </a:schemeClr>
-            </a:lnRef>
-            <a:fillRef idx="1">
-              <a:schemeClr val="accent1"/>
-            </a:fillRef>
-            <a:effectRef idx="0">
-              <a:schemeClr val="accent1"/>
-            </a:effectRef>
-            <a:fontRef idx="minor">
-              <a:schemeClr val="lt1"/>
-            </a:fontRef>
-          </p:style>
-          <p:txBody>
-            <a:bodyPr rtlCol="0" anchor="ctr"/>
-            <a:lstStyle/>
-            <a:p>
-              <a:pPr algn="ctr"/>
-              <a:endParaRPr lang="en-CA"/>
-            </a:p>
-          </p:txBody>
-        </p:sp>
-        <p:sp>
-          <p:nvSpPr>
-            <p:cNvPr id="27" name="Rectangle 26">
-              <a:extLst>
-                <a:ext uri="{FF2B5EF4-FFF2-40B4-BE49-F238E27FC236}">
-                  <a16:creationId xmlns:a16="http://schemas.microsoft.com/office/drawing/2014/main" id="{75921FE2-76FB-4B99-83EA-ED1C1B39C37C}"/>
-                </a:ext>
-              </a:extLst>
-            </p:cNvPr>
-            <p:cNvSpPr/>
-            <p:nvPr/>
-          </p:nvSpPr>
-          <p:spPr>
-            <a:xfrm>
-              <a:off x="6640481" y="630255"/>
-              <a:ext cx="182770" cy="152362"/>
-            </a:xfrm>
-            <a:prstGeom prst="rect">
-              <a:avLst/>
-            </a:prstGeom>
-            <a:solidFill>
-              <a:srgbClr val="55A9CB"/>
-            </a:solidFill>
-            <a:ln>
-              <a:noFill/>
-            </a:ln>
-          </p:spPr>
-          <p:style>
-            <a:lnRef idx="2">
-              <a:schemeClr val="accent1">
-                <a:shade val="15000"/>
-              </a:schemeClr>
-            </a:lnRef>
-            <a:fillRef idx="1">
-              <a:schemeClr val="accent1"/>
-            </a:fillRef>
-            <a:effectRef idx="0">
-              <a:schemeClr val="accent1"/>
-            </a:effectRef>
-            <a:fontRef idx="minor">
-              <a:schemeClr val="lt1"/>
-            </a:fontRef>
-          </p:style>
-          <p:txBody>
-            <a:bodyPr rtlCol="0" anchor="ctr"/>
-            <a:lstStyle/>
-            <a:p>
-              <a:pPr algn="ctr"/>
-              <a:endParaRPr lang="en-CA"/>
-            </a:p>
-          </p:txBody>
-        </p:sp>
-        <p:sp>
-          <p:nvSpPr>
-            <p:cNvPr id="28" name="Rectangle 27">
-              <a:extLst>
-                <a:ext uri="{FF2B5EF4-FFF2-40B4-BE49-F238E27FC236}">
-                  <a16:creationId xmlns:a16="http://schemas.microsoft.com/office/drawing/2014/main" id="{29F97C2B-89B5-6EC5-035F-13BC3752ED7A}"/>
-                </a:ext>
-              </a:extLst>
-            </p:cNvPr>
-            <p:cNvSpPr/>
-            <p:nvPr/>
-          </p:nvSpPr>
-          <p:spPr>
-            <a:xfrm>
-              <a:off x="6640481" y="852112"/>
-              <a:ext cx="182770" cy="152362"/>
-            </a:xfrm>
-            <a:prstGeom prst="rect">
-              <a:avLst/>
-            </a:prstGeom>
-            <a:solidFill>
-              <a:srgbClr val="E6C612"/>
-            </a:solidFill>
-            <a:ln>
-              <a:noFill/>
-            </a:ln>
-          </p:spPr>
-          <p:style>
-            <a:lnRef idx="2">
-              <a:schemeClr val="accent1">
-                <a:shade val="15000"/>
-              </a:schemeClr>
-            </a:lnRef>
-            <a:fillRef idx="1">
-              <a:schemeClr val="accent1"/>
-            </a:fillRef>
-            <a:effectRef idx="0">
-              <a:schemeClr val="accent1"/>
-            </a:effectRef>
-            <a:fontRef idx="minor">
-              <a:schemeClr val="lt1"/>
-            </a:fontRef>
-          </p:style>
-          <p:txBody>
-            <a:bodyPr rtlCol="0" anchor="ctr"/>
-            <a:lstStyle/>
-            <a:p>
-              <a:pPr algn="ctr"/>
-              <a:endParaRPr lang="en-CA"/>
-            </a:p>
-          </p:txBody>
-        </p:sp>
-        <p:sp>
-          <p:nvSpPr>
-            <p:cNvPr id="29" name="Rectangle 28">
-              <a:extLst>
-                <a:ext uri="{FF2B5EF4-FFF2-40B4-BE49-F238E27FC236}">
-                  <a16:creationId xmlns:a16="http://schemas.microsoft.com/office/drawing/2014/main" id="{AB12A31B-6D8F-2704-A54A-6A778ADE1465}"/>
-                </a:ext>
-              </a:extLst>
-            </p:cNvPr>
-            <p:cNvSpPr/>
-            <p:nvPr/>
-          </p:nvSpPr>
-          <p:spPr>
-            <a:xfrm>
-              <a:off x="6640481" y="1087420"/>
-              <a:ext cx="182770" cy="152362"/>
-            </a:xfrm>
-            <a:prstGeom prst="rect">
-              <a:avLst/>
-            </a:prstGeom>
-            <a:solidFill>
-              <a:srgbClr val="E56D3B"/>
-            </a:solidFill>
-            <a:ln>
-              <a:noFill/>
-            </a:ln>
-          </p:spPr>
-          <p:style>
-            <a:lnRef idx="2">
-              <a:schemeClr val="accent1">
-                <a:shade val="15000"/>
-              </a:schemeClr>
-            </a:lnRef>
-            <a:fillRef idx="1">
-              <a:schemeClr val="accent1"/>
-            </a:fillRef>
-            <a:effectRef idx="0">
-              <a:schemeClr val="accent1"/>
-            </a:effectRef>
-            <a:fontRef idx="minor">
-              <a:schemeClr val="lt1"/>
-            </a:fontRef>
-          </p:style>
-          <p:txBody>
-            <a:bodyPr rtlCol="0" anchor="ctr"/>
-            <a:lstStyle/>
-            <a:p>
-              <a:pPr algn="ctr"/>
-              <a:endParaRPr lang="en-CA"/>
-            </a:p>
-          </p:txBody>
-        </p:sp>
-      </p:grpSp>
-      <p:pic>
-        <p:nvPicPr>
-          <p:cNvPr id="3" name="Picture 2">
-            <a:extLst>
-              <a:ext uri="{FF2B5EF4-FFF2-40B4-BE49-F238E27FC236}">
-                <a16:creationId xmlns:a16="http://schemas.microsoft.com/office/drawing/2014/main" id="{17D92A1D-590F-FF4E-6DE1-40E6FA0E344D}"/>
-              </a:ext>
-            </a:extLst>
-          </p:cNvPr>
-          <p:cNvPicPr>
-            <a:picLocks noChangeAspect="1"/>
-          </p:cNvPicPr>
-          <p:nvPr/>
-        </p:nvPicPr>
-        <p:blipFill>
-          <a:blip r:embed="rId5"/>
-          <a:srcRect l="4614" r="6467"/>
-          <a:stretch>
-            <a:fillRect/>
-          </a:stretch>
-        </p:blipFill>
-        <p:spPr>
-          <a:xfrm>
-            <a:off x="6147116" y="268663"/>
-            <a:ext cx="1371429" cy="1223002"/>
-          </a:xfrm>
-          <a:prstGeom prst="rect">
-            <a:avLst/>
-          </a:prstGeom>
-        </p:spPr>
-      </p:pic>
     </p:spTree>
     <p:extLst>
       <p:ext uri="{BB962C8B-B14F-4D97-AF65-F5344CB8AC3E}">
-        <p14:creationId xmlns:p14="http://schemas.microsoft.com/office/powerpoint/2010/main" val="2396520108"/>
+        <p14:creationId xmlns:p14="http://schemas.microsoft.com/office/powerpoint/2010/main" val="3504614833"/>
       </p:ext>
     </p:extLst>
   </p:cSld>

--- a/vis/reports/2026-02-19_projectUpdate_1_jmoran.pptx
+++ b/vis/reports/2026-02-19_projectUpdate_1_jmoran.pptx
@@ -5979,7 +5979,7 @@
         <p:spPr>
           <a:xfrm>
             <a:off x="845609" y="1874728"/>
-            <a:ext cx="9272016" cy="2769989"/>
+            <a:ext cx="9272016" cy="3123932"/>
           </a:xfrm>
           <a:prstGeom prst="rect">
             <a:avLst/>
@@ -6037,12 +6037,20 @@
             </a:r>
           </a:p>
           <a:p>
-            <a:pPr marL="342900" lvl="0" indent="-342900">
+            <a:pPr lvl="0">
               <a:spcAft>
                 <a:spcPts val="600"/>
               </a:spcAft>
-              <a:buFont typeface="+mj-lt"/>
-              <a:buAutoNum type="arabicPeriod"/>
+            </a:pPr>
+            <a:endParaRPr lang="en-US" dirty="0">
+              <a:latin typeface="Georgia Pro" panose="02040502050405020303" pitchFamily="18" charset="0"/>
+            </a:endParaRPr>
+          </a:p>
+          <a:p>
+            <a:pPr lvl="0">
+              <a:spcAft>
+                <a:spcPts val="600"/>
+              </a:spcAft>
             </a:pPr>
             <a:endParaRPr lang="en-US" dirty="0">
               <a:latin typeface="Georgia Pro" panose="02040502050405020303" pitchFamily="18" charset="0"/>
@@ -7089,13 +7097,13 @@
                   <a:rPr lang="en-US" sz="1600" b="1" dirty="0">
                     <a:latin typeface="Georgia Pro" panose="02040502050405020303" pitchFamily="18" charset="0"/>
                   </a:rPr>
-                  <a:t>Foldseek</a:t>
+                  <a:t>Foldseek cluster</a:t>
                 </a:r>
                 <a:r>
                   <a:rPr lang="en-US" sz="1600" dirty="0">
                     <a:latin typeface="Georgia Pro" panose="02040502050405020303" pitchFamily="18" charset="0"/>
                   </a:rPr>
-                  <a:t>, a protein structure search algorithm, depends on </a:t>
+                  <a:t> depends on </a:t>
                 </a:r>
                 <a:r>
                   <a:rPr lang="en-US" sz="1600" b="1" dirty="0">
@@ -11176,13 +11184,20 @@
           <a:lstStyle/>
           <a:p>
             <a:r>
-              <a:rPr lang="en-US" sz="1400">
+              <a:rPr lang="en-US" sz="1400" dirty="0" err="1">
                 <a:latin typeface="Courier New" panose="02070309020205020404" pitchFamily="49" charset="0"/>
                 <a:cs typeface="Courier New" panose="02070309020205020404" pitchFamily="49" charset="0"/>
               </a:rPr>
-              <a:t>Protein_length_difference ≤ 0.05 </a:t>
-            </a:r>
-            <a:endParaRPr lang="en-CA" sz="1400">
+              <a:t>Protein_length_difference</a:t>
+            </a:r>
+            <a:r>
+              <a:rPr lang="en-US" sz="1400" dirty="0">
+                <a:latin typeface="Courier New" panose="02070309020205020404" pitchFamily="49" charset="0"/>
+                <a:cs typeface="Courier New" panose="02070309020205020404" pitchFamily="49" charset="0"/>
+              </a:rPr>
+              <a:t> ≤ 0.05 </a:t>
+            </a:r>
+            <a:endParaRPr lang="en-CA" sz="1400" dirty="0">
               <a:latin typeface="Courier New" panose="02070309020205020404" pitchFamily="49" charset="0"/>
               <a:cs typeface="Courier New" panose="02070309020205020404" pitchFamily="49" charset="0"/>
             </a:endParaRPr>
@@ -11240,43 +11255,6 @@
           </a:p>
         </p:txBody>
       </p:sp>
-      <p:pic>
-        <p:nvPicPr>
-          <p:cNvPr id="17" name="Graphic 16">
-            <a:extLst>
-              <a:ext uri="{FF2B5EF4-FFF2-40B4-BE49-F238E27FC236}">
-                <a16:creationId xmlns:a16="http://schemas.microsoft.com/office/drawing/2014/main" id="{4ECE2338-E962-3219-2BEC-675AA0198A06}"/>
-              </a:ext>
-            </a:extLst>
-          </p:cNvPr>
-          <p:cNvPicPr>
-            <a:picLocks noChangeAspect="1"/>
-          </p:cNvPicPr>
-          <p:nvPr/>
-        </p:nvPicPr>
-        <p:blipFill>
-          <a:blip r:embed="rId2">
-            <a:extLst>
-              <a:ext uri="{96DAC541-7B7A-43D3-8B79-37D633B846F1}">
-                <asvg:svgBlip xmlns:asvg="http://schemas.microsoft.com/office/drawing/2016/SVG/main" r:embed="rId3"/>
-              </a:ext>
-            </a:extLst>
-          </a:blip>
-          <a:srcRect l="5848" t="11704" r="7567"/>
-          <a:stretch>
-            <a:fillRect/>
-          </a:stretch>
-        </p:blipFill>
-        <p:spPr>
-          <a:xfrm>
-            <a:off x="7134078" y="3630656"/>
-            <a:ext cx="4901914" cy="2999231"/>
-          </a:xfrm>
-          <a:prstGeom prst="rect">
-            <a:avLst/>
-          </a:prstGeom>
-        </p:spPr>
-      </p:pic>
       <p:sp>
         <p:nvSpPr>
           <p:cNvPr id="18" name="Slide Number Placeholder 17">
@@ -11395,6 +11373,43 @@
           </a:p>
         </p:txBody>
       </p:sp>
+      <p:pic>
+        <p:nvPicPr>
+          <p:cNvPr id="17" name="Graphic 16">
+            <a:extLst>
+              <a:ext uri="{FF2B5EF4-FFF2-40B4-BE49-F238E27FC236}">
+                <a16:creationId xmlns:a16="http://schemas.microsoft.com/office/drawing/2014/main" id="{4ECE2338-E962-3219-2BEC-675AA0198A06}"/>
+              </a:ext>
+            </a:extLst>
+          </p:cNvPr>
+          <p:cNvPicPr>
+            <a:picLocks noChangeAspect="1"/>
+          </p:cNvPicPr>
+          <p:nvPr/>
+        </p:nvPicPr>
+        <p:blipFill>
+          <a:blip r:embed="rId2">
+            <a:extLst>
+              <a:ext uri="{96DAC541-7B7A-43D3-8B79-37D633B846F1}">
+                <asvg:svgBlip xmlns:asvg="http://schemas.microsoft.com/office/drawing/2016/SVG/main" r:embed="rId3"/>
+              </a:ext>
+            </a:extLst>
+          </a:blip>
+          <a:srcRect l="5848" t="11704" r="7567"/>
+          <a:stretch>
+            <a:fillRect/>
+          </a:stretch>
+        </p:blipFill>
+        <p:spPr>
+          <a:xfrm>
+            <a:off x="6952923" y="3358681"/>
+            <a:ext cx="4901914" cy="2999231"/>
+          </a:xfrm>
+          <a:prstGeom prst="rect">
+            <a:avLst/>
+          </a:prstGeom>
+        </p:spPr>
+      </p:pic>
     </p:spTree>
     <p:extLst>
       <p:ext uri="{BB962C8B-B14F-4D97-AF65-F5344CB8AC3E}">
@@ -17634,7 +17649,7 @@
         </p:nvSpPr>
         <p:spPr>
           <a:xfrm>
-            <a:off x="709871" y="3310854"/>
+            <a:off x="709871" y="3388488"/>
             <a:ext cx="4324868" cy="523220"/>
           </a:xfrm>
           <a:prstGeom prst="rect">
